--- a/JPA_Troubleshooting_und_Best_Practices.pptx
+++ b/JPA_Troubleshooting_und_Best_Practices.pptx
@@ -22,6 +22,11 @@
     <p:sldId id="270" r:id="rId21"/>
     <p:sldId id="271" r:id="rId22"/>
     <p:sldId id="272" r:id="rId23"/>
+    <p:sldId id="273" r:id="rId24"/>
+    <p:sldId id="274" r:id="rId25"/>
+    <p:sldId id="275" r:id="rId26"/>
+    <p:sldId id="276" r:id="rId27"/>
+    <p:sldId id="277" r:id="rId28"/>
   </p:sldIdLst>
   <p:sldSz cx="12191695" cy="6858000" type="screen4x3"/>
   <p:notesSz cx="6858000" cy="9144000"/>
@@ -3221,7 +3226,7 @@
               </a:defRPr>
             </a:pPr>
             <a:r>
-              <a:t>Praxis-Leitfaden: Typische Fallstricke, Fehlermuster, Architekturregeln &amp; Referenztabellen</a:t>
+              <a:t>Praxis-Leitfaden: Typische Fallstricke, Fehlermuster, Concurrency &amp; Architekturregeln</a:t>
             </a:r>
           </a:p>
           <a:p>
@@ -3234,7 +3239,7 @@
               </a:defRPr>
             </a:pPr>
             <a:r>
-              <a:t>Enterprise Java Persistence | Jakarta Persistence &amp; Hibernate ORM</a:t>
+              <a:t>Enterprise Java Persistence | Jakarta Persistence 3.0 &amp; Hibernate ORM 6</a:t>
             </a:r>
           </a:p>
         </p:txBody>
@@ -3325,7 +3330,7 @@
           <a:noFill/>
         </p:spPr>
         <p:txBody>
-          <a:bodyPr wrap="square">
+          <a:bodyPr wrap="square" lIns="0" rIns="0" tIns="0" bIns="0">
             <a:spAutoFit/>
           </a:bodyPr>
           <a:lstStyle/>
@@ -3339,7 +3344,7 @@
               </a:defRPr>
             </a:pPr>
             <a:r>
-              <a:t>ARCHITECTURE &amp; BEST PRACTICES</a:t>
+              <a:t>TROUBLESHOOTING &amp; MAPPING</a:t>
             </a:r>
           </a:p>
         </p:txBody>
@@ -3361,13 +3366,13 @@
           <a:noFill/>
         </p:spPr>
         <p:txBody>
-          <a:bodyPr wrap="square">
+          <a:bodyPr wrap="square" lIns="0" rIns="0" tIns="0" bIns="0">
             <a:spAutoFit/>
           </a:bodyPr>
           <a:lstStyle/>
           <a:p>
             <a:pPr>
-              <a:defRPr sz="2200" b="1">
+              <a:defRPr sz="2100" b="1">
                 <a:solidFill>
                   <a:srgbClr val="1E293B"/>
                 </a:solidFill>
@@ -3375,7 +3380,7 @@
               </a:defRPr>
             </a:pPr>
             <a:r>
-              <a:t>2.2 Defensive Synchronisation bidirektionaler Beziehungen</a:t>
+              <a:t>1.8 @MappedSuperclass vs. Entity Vererbung</a:t>
             </a:r>
           </a:p>
         </p:txBody>
@@ -3389,7 +3394,7 @@
         <p:spPr>
           <a:xfrm>
             <a:off x="731520" y="1463040"/>
-            <a:ext cx="5212080" cy="4754880"/>
+            <a:ext cx="5212080" cy="4846320"/>
           </a:xfrm>
           <a:prstGeom prst="roundRect">
             <a:avLst/>
@@ -3434,7 +3439,7 @@
         <p:spPr>
           <a:xfrm>
             <a:off x="914400" y="1645920"/>
-            <a:ext cx="4846320" cy="4389120"/>
+            <a:ext cx="4846320" cy="4480560"/>
           </a:xfrm>
           <a:prstGeom prst="rect">
             <a:avLst/>
@@ -3453,12 +3458,76 @@
               </a:spcAft>
               <a:defRPr sz="1400" b="1">
                 <a:solidFill>
-                  <a:srgbClr val="1E293B"/>
-                </a:solidFill>
-              </a:defRPr>
-            </a:pPr>
-            <a:r>
-              <a:t>Das Problem im Java-Hauptspeicher</a:t>
+                  <a:srgbClr val="2563EB"/>
+                </a:solidFill>
+              </a:defRPr>
+            </a:pPr>
+            <a:r>
+              <a:t>@MappedSuperclass (Technische Basisklasse)</a:t>
+            </a:r>
+          </a:p>
+          <a:p>
+            <a:pPr>
+              <a:spcAft>
+                <a:spcPts val="600"/>
+              </a:spcAft>
+              <a:defRPr sz="1150">
+                <a:solidFill>
+                  <a:srgbClr val="0F172A"/>
+                </a:solidFill>
+                <a:latin typeface="Segoe UI"/>
+              </a:defRPr>
+            </a:pPr>
+            <a:r>
+              <a:t>• Keine eigene Tabelle in der Datenbank.</a:t>
+            </a:r>
+          </a:p>
+          <a:p>
+            <a:pPr>
+              <a:spcAft>
+                <a:spcPts val="600"/>
+              </a:spcAft>
+              <a:defRPr sz="1150">
+                <a:solidFill>
+                  <a:srgbClr val="0F172A"/>
+                </a:solidFill>
+                <a:latin typeface="Segoe UI"/>
+              </a:defRPr>
+            </a:pPr>
+            <a:r>
+              <a:t>• Vererbt Attribute (z.B. @Id, @Version, createdAt, createdBy) an konkrete Unterklassen.</a:t>
+            </a:r>
+          </a:p>
+          <a:p>
+            <a:pPr>
+              <a:spcAft>
+                <a:spcPts val="600"/>
+              </a:spcAft>
+              <a:defRPr sz="1150">
+                <a:solidFill>
+                  <a:srgbClr val="0F172A"/>
+                </a:solidFill>
+                <a:latin typeface="Segoe UI"/>
+              </a:defRPr>
+            </a:pPr>
+            <a:r>
+              <a:t>• Nicht polymorph abfragbar: 'SELECT b FROM BaseEntity b' ist UNZULÄSSIG!</a:t>
+            </a:r>
+          </a:p>
+          <a:p>
+            <a:pPr>
+              <a:spcAft>
+                <a:spcPts val="600"/>
+              </a:spcAft>
+              <a:defRPr sz="1150">
+                <a:solidFill>
+                  <a:srgbClr val="0F172A"/>
+                </a:solidFill>
+                <a:latin typeface="Segoe UI"/>
+              </a:defRPr>
+            </a:pPr>
+            <a:r>
+              <a:t>• Ideal für Domain-Driven Design Basistypen und Audit-Felder.</a:t>
             </a:r>
           </a:p>
           <a:p>
@@ -3466,63 +3535,31 @@
               <a:spcAft>
                 <a:spcPts val="800"/>
               </a:spcAft>
-              <a:defRPr sz="1200">
-                <a:solidFill>
-                  <a:srgbClr val="0F172A"/>
-                </a:solidFill>
-                <a:latin typeface="Segoe UI"/>
-              </a:defRPr>
-            </a:pPr>
-            <a:r>
-              <a:t>• In relationalen DBs existiert nur 1 Fremdschlüsselspalte.</a:t>
-            </a:r>
-          </a:p>
-          <a:p>
-            <a:pPr>
-              <a:spcAft>
-                <a:spcPts val="800"/>
-              </a:spcAft>
-              <a:defRPr sz="1200">
-                <a:solidFill>
-                  <a:srgbClr val="0F172A"/>
-                </a:solidFill>
-                <a:latin typeface="Segoe UI"/>
-              </a:defRPr>
-            </a:pPr>
-            <a:r>
-              <a:t>• In Java existieren jedoch 2 unabhängige Referenzen (Shop.vehicles und Vehicle.shop).</a:t>
-            </a:r>
-          </a:p>
-          <a:p>
-            <a:pPr>
-              <a:spcAft>
-                <a:spcPts val="800"/>
-              </a:spcAft>
-              <a:defRPr sz="1200">
-                <a:solidFill>
-                  <a:srgbClr val="0F172A"/>
-                </a:solidFill>
-                <a:latin typeface="Segoe UI"/>
-              </a:defRPr>
-            </a:pPr>
-            <a:r>
-              <a:t>• Wird nur vehicle.setShop(shop) aufgerufen, weiß shop.getVehicles() im Speicher nichts davon!</a:t>
-            </a:r>
-          </a:p>
-          <a:p>
-            <a:pPr>
-              <a:spcAft>
-                <a:spcPts val="800"/>
-              </a:spcAft>
-              <a:defRPr sz="1200">
-                <a:solidFill>
-                  <a:srgbClr val="0F172A"/>
-                </a:solidFill>
-                <a:latin typeface="Segoe UI"/>
-              </a:defRPr>
-            </a:pPr>
-            <a:r>
-              <a:t>• Folge: Inkonsistente Zustände im Persistence Context und Unit Tests schlagen fehl.</a:t>
+              <a:defRPr sz="1000">
+                <a:solidFill>
+                  <a:srgbClr val="334155"/>
+                </a:solidFill>
+                <a:latin typeface="Consolas"/>
+              </a:defRPr>
+            </a:pPr>
+            <a:r>
+              <a:t>@MappedSuperclass</a:t>
+            </a:r>
+            <a:br/>
+            <a:r>
+              <a:t>public abstract class AbstractEntity {</a:t>
+            </a:r>
+            <a:br/>
+            <a:r>
+              <a:t>    @Id @GeneratedValue private Long id;</a:t>
+            </a:r>
+            <a:br/>
+            <a:r>
+              <a:t>    @Version private Long version;</a:t>
+            </a:r>
+            <a:br/>
+            <a:r>
+              <a:t>}</a:t>
             </a:r>
           </a:p>
         </p:txBody>
@@ -3536,17 +3573,17 @@
         <p:spPr>
           <a:xfrm>
             <a:off x="6217920" y="1463040"/>
-            <a:ext cx="5212080" cy="4754880"/>
+            <a:ext cx="5212080" cy="4846320"/>
           </a:xfrm>
           <a:prstGeom prst="roundRect">
             <a:avLst/>
           </a:prstGeom>
           <a:solidFill>
-            <a:srgbClr val="F0FDF4"/>
+            <a:srgbClr val="FFFFFF"/>
           </a:solidFill>
           <a:ln w="19050">
             <a:solidFill>
-              <a:srgbClr val="BBF7D0"/>
+              <a:srgbClr val="E2E8F0"/>
             </a:solidFill>
           </a:ln>
         </p:spPr>
@@ -3581,7 +3618,7 @@
         <p:spPr>
           <a:xfrm>
             <a:off x="6400800" y="1645920"/>
-            <a:ext cx="4846320" cy="4389120"/>
+            <a:ext cx="4846320" cy="4480560"/>
           </a:xfrm>
           <a:prstGeom prst="rect">
             <a:avLst/>
@@ -3605,70 +3642,87 @@
               </a:defRPr>
             </a:pPr>
             <a:r>
-              <a:t>Best Practice: Helper-Methoden in Entity</a:t>
-            </a:r>
-          </a:p>
-          <a:p>
-            <a:pPr>
-              <a:defRPr sz="1000">
-                <a:solidFill>
-                  <a:srgbClr val="1E293B"/>
-                </a:solidFill>
-                <a:latin typeface="Courier New"/>
-              </a:defRPr>
-            </a:pPr>
-            <a:r>
-              <a:t>@Entity</a:t>
-            </a:r>
-            <a:br/>
-            <a:r>
-              <a:t>public class Shop {</a:t>
-            </a:r>
-            <a:br/>
-            <a:r>
-              <a:t>    @OneToMany(mappedBy = "shop", cascade = CascadeType.ALL, orphanRemoval = true)</a:t>
-            </a:r>
-            <a:br/>
-            <a:r>
-              <a:t>    private Set&lt;Vehicle&gt; vehicles = new HashSet&lt;&gt;();</a:t>
-            </a:r>
-            <a:br/>
-            <a:br/>
-            <a:r>
-              <a:t>    public void addVehicle(Vehicle vehicle) {</a:t>
-            </a:r>
-            <a:br/>
-            <a:r>
-              <a:t>        this.vehicles.add(vehicle);</a:t>
-            </a:r>
-            <a:br/>
-            <a:r>
-              <a:t>        vehicle.setShop(this); // Owning-Side synchronisieren!</a:t>
-            </a:r>
-            <a:br/>
-            <a:r>
-              <a:t>    }</a:t>
-            </a:r>
-            <a:br/>
-            <a:br/>
-            <a:r>
-              <a:t>    public void removeVehicle(Vehicle vehicle) {</a:t>
-            </a:r>
-            <a:br/>
-            <a:r>
-              <a:t>        this.vehicles.remove(vehicle);</a:t>
-            </a:r>
-            <a:br/>
-            <a:r>
-              <a:t>        vehicle.setShop(null);</a:t>
-            </a:r>
-            <a:br/>
-            <a:r>
-              <a:t>    }</a:t>
-            </a:r>
-            <a:br/>
-            <a:r>
-              <a:t>}</a:t>
+              <a:t>@Inheritance (Fachliche Vererbung)</a:t>
+            </a:r>
+          </a:p>
+          <a:p>
+            <a:pPr>
+              <a:spcAft>
+                <a:spcPts val="600"/>
+              </a:spcAft>
+              <a:defRPr sz="1150">
+                <a:solidFill>
+                  <a:srgbClr val="0F172A"/>
+                </a:solidFill>
+                <a:latin typeface="Segoe UI"/>
+              </a:defRPr>
+            </a:pPr>
+            <a:r>
+              <a:t>• Basisklasse ist eine echte @Entity mit Tabellenrepräsentation.</a:t>
+            </a:r>
+          </a:p>
+          <a:p>
+            <a:pPr>
+              <a:spcAft>
+                <a:spcPts val="600"/>
+              </a:spcAft>
+              <a:defRPr sz="1150">
+                <a:solidFill>
+                  <a:srgbClr val="0F172A"/>
+                </a:solidFill>
+                <a:latin typeface="Segoe UI"/>
+              </a:defRPr>
+            </a:pPr>
+            <a:r>
+              <a:t>• Polymorphe Abfragen sind möglich: 'SELECT v FROM VehicleType v' liefert alle Pkw, Lkw und Motorräder.</a:t>
+            </a:r>
+          </a:p>
+          <a:p>
+            <a:pPr>
+              <a:spcAft>
+                <a:spcPts val="600"/>
+              </a:spcAft>
+              <a:defRPr sz="1150">
+                <a:solidFill>
+                  <a:srgbClr val="0F172A"/>
+                </a:solidFill>
+                <a:latin typeface="Segoe UI"/>
+              </a:defRPr>
+            </a:pPr>
+            <a:r>
+              <a:t>• Strategien:</a:t>
+            </a:r>
+          </a:p>
+          <a:p>
+            <a:pPr>
+              <a:spcAft>
+                <a:spcPts val="600"/>
+              </a:spcAft>
+              <a:defRPr sz="1150">
+                <a:solidFill>
+                  <a:srgbClr val="0F172A"/>
+                </a:solidFill>
+                <a:latin typeface="Segoe UI"/>
+              </a:defRPr>
+            </a:pPr>
+            <a:r>
+              <a:t>•   • SINGLE_TABLE: 1 Tabelle mit @DiscriminatorColumn (schnell, Nullable Spalten).</a:t>
+            </a:r>
+          </a:p>
+          <a:p>
+            <a:pPr>
+              <a:spcAft>
+                <a:spcPts val="600"/>
+              </a:spcAft>
+              <a:defRPr sz="1150">
+                <a:solidFill>
+                  <a:srgbClr val="0F172A"/>
+                </a:solidFill>
+                <a:latin typeface="Segoe UI"/>
+              </a:defRPr>
+            </a:pPr>
+            <a:r>
+              <a:t>•   • JOINED: Normalisierte Tabellen je Subklasse (Constraint-sicher, Joins nötig).</a:t>
             </a:r>
           </a:p>
         </p:txBody>
@@ -3759,7 +3813,7 @@
           <a:noFill/>
         </p:spPr>
         <p:txBody>
-          <a:bodyPr wrap="square">
+          <a:bodyPr wrap="square" lIns="0" rIns="0" tIns="0" bIns="0">
             <a:spAutoFit/>
           </a:bodyPr>
           <a:lstStyle/>
@@ -3773,7 +3827,7 @@
               </a:defRPr>
             </a:pPr>
             <a:r>
-              <a:t>ARCHITECTURE &amp; BEST PRACTICES</a:t>
+              <a:t>ARCHITEKTUR &amp; PERFORMANCE</a:t>
             </a:r>
           </a:p>
         </p:txBody>
@@ -3795,13 +3849,13 @@
           <a:noFill/>
         </p:spPr>
         <p:txBody>
-          <a:bodyPr wrap="square">
+          <a:bodyPr wrap="square" lIns="0" rIns="0" tIns="0" bIns="0">
             <a:spAutoFit/>
           </a:bodyPr>
           <a:lstStyle/>
           <a:p>
             <a:pPr>
-              <a:defRPr sz="2200" b="1">
+              <a:defRPr sz="2100" b="1">
                 <a:solidFill>
                   <a:srgbClr val="1E293B"/>
                 </a:solidFill>
@@ -3809,7 +3863,7 @@
               </a:defRPr>
             </a:pPr>
             <a:r>
-              <a:t>2.3 equals() &amp; hashCode() bei JPA Entities</a:t>
+              <a:t>2.1 FetchType &amp; Assoziations-Strategie</a:t>
             </a:r>
           </a:p>
         </p:txBody>
@@ -3823,17 +3877,17 @@
         <p:spPr>
           <a:xfrm>
             <a:off x="731520" y="1463040"/>
-            <a:ext cx="5212080" cy="4754880"/>
+            <a:ext cx="5212080" cy="4846320"/>
           </a:xfrm>
           <a:prstGeom prst="roundRect">
             <a:avLst/>
           </a:prstGeom>
           <a:solidFill>
-            <a:srgbClr val="FFFFFF"/>
+            <a:srgbClr val="FEF2F2"/>
           </a:solidFill>
           <a:ln w="19050">
             <a:solidFill>
-              <a:srgbClr val="E2E8F0"/>
+              <a:srgbClr val="FECACA"/>
             </a:solidFill>
           </a:ln>
         </p:spPr>
@@ -3868,7 +3922,7 @@
         <p:spPr>
           <a:xfrm>
             <a:off x="914400" y="1645920"/>
-            <a:ext cx="4846320" cy="4389120"/>
+            <a:ext cx="4846320" cy="4480560"/>
           </a:xfrm>
           <a:prstGeom prst="rect">
             <a:avLst/>
@@ -3887,12 +3941,12 @@
               </a:spcAft>
               <a:defRPr sz="1400" b="1">
                 <a:solidFill>
-                  <a:srgbClr val="1E293B"/>
-                </a:solidFill>
-              </a:defRPr>
-            </a:pPr>
-            <a:r>
-              <a:t>Die 3 goldenen Regeln</a:t>
+                  <a:srgbClr val="DC2626"/>
+                </a:solidFill>
+              </a:defRPr>
+            </a:pPr>
+            <a:r>
+              <a:t>Die JPA Default-Falle</a:t>
             </a:r>
           </a:p>
           <a:p>
@@ -3900,7 +3954,7 @@
               <a:spcAft>
                 <a:spcPts val="600"/>
               </a:spcAft>
-              <a:defRPr sz="1100">
+              <a:defRPr sz="1150">
                 <a:solidFill>
                   <a:srgbClr val="0F172A"/>
                 </a:solidFill>
@@ -3908,7 +3962,7 @@
               </a:defRPr>
             </a:pPr>
             <a:r>
-              <a:t>• 1. Niemals nur @Id für hashCode() verwenden bei @GeneratedValue!</a:t>
+              <a:t>• JPA Standard-Defaults:</a:t>
             </a:r>
           </a:p>
           <a:p>
@@ -3916,7 +3970,7 @@
               <a:spcAft>
                 <a:spcPts val="600"/>
               </a:spcAft>
-              <a:defRPr sz="1100">
+              <a:defRPr sz="1150">
                 <a:solidFill>
                   <a:srgbClr val="0F172A"/>
                 </a:solidFill>
@@ -3924,7 +3978,7 @@
               </a:defRPr>
             </a:pPr>
             <a:r>
-              <a:t>•    - Vor persist(): id == null (hashCode = 0)</a:t>
+              <a:t>•   • @OneToOne -&gt; FetchType.EAGER (Gefährlich!)</a:t>
             </a:r>
           </a:p>
           <a:p>
@@ -3932,7 +3986,7 @@
               <a:spcAft>
                 <a:spcPts val="600"/>
               </a:spcAft>
-              <a:defRPr sz="1100">
+              <a:defRPr sz="1150">
                 <a:solidFill>
                   <a:srgbClr val="0F172A"/>
                 </a:solidFill>
@@ -3940,7 +3994,7 @@
               </a:defRPr>
             </a:pPr>
             <a:r>
-              <a:t>•    - Nach persist(): id = 42 (hashCode ändert sich)</a:t>
+              <a:t>•   • @ManyToOne -&gt; FetchType.EAGER (Gefährlich!)</a:t>
             </a:r>
           </a:p>
           <a:p>
@@ -3948,7 +4002,7 @@
               <a:spcAft>
                 <a:spcPts val="600"/>
               </a:spcAft>
-              <a:defRPr sz="1100">
+              <a:defRPr sz="1150">
                 <a:solidFill>
                   <a:srgbClr val="0F172A"/>
                 </a:solidFill>
@@ -3956,7 +4010,7 @@
               </a:defRPr>
             </a:pPr>
             <a:r>
-              <a:t>•    - In HashSet/HashMap wird das Objekt nicht mehr wiedergefunden!</a:t>
+              <a:t>•   • @OneToMany -&gt; FetchType.LAZY (Korrekt)</a:t>
             </a:r>
           </a:p>
           <a:p>
@@ -3964,7 +4018,7 @@
               <a:spcAft>
                 <a:spcPts val="600"/>
               </a:spcAft>
-              <a:defRPr sz="1100">
+              <a:defRPr sz="1150">
                 <a:solidFill>
                   <a:srgbClr val="0F172A"/>
                 </a:solidFill>
@@ -3972,7 +4026,7 @@
               </a:defRPr>
             </a:pPr>
             <a:r>
-              <a:t>• 2. Bevorzugt: Natürlicher fachlicher Schlüssel (Business Key)</a:t>
+              <a:t>•   • @ManyToMany -&gt; FetchType.LAZY (Korrekt)</a:t>
             </a:r>
           </a:p>
           <a:p>
@@ -3980,7 +4034,7 @@
               <a:spcAft>
                 <a:spcPts val="600"/>
               </a:spcAft>
-              <a:defRPr sz="1100">
+              <a:defRPr sz="1150">
                 <a:solidFill>
                   <a:srgbClr val="0F172A"/>
                 </a:solidFill>
@@ -3988,55 +4042,7 @@
               </a:defRPr>
             </a:pPr>
             <a:r>
-              <a:t>•    - Unveränderliche Attribute wie FIN (Fahrgestellnummer), IBAN, E-Mail oder UUID.</a:t>
-            </a:r>
-          </a:p>
-          <a:p>
-            <a:pPr>
-              <a:spcAft>
-                <a:spcPts val="600"/>
-              </a:spcAft>
-              <a:defRPr sz="1100">
-                <a:solidFill>
-                  <a:srgbClr val="0F172A"/>
-                </a:solidFill>
-                <a:latin typeface="Segoe UI"/>
-              </a:defRPr>
-            </a:pPr>
-            <a:r>
-              <a:t>• 3. Fallback ohne Business Key: Konstanter HashCode</a:t>
-            </a:r>
-          </a:p>
-          <a:p>
-            <a:pPr>
-              <a:spcAft>
-                <a:spcPts val="600"/>
-              </a:spcAft>
-              <a:defRPr sz="1100">
-                <a:solidFill>
-                  <a:srgbClr val="0F172A"/>
-                </a:solidFill>
-                <a:latin typeface="Segoe UI"/>
-              </a:defRPr>
-            </a:pPr>
-            <a:r>
-              <a:t>•    - hashCode() { return getClass().hashCode(); }</a:t>
-            </a:r>
-          </a:p>
-          <a:p>
-            <a:pPr>
-              <a:spcAft>
-                <a:spcPts val="600"/>
-              </a:spcAft>
-              <a:defRPr sz="1100">
-                <a:solidFill>
-                  <a:srgbClr val="0F172A"/>
-                </a:solidFill>
-                <a:latin typeface="Segoe UI"/>
-              </a:defRPr>
-            </a:pPr>
-            <a:r>
-              <a:t>•    - equals() vergleicht Identität &amp; DB-ID (sofern != null).</a:t>
+              <a:t>• Problem: EAGER auf To-One führt zu automatischen SQL-Joins bei JEDEM find() oder SELECT, selbst wenn die Relation gar nicht benötigt wird.</a:t>
             </a:r>
           </a:p>
         </p:txBody>
@@ -4050,17 +4056,17 @@
         <p:spPr>
           <a:xfrm>
             <a:off x="6217920" y="1463040"/>
-            <a:ext cx="5212080" cy="4754880"/>
+            <a:ext cx="5212080" cy="4846320"/>
           </a:xfrm>
           <a:prstGeom prst="roundRect">
             <a:avLst/>
           </a:prstGeom>
           <a:solidFill>
-            <a:srgbClr val="FFFFFF"/>
+            <a:srgbClr val="F0FDF4"/>
           </a:solidFill>
           <a:ln w="19050">
             <a:solidFill>
-              <a:srgbClr val="E2E8F0"/>
+              <a:srgbClr val="BBF7D0"/>
             </a:solidFill>
           </a:ln>
         </p:spPr>
@@ -4095,7 +4101,7 @@
         <p:spPr>
           <a:xfrm>
             <a:off x="6400800" y="1645920"/>
-            <a:ext cx="4846320" cy="4389120"/>
+            <a:ext cx="4846320" cy="4480560"/>
           </a:xfrm>
           <a:prstGeom prst="rect">
             <a:avLst/>
@@ -4114,85 +4120,68 @@
               </a:spcAft>
               <a:defRPr sz="1400" b="1">
                 <a:solidFill>
-                  <a:srgbClr val="2563EB"/>
-                </a:solidFill>
-              </a:defRPr>
-            </a:pPr>
-            <a:r>
-              <a:t>Muster-Implementierung (Business Key)</a:t>
-            </a:r>
-          </a:p>
-          <a:p>
-            <a:pPr>
-              <a:spcAft>
-                <a:spcPts val="1000"/>
+                  <a:srgbClr val="0D9488"/>
+                </a:solidFill>
+              </a:defRPr>
+            </a:pPr>
+            <a:r>
+              <a:t>Die goldene Regel: Alles auf LAZY</a:t>
+            </a:r>
+          </a:p>
+          <a:p>
+            <a:pPr>
+              <a:spcAft>
+                <a:spcPts val="800"/>
+              </a:spcAft>
+              <a:defRPr sz="1200">
+                <a:solidFill>
+                  <a:srgbClr val="0F172A"/>
+                </a:solidFill>
+                <a:latin typeface="Segoe UI"/>
+              </a:defRPr>
+            </a:pPr>
+            <a:r>
+              <a:t>• Stelle ausnahmslos ALLE @ManyToOne und @OneToOne Relationen explizit auf FetchType.LAZY um!</a:t>
+            </a:r>
+          </a:p>
+          <a:p>
+            <a:pPr>
+              <a:spcAft>
+                <a:spcPts val="800"/>
+              </a:spcAft>
+              <a:defRPr sz="1200">
+                <a:solidFill>
+                  <a:srgbClr val="0F172A"/>
+                </a:solidFill>
+                <a:latin typeface="Segoe UI"/>
+              </a:defRPr>
+            </a:pPr>
+            <a:r>
+              <a:t>• Lade benötigte Daten gezielt pro Use-Case über JOIN FETCH oder Entity Graphs nach.</a:t>
+            </a:r>
+          </a:p>
+          <a:p>
+            <a:pPr>
+              <a:spcAft>
+                <a:spcPts val="800"/>
               </a:spcAft>
               <a:defRPr sz="1100">
                 <a:solidFill>
                   <a:srgbClr val="1E293B"/>
                 </a:solidFill>
-                <a:latin typeface="Courier New"/>
-              </a:defRPr>
-            </a:pPr>
-            <a:r>
-              <a:t>@Override</a:t>
+                <a:latin typeface="Consolas"/>
+              </a:defRPr>
+            </a:pPr>
+            <a:r>
+              <a:t>@ManyToOne(fetch = FetchType.LAZY, optional = false)</a:t>
             </a:r>
             <a:br/>
             <a:r>
-              <a:t>public boolean equals(Object o) {</a:t>
+              <a:t>@JoinColumn(name = "SHOP_ID")</a:t>
             </a:r>
             <a:br/>
             <a:r>
-              <a:t>    if (this == o) return true;</a:t>
-            </a:r>
-            <a:br/>
-            <a:r>
-              <a:t>    if (!(o instanceof Vehicle other)) return false;</a:t>
-            </a:r>
-            <a:br/>
-            <a:r>
-              <a:t>    // Proxy-sicherer Zugriff per Getter</a:t>
-            </a:r>
-            <a:br/>
-            <a:r>
-              <a:t>    return getFin() != null &amp;&amp; getFin().equals(other.getFin());</a:t>
-            </a:r>
-            <a:br/>
-            <a:r>
-              <a:t>}</a:t>
-            </a:r>
-            <a:br/>
-            <a:br/>
-            <a:r>
-              <a:t>@Override</a:t>
-            </a:r>
-            <a:br/>
-            <a:r>
-              <a:t>public int hashCode() {</a:t>
-            </a:r>
-            <a:br/>
-            <a:r>
-              <a:t>    // Feste Basisklasse oder Business-Key</a:t>
-            </a:r>
-            <a:br/>
-            <a:r>
-              <a:t>    return getClass().hashCode();</a:t>
-            </a:r>
-            <a:br/>
-            <a:r>
-              <a:t>}</a:t>
-            </a:r>
-          </a:p>
-          <a:p>
-            <a:pPr>
-              <a:defRPr sz="1100">
-                <a:solidFill>
-                  <a:srgbClr val="D97706"/>
-                </a:solidFill>
-              </a:defRPr>
-            </a:pPr>
-            <a:r>
-              <a:t>Wichtig: Getter verwenden, da Hibernate Lazy-Proxies bei direktem Feldzugriff null zurückgeben können!</a:t>
+              <a:t>private Shop shop; // Vorbildlich!</a:t>
             </a:r>
           </a:p>
         </p:txBody>
@@ -4283,7 +4272,7 @@
           <a:noFill/>
         </p:spPr>
         <p:txBody>
-          <a:bodyPr wrap="square">
+          <a:bodyPr wrap="square" lIns="0" rIns="0" tIns="0" bIns="0">
             <a:spAutoFit/>
           </a:bodyPr>
           <a:lstStyle/>
@@ -4297,7 +4286,7 @@
               </a:defRPr>
             </a:pPr>
             <a:r>
-              <a:t>PERFORMANCE &amp; MEMORY</a:t>
+              <a:t>ARCHITEKTUR &amp; BEST PRACTICES</a:t>
             </a:r>
           </a:p>
         </p:txBody>
@@ -4319,13 +4308,13 @@
           <a:noFill/>
         </p:spPr>
         <p:txBody>
-          <a:bodyPr wrap="square">
+          <a:bodyPr wrap="square" lIns="0" rIns="0" tIns="0" bIns="0">
             <a:spAutoFit/>
           </a:bodyPr>
           <a:lstStyle/>
           <a:p>
             <a:pPr>
-              <a:defRPr sz="2200" b="1">
+              <a:defRPr sz="2100" b="1">
                 <a:solidFill>
                   <a:srgbClr val="1E293B"/>
                 </a:solidFill>
@@ -4333,7 +4322,7 @@
               </a:defRPr>
             </a:pPr>
             <a:r>
-              <a:t>2.4 Persistence Context &amp; Batch Processing</a:t>
+              <a:t>2.2 Defensive Assoziations-Synchronisation</a:t>
             </a:r>
           </a:p>
         </p:txBody>
@@ -4347,7 +4336,7 @@
         <p:spPr>
           <a:xfrm>
             <a:off x="731520" y="1463040"/>
-            <a:ext cx="5212080" cy="4754880"/>
+            <a:ext cx="10728655" cy="4846320"/>
           </a:xfrm>
           <a:prstGeom prst="roundRect">
             <a:avLst/>
@@ -4392,7 +4381,7 @@
         <p:spPr>
           <a:xfrm>
             <a:off x="914400" y="1645920"/>
-            <a:ext cx="4846320" cy="4389120"/>
+            <a:ext cx="10362895" cy="4480560"/>
           </a:xfrm>
           <a:prstGeom prst="rect">
             <a:avLst/>
@@ -4411,239 +4400,105 @@
               </a:spcAft>
               <a:defRPr sz="1400" b="1">
                 <a:solidFill>
+                  <a:srgbClr val="2563EB"/>
+                </a:solidFill>
+              </a:defRPr>
+            </a:pPr>
+            <a:r>
+              <a:t>Bidirektionale Beziehungen konsistent im Speicher halten</a:t>
+            </a:r>
+          </a:p>
+          <a:p>
+            <a:pPr>
+              <a:spcAft>
+                <a:spcPts val="600"/>
+              </a:spcAft>
+              <a:defRPr sz="1200">
+                <a:solidFill>
+                  <a:srgbClr val="0F172A"/>
+                </a:solidFill>
+                <a:latin typeface="Segoe UI"/>
+              </a:defRPr>
+            </a:pPr>
+            <a:r>
+              <a:t>• JPA persistiert nur die 'Owning Side' (die Seite mit @JoinColumn). Die inverse Seite (mappedBy) wird für SQL ignoriert.</a:t>
+            </a:r>
+          </a:p>
+          <a:p>
+            <a:pPr>
+              <a:spcAft>
+                <a:spcPts val="600"/>
+              </a:spcAft>
+              <a:defRPr sz="1200">
+                <a:solidFill>
+                  <a:srgbClr val="0F172A"/>
+                </a:solidFill>
+                <a:latin typeface="Segoe UI"/>
+              </a:defRPr>
+            </a:pPr>
+            <a:r>
+              <a:t>• Wird nur eine Seite im Java-Speicher gepflegt, ist der Objektgraph im selben Persistence Context inkonsistent!</a:t>
+            </a:r>
+          </a:p>
+          <a:p>
+            <a:pPr>
+              <a:spcAft>
+                <a:spcPts val="600"/>
+              </a:spcAft>
+              <a:defRPr sz="1200">
+                <a:solidFill>
+                  <a:srgbClr val="0F172A"/>
+                </a:solidFill>
+                <a:latin typeface="Segoe UI"/>
+              </a:defRPr>
+            </a:pPr>
+            <a:r>
+              <a:t>• Best Practice: Schreibe defensive Hilfsmethoden in der Parent-Entity, die beide Seiten atomar synchronisieren.</a:t>
+            </a:r>
+          </a:p>
+          <a:p>
+            <a:pPr>
+              <a:spcAft>
+                <a:spcPts val="800"/>
+              </a:spcAft>
+              <a:defRPr sz="1050">
+                <a:solidFill>
                   <a:srgbClr val="1E293B"/>
                 </a:solidFill>
-              </a:defRPr>
-            </a:pPr>
-            <a:r>
-              <a:t>Zustände des Persistence Contexts</a:t>
-            </a:r>
-          </a:p>
-          <a:p>
-            <a:pPr>
-              <a:spcAft>
-                <a:spcPts val="800"/>
-              </a:spcAft>
-              <a:defRPr sz="1200">
-                <a:solidFill>
-                  <a:srgbClr val="0F172A"/>
-                </a:solidFill>
-                <a:latin typeface="Segoe UI"/>
-              </a:defRPr>
-            </a:pPr>
-            <a:r>
-              <a:t>• NEW (Transient): Neu mit new erzeugt, keine DB-ID, nicht im Persistence Context.</a:t>
-            </a:r>
-          </a:p>
-          <a:p>
-            <a:pPr>
-              <a:spcAft>
-                <a:spcPts val="800"/>
-              </a:spcAft>
-              <a:defRPr sz="1200">
-                <a:solidFill>
-                  <a:srgbClr val="0F172A"/>
-                </a:solidFill>
-                <a:latin typeface="Segoe UI"/>
-              </a:defRPr>
-            </a:pPr>
-            <a:r>
-              <a:t>• MANAGED: An EntityManager gebunden. Änderungen werden bei flush()/commit() automatisch persistiert (Dirty Checking).</a:t>
-            </a:r>
-          </a:p>
-          <a:p>
-            <a:pPr>
-              <a:spcAft>
-                <a:spcPts val="800"/>
-              </a:spcAft>
-              <a:defRPr sz="1200">
-                <a:solidFill>
-                  <a:srgbClr val="0F172A"/>
-                </a:solidFill>
-                <a:latin typeface="Segoe UI"/>
-              </a:defRPr>
-            </a:pPr>
-            <a:r>
-              <a:t>• DETACHED: War managed, Session wurde geschlossen (close()) oder detach()/clear() aufgerufen.</a:t>
-            </a:r>
-          </a:p>
-          <a:p>
-            <a:pPr>
-              <a:spcAft>
-                <a:spcPts val="800"/>
-              </a:spcAft>
-              <a:defRPr sz="1200">
-                <a:solidFill>
-                  <a:srgbClr val="0F172A"/>
-                </a:solidFill>
-                <a:latin typeface="Segoe UI"/>
-              </a:defRPr>
-            </a:pPr>
-            <a:r>
-              <a:t>• REMOVED: Zur Löschung vorgemerkt (em.remove()), wird beim nächsten Flush mit DELETE entfernt.</a:t>
-            </a:r>
-          </a:p>
-        </p:txBody>
-      </p:sp>
-      <p:sp>
-        <p:nvSpPr>
-          <p:cNvPr id="7" name="Rounded Rectangle 6"/>
-          <p:cNvSpPr/>
-          <p:nvPr/>
-        </p:nvSpPr>
-        <p:spPr>
-          <a:xfrm>
-            <a:off x="6217920" y="1463040"/>
-            <a:ext cx="5212080" cy="4754880"/>
-          </a:xfrm>
-          <a:prstGeom prst="roundRect">
-            <a:avLst/>
-          </a:prstGeom>
-          <a:solidFill>
-            <a:srgbClr val="FFFFFF"/>
-          </a:solidFill>
-          <a:ln w="19050">
-            <a:solidFill>
-              <a:srgbClr val="E2E8F0"/>
-            </a:solidFill>
-          </a:ln>
-        </p:spPr>
-        <p:style>
-          <a:lnRef idx="1">
-            <a:schemeClr val="accent1"/>
-          </a:lnRef>
-          <a:fillRef idx="3">
-            <a:schemeClr val="accent1"/>
-          </a:fillRef>
-          <a:effectRef idx="2">
-            <a:schemeClr val="accent1"/>
-          </a:effectRef>
-          <a:fontRef idx="minor">
-            <a:schemeClr val="lt1"/>
-          </a:fontRef>
-        </p:style>
-        <p:txBody>
-          <a:bodyPr rtlCol="0" anchor="ctr"/>
-          <a:lstStyle/>
-          <a:p>
-            <a:pPr algn="ctr"/>
-          </a:p>
-        </p:txBody>
-      </p:sp>
-      <p:sp>
-        <p:nvSpPr>
-          <p:cNvPr id="8" name="TextBox 7"/>
-          <p:cNvSpPr txBox="1"/>
-          <p:nvPr/>
-        </p:nvSpPr>
-        <p:spPr>
-          <a:xfrm>
-            <a:off x="6400800" y="1645920"/>
-            <a:ext cx="4846320" cy="4389120"/>
-          </a:xfrm>
-          <a:prstGeom prst="rect">
-            <a:avLst/>
-          </a:prstGeom>
-          <a:noFill/>
-        </p:spPr>
-        <p:txBody>
-          <a:bodyPr wrap="square">
-            <a:spAutoFit/>
-          </a:bodyPr>
-          <a:lstStyle/>
-          <a:p>
-            <a:pPr>
-              <a:spcAft>
-                <a:spcPts val="600"/>
-              </a:spcAft>
-              <a:defRPr sz="1400" b="1">
-                <a:solidFill>
-                  <a:srgbClr val="2563EB"/>
-                </a:solidFill>
-              </a:defRPr>
-            </a:pPr>
-            <a:r>
-              <a:t>Batch Processing: OutOfMemory vermeiden</a:t>
-            </a:r>
-          </a:p>
-          <a:p>
-            <a:pPr>
-              <a:spcAft>
-                <a:spcPts val="1000"/>
-              </a:spcAft>
-              <a:defRPr sz="1100">
-                <a:solidFill>
-                  <a:srgbClr val="1E293B"/>
-                </a:solidFill>
-                <a:latin typeface="Courier New"/>
-              </a:defRPr>
-            </a:pPr>
-            <a:r>
-              <a:t>em.getTransaction().begin();</a:t>
+                <a:latin typeface="Consolas"/>
+              </a:defRPr>
+            </a:pPr>
+            <a:r>
+              <a:t>public void addVehicle(Vehicle vehicle) {</a:t>
             </a:r>
             <a:br/>
             <a:r>
-              <a:t>for (int i = 0; i &lt; largeList.size(); i++) {</a:t>
+              <a:t>    this.carpool.add(vehicle);</a:t>
             </a:r>
             <a:br/>
             <a:r>
-              <a:t>    em.persist(largeList.get(i));</a:t>
+              <a:t>    vehicle.setShop(this); // Beide Seiten synchron halten!</a:t>
             </a:r>
             <a:br/>
             <a:r>
-              <a:t>    if (i &gt; 0 &amp;&amp; i % 50 == 0) {</a:t>
+              <a:t>}</a:t>
             </a:r>
             <a:br/>
-            <a:r>
-              <a:t>        em.flush(); // Sendet SQL INSERTs an DB</a:t>
-            </a:r>
             <a:br/>
             <a:r>
-              <a:t>        em.clear(); // Leert 1st-Level Cache!</a:t>
+              <a:t>public void removeVehicle(Vehicle vehicle) {</a:t>
             </a:r>
             <a:br/>
             <a:r>
-              <a:t>    }</a:t>
+              <a:t>    this.carpool.remove(vehicle);</a:t>
             </a:r>
             <a:br/>
             <a:r>
+              <a:t>    vehicle.setShop(null); // Fremdschlüssel aufheben</a:t>
+            </a:r>
+            <a:br/>
+            <a:r>
               <a:t>}</a:t>
-            </a:r>
-            <a:br/>
-            <a:r>
-              <a:t>em.getTransaction().commit();</a:t>
-            </a:r>
-          </a:p>
-          <a:p>
-            <a:pPr>
-              <a:spcAft>
-                <a:spcPts val="400"/>
-              </a:spcAft>
-              <a:defRPr sz="1100">
-                <a:solidFill>
-                  <a:srgbClr val="0F172A"/>
-                </a:solidFill>
-                <a:latin typeface="Segoe UI"/>
-              </a:defRPr>
-            </a:pPr>
-            <a:r>
-              <a:t>• Ohne clear() wächst der Persistence Context unbegrenzt.</a:t>
-            </a:r>
-          </a:p>
-          <a:p>
-            <a:pPr>
-              <a:spcAft>
-                <a:spcPts val="400"/>
-              </a:spcAft>
-              <a:defRPr sz="1100">
-                <a:solidFill>
-                  <a:srgbClr val="0F172A"/>
-                </a:solidFill>
-                <a:latin typeface="Segoe UI"/>
-              </a:defRPr>
-            </a:pPr>
-            <a:r>
-              <a:t>• hibernate.jdbc.batch_size=50 in persistence.xml konfigurieren für echtes JDBC Batching.</a:t>
             </a:r>
           </a:p>
         </p:txBody>
@@ -4689,7 +4544,7 @@
             <a:avLst/>
           </a:prstGeom>
           <a:solidFill>
-            <a:srgbClr val="2563EB"/>
+            <a:srgbClr val="0D9488"/>
           </a:solidFill>
           <a:ln>
             <a:noFill/>
@@ -4734,7 +4589,7 @@
           <a:noFill/>
         </p:spPr>
         <p:txBody>
-          <a:bodyPr wrap="square">
+          <a:bodyPr wrap="square" lIns="0" rIns="0" tIns="0" bIns="0">
             <a:spAutoFit/>
           </a:bodyPr>
           <a:lstStyle/>
@@ -4742,13 +4597,13 @@
             <a:pPr>
               <a:defRPr sz="1100" b="1">
                 <a:solidFill>
-                  <a:srgbClr val="2563EB"/>
-                </a:solidFill>
-                <a:latin typeface="Segoe UI"/>
-              </a:defRPr>
-            </a:pPr>
-            <a:r>
-              <a:t>ABFRAGE-OPTIMIERUNG</a:t>
+                  <a:srgbClr val="0D9488"/>
+                </a:solidFill>
+                <a:latin typeface="Segoe UI"/>
+              </a:defRPr>
+            </a:pPr>
+            <a:r>
+              <a:t>ARCHITEKTUR &amp; LIFECYCLE</a:t>
             </a:r>
           </a:p>
         </p:txBody>
@@ -4770,13 +4625,13 @@
           <a:noFill/>
         </p:spPr>
         <p:txBody>
-          <a:bodyPr wrap="square">
+          <a:bodyPr wrap="square" lIns="0" rIns="0" tIns="0" bIns="0">
             <a:spAutoFit/>
           </a:bodyPr>
           <a:lstStyle/>
           <a:p>
             <a:pPr>
-              <a:defRPr sz="2200" b="1">
+              <a:defRPr sz="2100" b="1">
                 <a:solidFill>
                   <a:srgbClr val="1E293B"/>
                 </a:solidFill>
@@ -4784,7 +4639,7 @@
               </a:defRPr>
             </a:pPr>
             <a:r>
-              <a:t>2.5 DTO-Projektionen vs. Entity-Queries</a:t>
+              <a:t>2.3 CascadeType &amp; orphanRemoval in der Praxis</a:t>
             </a:r>
           </a:p>
         </p:txBody>
@@ -4798,7 +4653,7 @@
         <p:spPr>
           <a:xfrm>
             <a:off x="731520" y="1463040"/>
-            <a:ext cx="5212080" cy="4754880"/>
+            <a:ext cx="5212080" cy="4846320"/>
           </a:xfrm>
           <a:prstGeom prst="roundRect">
             <a:avLst/>
@@ -4843,7 +4698,7 @@
         <p:spPr>
           <a:xfrm>
             <a:off x="914400" y="1645920"/>
-            <a:ext cx="4846320" cy="4389120"/>
+            <a:ext cx="4846320" cy="4480560"/>
           </a:xfrm>
           <a:prstGeom prst="rect">
             <a:avLst/>
@@ -4862,69 +4717,76 @@
               </a:spcAft>
               <a:defRPr sz="1400" b="1">
                 <a:solidFill>
-                  <a:srgbClr val="1E293B"/>
-                </a:solidFill>
-              </a:defRPr>
-            </a:pPr>
-            <a:r>
-              <a:t>Constructor Expression (SELECT new ...)</a:t>
-            </a:r>
-          </a:p>
-          <a:p>
-            <a:pPr>
-              <a:spcAft>
-                <a:spcPts val="1000"/>
-              </a:spcAft>
-              <a:defRPr sz="1000">
-                <a:solidFill>
-                  <a:srgbClr val="1E293B"/>
-                </a:solidFill>
-                <a:latin typeface="Courier New"/>
-              </a:defRPr>
-            </a:pPr>
-            <a:r>
-              <a:t>// Java Record als leichtgewichtiges DTO:</a:t>
-            </a:r>
-            <a:br/>
-            <a:r>
-              <a:t>public record VehicleSummaryDto(</a:t>
-            </a:r>
-            <a:br/>
-            <a:r>
-              <a:t>    String brand, String modelName, String shopCity</a:t>
-            </a:r>
-            <a:br/>
-            <a:r>
-              <a:t>) {}</a:t>
-            </a:r>
-            <a:br/>
-            <a:br/>
-            <a:r>
-              <a:t>// JPQL Query:</a:t>
-            </a:r>
-            <a:br/>
-            <a:r>
-              <a:t>List&lt;VehicleSummaryDto&gt; dtos = em.createQuery(</a:t>
-            </a:r>
-            <a:br/>
-            <a:r>
-              <a:t>    "SELECT new net.rentacar.dto.VehicleSummaryDto(" +</a:t>
-            </a:r>
-            <a:br/>
-            <a:r>
-              <a:t>    "  v.brand, v.model.name, s.city) " +</a:t>
-            </a:r>
-            <a:br/>
-            <a:r>
-              <a:t>    "FROM Vehicle v JOIN v.shop s",</a:t>
-            </a:r>
-            <a:br/>
-            <a:r>
-              <a:t>    VehicleSummaryDto.class</a:t>
-            </a:r>
-            <a:br/>
-            <a:r>
-              <a:t>).getResultList();</a:t>
+                  <a:srgbClr val="0D9488"/>
+                </a:solidFill>
+              </a:defRPr>
+            </a:pPr>
+            <a:r>
+              <a:t>orphanRemoval vs. CascadeType.REMOVE</a:t>
+            </a:r>
+          </a:p>
+          <a:p>
+            <a:pPr>
+              <a:spcAft>
+                <a:spcPts val="500"/>
+              </a:spcAft>
+              <a:defRPr sz="1100">
+                <a:solidFill>
+                  <a:srgbClr val="0F172A"/>
+                </a:solidFill>
+                <a:latin typeface="Segoe UI"/>
+              </a:defRPr>
+            </a:pPr>
+            <a:r>
+              <a:t>• CascadeType.REMOVE: Löscht Kind-Datensätze nur dann, wenn das übergeordnete Elternobjekt mit em.remove(parent) gelöscht wird.</a:t>
+            </a:r>
+          </a:p>
+          <a:p>
+            <a:pPr>
+              <a:spcAft>
+                <a:spcPts val="500"/>
+              </a:spcAft>
+              <a:defRPr sz="1100">
+                <a:solidFill>
+                  <a:srgbClr val="0F172A"/>
+                </a:solidFill>
+                <a:latin typeface="Segoe UI"/>
+              </a:defRPr>
+            </a:pPr>
+            <a:r>
+              <a:t>• orphanRemoval = true: Löscht ein Kindobjekt zusätzlich per SQL DELETE, wenn es aus der Java-Collection des Elternobjekts entfernt wird!</a:t>
+            </a:r>
+          </a:p>
+          <a:p>
+            <a:pPr>
+              <a:spcAft>
+                <a:spcPts val="500"/>
+              </a:spcAft>
+              <a:defRPr sz="1100">
+                <a:solidFill>
+                  <a:srgbClr val="0F172A"/>
+                </a:solidFill>
+                <a:latin typeface="Segoe UI"/>
+              </a:defRPr>
+            </a:pPr>
+            <a:r>
+              <a:t>• Echter Parent-Child Lifecycle (Aggregat): Kindobjekte haben keine eigenständige Existenzberechtigung (z.B. RentalContract -&gt; DamageRecords).</a:t>
+            </a:r>
+          </a:p>
+          <a:p>
+            <a:pPr>
+              <a:spcAft>
+                <a:spcPts val="500"/>
+              </a:spcAft>
+              <a:defRPr sz="1100">
+                <a:solidFill>
+                  <a:srgbClr val="0F172A"/>
+                </a:solidFill>
+                <a:latin typeface="Segoe UI"/>
+              </a:defRPr>
+            </a:pPr>
+            <a:r>
+              <a:t>• Achtung: Niemals orphanRemoval auf @ManyToMany oder geteilten Stammdaten setzen!</a:t>
             </a:r>
           </a:p>
         </p:txBody>
@@ -4938,7 +4800,7 @@
         <p:spPr>
           <a:xfrm>
             <a:off x="6217920" y="1463040"/>
-            <a:ext cx="5212080" cy="4754880"/>
+            <a:ext cx="5212080" cy="4846320"/>
           </a:xfrm>
           <a:prstGeom prst="roundRect">
             <a:avLst/>
@@ -4983,7 +4845,7 @@
         <p:spPr>
           <a:xfrm>
             <a:off x="6400800" y="1645920"/>
-            <a:ext cx="4846320" cy="4389120"/>
+            <a:ext cx="4846320" cy="4480560"/>
           </a:xfrm>
           <a:prstGeom prst="rect">
             <a:avLst/>
@@ -4998,24 +4860,81 @@
           <a:p>
             <a:pPr>
               <a:spcAft>
+                <a:spcPts val="600"/>
+              </a:spcAft>
+              <a:defRPr sz="1400" b="1">
+                <a:solidFill>
+                  <a:srgbClr val="1E293B"/>
+                </a:solidFill>
+              </a:defRPr>
+            </a:pPr>
+            <a:r>
+              <a:t>Code-Beispiel: Sauberes Aggregat</a:t>
+            </a:r>
+          </a:p>
+          <a:p>
+            <a:pPr>
+              <a:spcAft>
                 <a:spcPts val="800"/>
               </a:spcAft>
-              <a:defRPr sz="1400" b="1">
-                <a:solidFill>
-                  <a:srgbClr val="0D9488"/>
-                </a:solidFill>
-              </a:defRPr>
-            </a:pPr>
-            <a:r>
-              <a:t>Warum DTOs für Leseoperationen?</a:t>
-            </a:r>
-          </a:p>
-          <a:p>
-            <a:pPr>
-              <a:spcAft>
-                <a:spcPts val="800"/>
-              </a:spcAft>
-              <a:defRPr sz="1200">
+              <a:defRPr sz="1000">
+                <a:solidFill>
+                  <a:srgbClr val="1E293B"/>
+                </a:solidFill>
+                <a:latin typeface="Consolas"/>
+              </a:defRPr>
+            </a:pPr>
+            <a:r>
+              <a:t>@Entity</a:t>
+            </a:r>
+            <a:br/>
+            <a:r>
+              <a:t>public class RentalContract {</a:t>
+            </a:r>
+            <a:br/>
+            <a:r>
+              <a:t>    @OneToMany(mappedBy = "contract",</a:t>
+            </a:r>
+            <a:br/>
+            <a:r>
+              <a:t>               cascade = CascadeType.ALL,</a:t>
+            </a:r>
+            <a:br/>
+            <a:r>
+              <a:t>               orphanRemoval = true)</a:t>
+            </a:r>
+            <a:br/>
+            <a:r>
+              <a:t>    private List&lt;DamageRecord&gt; damages = new ArrayList&lt;&gt;();</a:t>
+            </a:r>
+            <a:br/>
+            <a:br/>
+            <a:r>
+              <a:t>    public void removeDamage(DamageRecord damage) {</a:t>
+            </a:r>
+            <a:br/>
+            <a:r>
+              <a:t>        damages.remove(damage);</a:t>
+            </a:r>
+            <a:br/>
+            <a:r>
+              <a:t>        damage.setContract(null); // Führt zum SQL DELETE!</a:t>
+            </a:r>
+            <a:br/>
+            <a:r>
+              <a:t>    }</a:t>
+            </a:r>
+            <a:br/>
+            <a:r>
+              <a:t>}</a:t>
+            </a:r>
+          </a:p>
+          <a:p>
+            <a:pPr>
+              <a:spcAft>
+                <a:spcPts val="400"/>
+              </a:spcAft>
+              <a:defRPr sz="1100">
                 <a:solidFill>
                   <a:srgbClr val="0F172A"/>
                 </a:solidFill>
@@ -5023,71 +4942,7 @@
               </a:defRPr>
             </a:pPr>
             <a:r>
-              <a:t>• Maximale Performance: Es werden nur exakt die selektierten Spalten über das Netzwerk übertragen.</a:t>
-            </a:r>
-          </a:p>
-          <a:p>
-            <a:pPr>
-              <a:spcAft>
-                <a:spcPts val="800"/>
-              </a:spcAft>
-              <a:defRPr sz="1200">
-                <a:solidFill>
-                  <a:srgbClr val="0F172A"/>
-                </a:solidFill>
-                <a:latin typeface="Segoe UI"/>
-              </a:defRPr>
-            </a:pPr>
-            <a:r>
-              <a:t>• Keine LazyInitializationException: DTOs sind reine POJOs/Records ohne Hibernate-Proxies und völlig sicher im UI- und REST-Layer.</a:t>
-            </a:r>
-          </a:p>
-          <a:p>
-            <a:pPr>
-              <a:spcAft>
-                <a:spcPts val="800"/>
-              </a:spcAft>
-              <a:defRPr sz="1200">
-                <a:solidFill>
-                  <a:srgbClr val="0F172A"/>
-                </a:solidFill>
-                <a:latin typeface="Segoe UI"/>
-              </a:defRPr>
-            </a:pPr>
-            <a:r>
-              <a:t>• Geringer Speicherverbrauch: Der Persistence Context wird nicht mit gemanagten Entity-Instanzen belastet.</a:t>
-            </a:r>
-          </a:p>
-          <a:p>
-            <a:pPr>
-              <a:spcAft>
-                <a:spcPts val="800"/>
-              </a:spcAft>
-              <a:defRPr sz="1200">
-                <a:solidFill>
-                  <a:srgbClr val="0F172A"/>
-                </a:solidFill>
-                <a:latin typeface="Segoe UI"/>
-              </a:defRPr>
-            </a:pPr>
-            <a:r>
-              <a:t>• Dirty Checking entfällt: Hibernate muss keine Snapshots verwalten.</a:t>
-            </a:r>
-          </a:p>
-          <a:p>
-            <a:pPr>
-              <a:spcAft>
-                <a:spcPts val="800"/>
-              </a:spcAft>
-              <a:defRPr sz="1200">
-                <a:solidFill>
-                  <a:srgbClr val="0F172A"/>
-                </a:solidFill>
-                <a:latin typeface="Segoe UI"/>
-              </a:defRPr>
-            </a:pPr>
-            <a:r>
-              <a:t>• Ideal für Listenansichten, Suchmasken und Aggregationen.</a:t>
+              <a:t>• Testbar: contract.removeDamage(d) -&gt; em.flush() -&gt; SELECT COUNT(*) FROM DAMAGERECORD liefert 0!</a:t>
             </a:r>
           </a:p>
         </p:txBody>
@@ -5178,7 +5033,7 @@
           <a:noFill/>
         </p:spPr>
         <p:txBody>
-          <a:bodyPr wrap="square">
+          <a:bodyPr wrap="square" lIns="0" rIns="0" tIns="0" bIns="0">
             <a:spAutoFit/>
           </a:bodyPr>
           <a:lstStyle/>
@@ -5192,7 +5047,7 @@
               </a:defRPr>
             </a:pPr>
             <a:r>
-              <a:t>ARCHITECTURE</a:t>
+              <a:t>ARCHITEKTUR &amp; IDENTITÄT</a:t>
             </a:r>
           </a:p>
         </p:txBody>
@@ -5214,13 +5069,13 @@
           <a:noFill/>
         </p:spPr>
         <p:txBody>
-          <a:bodyPr wrap="square">
+          <a:bodyPr wrap="square" lIns="0" rIns="0" tIns="0" bIns="0">
             <a:spAutoFit/>
           </a:bodyPr>
           <a:lstStyle/>
           <a:p>
             <a:pPr>
-              <a:defRPr sz="2200" b="1">
+              <a:defRPr sz="2100" b="1">
                 <a:solidFill>
                   <a:srgbClr val="1E293B"/>
                 </a:solidFill>
@@ -5228,7 +5083,7 @@
               </a:defRPr>
             </a:pPr>
             <a:r>
-              <a:t>2.6 Primärschlüssel-Strategien im Vergleich</a:t>
+              <a:t>2.4 Entity Identity: equals() &amp; hashCode()</a:t>
             </a:r>
           </a:p>
         </p:txBody>
@@ -5242,17 +5097,17 @@
         <p:spPr>
           <a:xfrm>
             <a:off x="731520" y="1463040"/>
-            <a:ext cx="2560320" cy="4754880"/>
+            <a:ext cx="5212080" cy="4846320"/>
           </a:xfrm>
           <a:prstGeom prst="roundRect">
             <a:avLst/>
           </a:prstGeom>
           <a:solidFill>
-            <a:srgbClr val="FFFFFF"/>
+            <a:srgbClr val="FEF2F2"/>
           </a:solidFill>
           <a:ln w="19050">
             <a:solidFill>
-              <a:srgbClr val="E2E8F0"/>
+              <a:srgbClr val="FECACA"/>
             </a:solidFill>
           </a:ln>
         </p:spPr>
@@ -5280,23 +5135,111 @@
       </p:sp>
       <p:sp>
         <p:nvSpPr>
-          <p:cNvPr id="6" name="Rectangle 5"/>
+          <p:cNvPr id="6" name="TextBox 5"/>
+          <p:cNvSpPr txBox="1"/>
+          <p:nvPr/>
+        </p:nvSpPr>
+        <p:spPr>
+          <a:xfrm>
+            <a:off x="914400" y="1645920"/>
+            <a:ext cx="4846320" cy="4480560"/>
+          </a:xfrm>
+          <a:prstGeom prst="rect">
+            <a:avLst/>
+          </a:prstGeom>
+          <a:noFill/>
+        </p:spPr>
+        <p:txBody>
+          <a:bodyPr wrap="square">
+            <a:spAutoFit/>
+          </a:bodyPr>
+          <a:lstStyle/>
+          <a:p>
+            <a:pPr>
+              <a:spcAft>
+                <a:spcPts val="600"/>
+              </a:spcAft>
+              <a:defRPr sz="1400" b="1">
+                <a:solidFill>
+                  <a:srgbClr val="DC2626"/>
+                </a:solidFill>
+              </a:defRPr>
+            </a:pPr>
+            <a:r>
+              <a:t>Das HashSet / Set-Problem</a:t>
+            </a:r>
+          </a:p>
+          <a:p>
+            <a:pPr>
+              <a:spcAft>
+                <a:spcPts val="600"/>
+              </a:spcAft>
+              <a:defRPr sz="1150">
+                <a:solidFill>
+                  <a:srgbClr val="0F172A"/>
+                </a:solidFill>
+                <a:latin typeface="Segoe UI"/>
+              </a:defRPr>
+            </a:pPr>
+            <a:r>
+              <a:t>• Vor dem Persistieren ist id == null -&gt; hashCode() = 0.</a:t>
+            </a:r>
+          </a:p>
+          <a:p>
+            <a:pPr>
+              <a:spcAft>
+                <a:spcPts val="600"/>
+              </a:spcAft>
+              <a:defRPr sz="1150">
+                <a:solidFill>
+                  <a:srgbClr val="0F172A"/>
+                </a:solidFill>
+                <a:latin typeface="Segoe UI"/>
+              </a:defRPr>
+            </a:pPr>
+            <a:r>
+              <a:t>• Nach em.persist() wird eine ID generiert -&gt; hashCode() ändert sich!</a:t>
+            </a:r>
+          </a:p>
+          <a:p>
+            <a:pPr>
+              <a:spcAft>
+                <a:spcPts val="600"/>
+              </a:spcAft>
+              <a:defRPr sz="1150">
+                <a:solidFill>
+                  <a:srgbClr val="0F172A"/>
+                </a:solidFill>
+                <a:latin typeface="Segoe UI"/>
+              </a:defRPr>
+            </a:pPr>
+            <a:r>
+              <a:t>• Wurde die Entity zuvor in ein HashSet eingefügt, wird sie im Set nie wieder gefunden (Memory Leak / HashSet Invarianz gebrochen)!</a:t>
+            </a:r>
+          </a:p>
+        </p:txBody>
+      </p:sp>
+      <p:sp>
+        <p:nvSpPr>
+          <p:cNvPr id="7" name="Rounded Rectangle 6"/>
           <p:cNvSpPr/>
           <p:nvPr/>
         </p:nvSpPr>
         <p:spPr>
           <a:xfrm>
-            <a:off x="731520" y="1463040"/>
-            <a:ext cx="2560320" cy="548640"/>
-          </a:xfrm>
-          <a:prstGeom prst="rect">
+            <a:off x="6217920" y="1463040"/>
+            <a:ext cx="5212080" cy="4846320"/>
+          </a:xfrm>
+          <a:prstGeom prst="roundRect">
             <a:avLst/>
           </a:prstGeom>
           <a:solidFill>
-            <a:srgbClr val="D97706"/>
+            <a:srgbClr val="F0FDF4"/>
           </a:solidFill>
-          <a:ln>
-            <a:noFill/>
+          <a:ln w="19050">
+            <a:solidFill>
+              <a:srgbClr val="BBF7D0"/>
+            </a:solidFill>
           </a:ln>
         </p:spPr>
         <p:style>
@@ -5317,29 +5260,20 @@
           <a:bodyPr rtlCol="0" anchor="ctr"/>
           <a:lstStyle/>
           <a:p>
-            <a:pPr algn="ctr">
-              <a:defRPr sz="1300" b="1">
-                <a:solidFill>
-                  <a:srgbClr val="FFFFFF"/>
-                </a:solidFill>
-              </a:defRPr>
-            </a:pPr>
-            <a:r>
-              <a:t>IDENTITY</a:t>
-            </a:r>
-          </a:p>
-        </p:txBody>
-      </p:sp>
-      <p:sp>
-        <p:nvSpPr>
-          <p:cNvPr id="7" name="TextBox 6"/>
+            <a:pPr algn="ctr"/>
+          </a:p>
+        </p:txBody>
+      </p:sp>
+      <p:sp>
+        <p:nvSpPr>
+          <p:cNvPr id="8" name="TextBox 7"/>
           <p:cNvSpPr txBox="1"/>
           <p:nvPr/>
         </p:nvSpPr>
         <p:spPr>
           <a:xfrm>
-            <a:off x="868680" y="2103120"/>
-            <a:ext cx="2286000" cy="3931920"/>
+            <a:off x="6400800" y="1645920"/>
+            <a:ext cx="4846320" cy="4480560"/>
           </a:xfrm>
           <a:prstGeom prst="rect">
             <a:avLst/>
@@ -5354,12 +5288,16 @@
           <a:p>
             <a:pPr>
               <a:spcAft>
-                <a:spcPts val="200"/>
-              </a:spcAft>
-              <a:defRPr b="1" sz="1100"/>
-            </a:pPr>
-            <a:r>
-              <a:t>Funktion:</a:t>
+                <a:spcPts val="600"/>
+              </a:spcAft>
+              <a:defRPr sz="1400" b="1">
+                <a:solidFill>
+                  <a:srgbClr val="0D9488"/>
+                </a:solidFill>
+              </a:defRPr>
+            </a:pPr>
+            <a:r>
+              <a:t>Die Best-Practice Implementierung</a:t>
             </a:r>
           </a:p>
           <a:p>
@@ -5367,632 +5305,64 @@
               <a:spcAft>
                 <a:spcPts val="800"/>
               </a:spcAft>
-              <a:defRPr sz="1000"/>
-            </a:pPr>
-            <a:r>
-              <a:t>Auto-Increment Spalte</a:t>
-            </a:r>
-          </a:p>
-          <a:p>
-            <a:pPr>
-              <a:spcAft>
-                <a:spcPts val="200"/>
-              </a:spcAft>
-              <a:defRPr b="1" sz="1100">
-                <a:solidFill>
-                  <a:srgbClr val="0D9488"/>
-                </a:solidFill>
-              </a:defRPr>
-            </a:pPr>
-            <a:r>
-              <a:t>+ Vorteil:</a:t>
-            </a:r>
-          </a:p>
-          <a:p>
-            <a:pPr>
-              <a:spcAft>
-                <a:spcPts val="800"/>
-              </a:spcAft>
-              <a:defRPr sz="1000"/>
-            </a:pPr>
-            <a:r>
-              <a:t>Einfach, breite DB-Unterstützung</a:t>
-            </a:r>
-          </a:p>
-          <a:p>
-            <a:pPr>
-              <a:spcAft>
-                <a:spcPts val="200"/>
-              </a:spcAft>
-              <a:defRPr b="1" sz="1100">
-                <a:solidFill>
-                  <a:srgbClr val="DC2626"/>
-                </a:solidFill>
-              </a:defRPr>
-            </a:pPr>
-            <a:r>
-              <a:t>- Nachteil:</a:t>
-            </a:r>
-          </a:p>
-          <a:p>
-            <a:pPr>
-              <a:defRPr sz="1000"/>
-            </a:pPr>
-            <a:r>
-              <a:t>Verhindert JDBC Batching! (Insert muss sofort ausgeführt werden)</a:t>
-            </a:r>
-          </a:p>
-        </p:txBody>
-      </p:sp>
-      <p:sp>
-        <p:nvSpPr>
-          <p:cNvPr id="8" name="Rounded Rectangle 7"/>
-          <p:cNvSpPr/>
-          <p:nvPr/>
-        </p:nvSpPr>
-        <p:spPr>
-          <a:xfrm>
-            <a:off x="3429000" y="1463040"/>
-            <a:ext cx="2560320" cy="4754880"/>
-          </a:xfrm>
-          <a:prstGeom prst="roundRect">
-            <a:avLst/>
-          </a:prstGeom>
-          <a:solidFill>
-            <a:srgbClr val="FFFFFF"/>
-          </a:solidFill>
-          <a:ln w="19050">
-            <a:solidFill>
-              <a:srgbClr val="E2E8F0"/>
-            </a:solidFill>
-          </a:ln>
-        </p:spPr>
-        <p:style>
-          <a:lnRef idx="1">
-            <a:schemeClr val="accent1"/>
-          </a:lnRef>
-          <a:fillRef idx="3">
-            <a:schemeClr val="accent1"/>
-          </a:fillRef>
-          <a:effectRef idx="2">
-            <a:schemeClr val="accent1"/>
-          </a:effectRef>
-          <a:fontRef idx="minor">
-            <a:schemeClr val="lt1"/>
-          </a:fontRef>
-        </p:style>
-        <p:txBody>
-          <a:bodyPr rtlCol="0" anchor="ctr"/>
-          <a:lstStyle/>
-          <a:p>
-            <a:pPr algn="ctr"/>
-          </a:p>
-        </p:txBody>
-      </p:sp>
-      <p:sp>
-        <p:nvSpPr>
-          <p:cNvPr id="9" name="Rectangle 8"/>
-          <p:cNvSpPr/>
-          <p:nvPr/>
-        </p:nvSpPr>
-        <p:spPr>
-          <a:xfrm>
-            <a:off x="3429000" y="1463040"/>
-            <a:ext cx="2560320" cy="548640"/>
-          </a:xfrm>
-          <a:prstGeom prst="rect">
-            <a:avLst/>
-          </a:prstGeom>
-          <a:solidFill>
-            <a:srgbClr val="0D9488"/>
-          </a:solidFill>
-          <a:ln>
-            <a:noFill/>
-          </a:ln>
-        </p:spPr>
-        <p:style>
-          <a:lnRef idx="1">
-            <a:schemeClr val="accent1"/>
-          </a:lnRef>
-          <a:fillRef idx="3">
-            <a:schemeClr val="accent1"/>
-          </a:fillRef>
-          <a:effectRef idx="2">
-            <a:schemeClr val="accent1"/>
-          </a:effectRef>
-          <a:fontRef idx="minor">
-            <a:schemeClr val="lt1"/>
-          </a:fontRef>
-        </p:style>
-        <p:txBody>
-          <a:bodyPr rtlCol="0" anchor="ctr"/>
-          <a:lstStyle/>
-          <a:p>
-            <a:pPr algn="ctr">
-              <a:defRPr sz="1300" b="1">
-                <a:solidFill>
-                  <a:srgbClr val="FFFFFF"/>
-                </a:solidFill>
-              </a:defRPr>
-            </a:pPr>
-            <a:r>
-              <a:t>SEQUENCE</a:t>
-            </a:r>
-          </a:p>
-        </p:txBody>
-      </p:sp>
-      <p:sp>
-        <p:nvSpPr>
-          <p:cNvPr id="10" name="TextBox 9"/>
-          <p:cNvSpPr txBox="1"/>
-          <p:nvPr/>
-        </p:nvSpPr>
-        <p:spPr>
-          <a:xfrm>
-            <a:off x="3566160" y="2103120"/>
-            <a:ext cx="2286000" cy="3931920"/>
-          </a:xfrm>
-          <a:prstGeom prst="rect">
-            <a:avLst/>
-          </a:prstGeom>
-          <a:noFill/>
-        </p:spPr>
-        <p:txBody>
-          <a:bodyPr wrap="square">
-            <a:spAutoFit/>
-          </a:bodyPr>
-          <a:lstStyle/>
-          <a:p>
-            <a:pPr>
-              <a:spcAft>
-                <a:spcPts val="200"/>
-              </a:spcAft>
-              <a:defRPr b="1" sz="1100"/>
-            </a:pPr>
-            <a:r>
-              <a:t>Funktion:</a:t>
-            </a:r>
-          </a:p>
-          <a:p>
-            <a:pPr>
-              <a:spcAft>
-                <a:spcPts val="800"/>
-              </a:spcAft>
-              <a:defRPr sz="1000"/>
-            </a:pPr>
-            <a:r>
-              <a:t>DB Sequence Generator</a:t>
-            </a:r>
-          </a:p>
-          <a:p>
-            <a:pPr>
-              <a:spcAft>
-                <a:spcPts val="200"/>
-              </a:spcAft>
-              <a:defRPr b="1" sz="1100">
-                <a:solidFill>
-                  <a:srgbClr val="0D9488"/>
-                </a:solidFill>
-              </a:defRPr>
-            </a:pPr>
-            <a:r>
-              <a:t>+ Vorteil:</a:t>
-            </a:r>
-          </a:p>
-          <a:p>
-            <a:pPr>
-              <a:spcAft>
-                <a:spcPts val="800"/>
-              </a:spcAft>
-              <a:defRPr sz="1000"/>
-            </a:pPr>
-            <a:r>
-              <a:t>Voll Batching-fähig, sehr performant mit allocationSize=50</a:t>
-            </a:r>
-          </a:p>
-          <a:p>
-            <a:pPr>
-              <a:spcAft>
-                <a:spcPts val="200"/>
-              </a:spcAft>
-              <a:defRPr b="1" sz="1100">
-                <a:solidFill>
-                  <a:srgbClr val="DC2626"/>
-                </a:solidFill>
-              </a:defRPr>
-            </a:pPr>
-            <a:r>
-              <a:t>- Nachteil:</a:t>
-            </a:r>
-          </a:p>
-          <a:p>
-            <a:pPr>
-              <a:defRPr sz="1000"/>
-            </a:pPr>
-            <a:r>
-              <a:t>Erfordert Sequence-Support der Datenbank</a:t>
-            </a:r>
-          </a:p>
-        </p:txBody>
-      </p:sp>
-      <p:sp>
-        <p:nvSpPr>
-          <p:cNvPr id="11" name="Rounded Rectangle 10"/>
-          <p:cNvSpPr/>
-          <p:nvPr/>
-        </p:nvSpPr>
-        <p:spPr>
-          <a:xfrm>
-            <a:off x="6126480" y="1463040"/>
-            <a:ext cx="2560320" cy="4754880"/>
-          </a:xfrm>
-          <a:prstGeom prst="roundRect">
-            <a:avLst/>
-          </a:prstGeom>
-          <a:solidFill>
-            <a:srgbClr val="FFFFFF"/>
-          </a:solidFill>
-          <a:ln w="19050">
-            <a:solidFill>
-              <a:srgbClr val="E2E8F0"/>
-            </a:solidFill>
-          </a:ln>
-        </p:spPr>
-        <p:style>
-          <a:lnRef idx="1">
-            <a:schemeClr val="accent1"/>
-          </a:lnRef>
-          <a:fillRef idx="3">
-            <a:schemeClr val="accent1"/>
-          </a:fillRef>
-          <a:effectRef idx="2">
-            <a:schemeClr val="accent1"/>
-          </a:effectRef>
-          <a:fontRef idx="minor">
-            <a:schemeClr val="lt1"/>
-          </a:fontRef>
-        </p:style>
-        <p:txBody>
-          <a:bodyPr rtlCol="0" anchor="ctr"/>
-          <a:lstStyle/>
-          <a:p>
-            <a:pPr algn="ctr"/>
-          </a:p>
-        </p:txBody>
-      </p:sp>
-      <p:sp>
-        <p:nvSpPr>
-          <p:cNvPr id="12" name="Rectangle 11"/>
-          <p:cNvSpPr/>
-          <p:nvPr/>
-        </p:nvSpPr>
-        <p:spPr>
-          <a:xfrm>
-            <a:off x="6126480" y="1463040"/>
-            <a:ext cx="2560320" cy="548640"/>
-          </a:xfrm>
-          <a:prstGeom prst="rect">
-            <a:avLst/>
-          </a:prstGeom>
-          <a:solidFill>
-            <a:srgbClr val="DC2626"/>
-          </a:solidFill>
-          <a:ln>
-            <a:noFill/>
-          </a:ln>
-        </p:spPr>
-        <p:style>
-          <a:lnRef idx="1">
-            <a:schemeClr val="accent1"/>
-          </a:lnRef>
-          <a:fillRef idx="3">
-            <a:schemeClr val="accent1"/>
-          </a:fillRef>
-          <a:effectRef idx="2">
-            <a:schemeClr val="accent1"/>
-          </a:effectRef>
-          <a:fontRef idx="minor">
-            <a:schemeClr val="lt1"/>
-          </a:fontRef>
-        </p:style>
-        <p:txBody>
-          <a:bodyPr rtlCol="0" anchor="ctr"/>
-          <a:lstStyle/>
-          <a:p>
-            <a:pPr algn="ctr">
-              <a:defRPr sz="1300" b="1">
-                <a:solidFill>
-                  <a:srgbClr val="FFFFFF"/>
-                </a:solidFill>
-              </a:defRPr>
-            </a:pPr>
-            <a:r>
-              <a:t>TABLE</a:t>
-            </a:r>
-          </a:p>
-        </p:txBody>
-      </p:sp>
-      <p:sp>
-        <p:nvSpPr>
-          <p:cNvPr id="13" name="TextBox 12"/>
-          <p:cNvSpPr txBox="1"/>
-          <p:nvPr/>
-        </p:nvSpPr>
-        <p:spPr>
-          <a:xfrm>
-            <a:off x="6263640" y="2103120"/>
-            <a:ext cx="2286000" cy="3931920"/>
-          </a:xfrm>
-          <a:prstGeom prst="rect">
-            <a:avLst/>
-          </a:prstGeom>
-          <a:noFill/>
-        </p:spPr>
-        <p:txBody>
-          <a:bodyPr wrap="square">
-            <a:spAutoFit/>
-          </a:bodyPr>
-          <a:lstStyle/>
-          <a:p>
-            <a:pPr>
-              <a:spcAft>
-                <a:spcPts val="200"/>
-              </a:spcAft>
-              <a:defRPr b="1" sz="1100"/>
-            </a:pPr>
-            <a:r>
-              <a:t>Funktion:</a:t>
-            </a:r>
-          </a:p>
-          <a:p>
-            <a:pPr>
-              <a:spcAft>
-                <a:spcPts val="800"/>
-              </a:spcAft>
-              <a:defRPr sz="1000"/>
-            </a:pPr>
-            <a:r>
-              <a:t>Eigene Zählertabelle</a:t>
-            </a:r>
-          </a:p>
-          <a:p>
-            <a:pPr>
-              <a:spcAft>
-                <a:spcPts val="200"/>
-              </a:spcAft>
-              <a:defRPr b="1" sz="1100">
-                <a:solidFill>
-                  <a:srgbClr val="0D9488"/>
-                </a:solidFill>
-              </a:defRPr>
-            </a:pPr>
-            <a:r>
-              <a:t>+ Vorteil:</a:t>
-            </a:r>
-          </a:p>
-          <a:p>
-            <a:pPr>
-              <a:spcAft>
-                <a:spcPts val="800"/>
-              </a:spcAft>
-              <a:defRPr sz="1000"/>
-            </a:pPr>
-            <a:r>
-              <a:t>100% datenbankunabhängig</a:t>
-            </a:r>
-          </a:p>
-          <a:p>
-            <a:pPr>
-              <a:spcAft>
-                <a:spcPts val="200"/>
-              </a:spcAft>
-              <a:defRPr b="1" sz="1100">
-                <a:solidFill>
-                  <a:srgbClr val="DC2626"/>
-                </a:solidFill>
-              </a:defRPr>
-            </a:pPr>
-            <a:r>
-              <a:t>- Nachteil:</a:t>
-            </a:r>
-          </a:p>
-          <a:p>
-            <a:pPr>
-              <a:defRPr sz="1000"/>
-            </a:pPr>
-            <a:r>
-              <a:t>Langsam durch separate Tabellen-Locks &amp; Update-Transaktionen</a:t>
-            </a:r>
-          </a:p>
-        </p:txBody>
-      </p:sp>
-      <p:sp>
-        <p:nvSpPr>
-          <p:cNvPr id="14" name="Rounded Rectangle 13"/>
-          <p:cNvSpPr/>
-          <p:nvPr/>
-        </p:nvSpPr>
-        <p:spPr>
-          <a:xfrm>
-            <a:off x="8823960" y="1463040"/>
-            <a:ext cx="2560320" cy="4754880"/>
-          </a:xfrm>
-          <a:prstGeom prst="roundRect">
-            <a:avLst/>
-          </a:prstGeom>
-          <a:solidFill>
-            <a:srgbClr val="FFFFFF"/>
-          </a:solidFill>
-          <a:ln w="19050">
-            <a:solidFill>
-              <a:srgbClr val="E2E8F0"/>
-            </a:solidFill>
-          </a:ln>
-        </p:spPr>
-        <p:style>
-          <a:lnRef idx="1">
-            <a:schemeClr val="accent1"/>
-          </a:lnRef>
-          <a:fillRef idx="3">
-            <a:schemeClr val="accent1"/>
-          </a:fillRef>
-          <a:effectRef idx="2">
-            <a:schemeClr val="accent1"/>
-          </a:effectRef>
-          <a:fontRef idx="minor">
-            <a:schemeClr val="lt1"/>
-          </a:fontRef>
-        </p:style>
-        <p:txBody>
-          <a:bodyPr rtlCol="0" anchor="ctr"/>
-          <a:lstStyle/>
-          <a:p>
-            <a:pPr algn="ctr"/>
-          </a:p>
-        </p:txBody>
-      </p:sp>
-      <p:sp>
-        <p:nvSpPr>
-          <p:cNvPr id="15" name="Rectangle 14"/>
-          <p:cNvSpPr/>
-          <p:nvPr/>
-        </p:nvSpPr>
-        <p:spPr>
-          <a:xfrm>
-            <a:off x="8823960" y="1463040"/>
-            <a:ext cx="2560320" cy="548640"/>
-          </a:xfrm>
-          <a:prstGeom prst="rect">
-            <a:avLst/>
-          </a:prstGeom>
-          <a:solidFill>
-            <a:srgbClr val="334155"/>
-          </a:solidFill>
-          <a:ln>
-            <a:noFill/>
-          </a:ln>
-        </p:spPr>
-        <p:style>
-          <a:lnRef idx="1">
-            <a:schemeClr val="accent1"/>
-          </a:lnRef>
-          <a:fillRef idx="3">
-            <a:schemeClr val="accent1"/>
-          </a:fillRef>
-          <a:effectRef idx="2">
-            <a:schemeClr val="accent1"/>
-          </a:effectRef>
-          <a:fontRef idx="minor">
-            <a:schemeClr val="lt1"/>
-          </a:fontRef>
-        </p:style>
-        <p:txBody>
-          <a:bodyPr rtlCol="0" anchor="ctr"/>
-          <a:lstStyle/>
-          <a:p>
-            <a:pPr algn="ctr">
-              <a:defRPr sz="1300" b="1">
-                <a:solidFill>
-                  <a:srgbClr val="FFFFFF"/>
-                </a:solidFill>
-              </a:defRPr>
-            </a:pPr>
-            <a:r>
-              <a:t>@IdClass / @EmbeddedId</a:t>
-            </a:r>
-          </a:p>
-        </p:txBody>
-      </p:sp>
-      <p:sp>
-        <p:nvSpPr>
-          <p:cNvPr id="16" name="TextBox 15"/>
-          <p:cNvSpPr txBox="1"/>
-          <p:nvPr/>
-        </p:nvSpPr>
-        <p:spPr>
-          <a:xfrm>
-            <a:off x="8961120" y="2103120"/>
-            <a:ext cx="2286000" cy="3931920"/>
-          </a:xfrm>
-          <a:prstGeom prst="rect">
-            <a:avLst/>
-          </a:prstGeom>
-          <a:noFill/>
-        </p:spPr>
-        <p:txBody>
-          <a:bodyPr wrap="square">
-            <a:spAutoFit/>
-          </a:bodyPr>
-          <a:lstStyle/>
-          <a:p>
-            <a:pPr>
-              <a:spcAft>
-                <a:spcPts val="200"/>
-              </a:spcAft>
-              <a:defRPr b="1" sz="1100"/>
-            </a:pPr>
-            <a:r>
-              <a:t>Funktion:</a:t>
-            </a:r>
-          </a:p>
-          <a:p>
-            <a:pPr>
-              <a:spcAft>
-                <a:spcPts val="800"/>
-              </a:spcAft>
-              <a:defRPr sz="1000"/>
-            </a:pPr>
-            <a:r>
-              <a:t>Zusammengesetzter Schlüssel</a:t>
-            </a:r>
-          </a:p>
-          <a:p>
-            <a:pPr>
-              <a:spcAft>
-                <a:spcPts val="200"/>
-              </a:spcAft>
-              <a:defRPr b="1" sz="1100">
-                <a:solidFill>
-                  <a:srgbClr val="0D9488"/>
-                </a:solidFill>
-              </a:defRPr>
-            </a:pPr>
-            <a:r>
-              <a:t>+ Vorteil:</a:t>
-            </a:r>
-          </a:p>
-          <a:p>
-            <a:pPr>
-              <a:spcAft>
-                <a:spcPts val="800"/>
-              </a:spcAft>
-              <a:defRPr sz="1000"/>
-            </a:pPr>
-            <a:r>
-              <a:t>Ideal für Alttabellen ohne künstlichen PK</a:t>
-            </a:r>
-          </a:p>
-          <a:p>
-            <a:pPr>
-              <a:spcAft>
-                <a:spcPts val="200"/>
-              </a:spcAft>
-              <a:defRPr b="1" sz="1100">
-                <a:solidFill>
-                  <a:srgbClr val="DC2626"/>
-                </a:solidFill>
-              </a:defRPr>
-            </a:pPr>
-            <a:r>
-              <a:t>- Nachteil:</a:t>
-            </a:r>
-          </a:p>
-          <a:p>
-            <a:pPr>
-              <a:defRPr sz="1000"/>
-            </a:pPr>
-            <a:r>
-              <a:t>Aufwendigeres Mapping (equals, hashCode, Serializable)</a:t>
+              <a:defRPr sz="950">
+                <a:solidFill>
+                  <a:srgbClr val="1E293B"/>
+                </a:solidFill>
+                <a:latin typeface="Consolas"/>
+              </a:defRPr>
+            </a:pPr>
+            <a:r>
+              <a:t>@Override</a:t>
+            </a:r>
+            <a:br/>
+            <a:r>
+              <a:t>public boolean equals(Object o) {</a:t>
+            </a:r>
+            <a:br/>
+            <a:r>
+              <a:t>    if (this == o) return true;</a:t>
+            </a:r>
+            <a:br/>
+            <a:r>
+              <a:t>    if (o == null || getClass() != o.getClass()) return false;</a:t>
+            </a:r>
+            <a:br/>
+            <a:r>
+              <a:t>    Vehicle that = (Vehicle) o;</a:t>
+            </a:r>
+            <a:br/>
+            <a:r>
+              <a:t>    // ID-Vergleich nur wenn beide IDs nicht null sind</a:t>
+            </a:r>
+            <a:br/>
+            <a:r>
+              <a:t>    return id != null &amp;&amp; Objects.equals(id, that.id);</a:t>
+            </a:r>
+            <a:br/>
+            <a:r>
+              <a:t>}</a:t>
+            </a:r>
+            <a:br/>
+            <a:br/>
+            <a:r>
+              <a:t>@Override</a:t>
+            </a:r>
+            <a:br/>
+            <a:r>
+              <a:t>public int hashCode() {</a:t>
+            </a:r>
+            <a:br/>
+            <a:r>
+              <a:t>    // Fester Hashcode für alle Instanzen dieser Klasse!</a:t>
+            </a:r>
+            <a:br/>
+            <a:r>
+              <a:t>    return getClass().hashCode();</a:t>
+            </a:r>
+            <a:br/>
+            <a:r>
+              <a:t>}</a:t>
             </a:r>
           </a:p>
         </p:txBody>
@@ -6083,21 +5453,337 @@
           <a:noFill/>
         </p:spPr>
         <p:txBody>
+          <a:bodyPr wrap="square" lIns="0" rIns="0" tIns="0" bIns="0">
+            <a:spAutoFit/>
+          </a:bodyPr>
+          <a:lstStyle/>
+          <a:p>
+            <a:pPr>
+              <a:defRPr sz="1100" b="1">
+                <a:solidFill>
+                  <a:srgbClr val="2563EB"/>
+                </a:solidFill>
+                <a:latin typeface="Segoe UI"/>
+              </a:defRPr>
+            </a:pPr>
+            <a:r>
+              <a:t>ARCHITEKTUR &amp; PERFORMANCE</a:t>
+            </a:r>
+          </a:p>
+        </p:txBody>
+      </p:sp>
+      <p:sp>
+        <p:nvSpPr>
+          <p:cNvPr id="4" name="TextBox 3"/>
+          <p:cNvSpPr txBox="1"/>
+          <p:nvPr/>
+        </p:nvSpPr>
+        <p:spPr>
+          <a:xfrm>
+            <a:off x="731520" y="749808"/>
+            <a:ext cx="10728655" cy="548640"/>
+          </a:xfrm>
+          <a:prstGeom prst="rect">
+            <a:avLst/>
+          </a:prstGeom>
+          <a:noFill/>
+        </p:spPr>
+        <p:txBody>
+          <a:bodyPr wrap="square" lIns="0" rIns="0" tIns="0" bIns="0">
+            <a:spAutoFit/>
+          </a:bodyPr>
+          <a:lstStyle/>
+          <a:p>
+            <a:pPr>
+              <a:defRPr sz="2100" b="1">
+                <a:solidFill>
+                  <a:srgbClr val="1E293B"/>
+                </a:solidFill>
+                <a:latin typeface="Segoe UI"/>
+              </a:defRPr>
+            </a:pPr>
+            <a:r>
+              <a:t>2.5 Persistence Context &amp; Batch Processing</a:t>
+            </a:r>
+          </a:p>
+        </p:txBody>
+      </p:sp>
+      <p:sp>
+        <p:nvSpPr>
+          <p:cNvPr id="5" name="Rounded Rectangle 4"/>
+          <p:cNvSpPr/>
+          <p:nvPr/>
+        </p:nvSpPr>
+        <p:spPr>
+          <a:xfrm>
+            <a:off x="731520" y="1463040"/>
+            <a:ext cx="10728655" cy="4846320"/>
+          </a:xfrm>
+          <a:prstGeom prst="roundRect">
+            <a:avLst/>
+          </a:prstGeom>
+          <a:solidFill>
+            <a:srgbClr val="FFFFFF"/>
+          </a:solidFill>
+          <a:ln w="19050">
+            <a:solidFill>
+              <a:srgbClr val="E2E8F0"/>
+            </a:solidFill>
+          </a:ln>
+        </p:spPr>
+        <p:style>
+          <a:lnRef idx="1">
+            <a:schemeClr val="accent1"/>
+          </a:lnRef>
+          <a:fillRef idx="3">
+            <a:schemeClr val="accent1"/>
+          </a:fillRef>
+          <a:effectRef idx="2">
+            <a:schemeClr val="accent1"/>
+          </a:effectRef>
+          <a:fontRef idx="minor">
+            <a:schemeClr val="lt1"/>
+          </a:fontRef>
+        </p:style>
+        <p:txBody>
+          <a:bodyPr rtlCol="0" anchor="ctr"/>
+          <a:lstStyle/>
+          <a:p>
+            <a:pPr algn="ctr"/>
+          </a:p>
+        </p:txBody>
+      </p:sp>
+      <p:sp>
+        <p:nvSpPr>
+          <p:cNvPr id="6" name="TextBox 5"/>
+          <p:cNvSpPr txBox="1"/>
+          <p:nvPr/>
+        </p:nvSpPr>
+        <p:spPr>
+          <a:xfrm>
+            <a:off x="914400" y="1645920"/>
+            <a:ext cx="10362895" cy="4480560"/>
+          </a:xfrm>
+          <a:prstGeom prst="rect">
+            <a:avLst/>
+          </a:prstGeom>
+          <a:noFill/>
+        </p:spPr>
+        <p:txBody>
           <a:bodyPr wrap="square">
             <a:spAutoFit/>
           </a:bodyPr>
           <a:lstStyle/>
           <a:p>
             <a:pPr>
+              <a:spcAft>
+                <a:spcPts val="600"/>
+              </a:spcAft>
+              <a:defRPr sz="1400" b="1">
+                <a:solidFill>
+                  <a:srgbClr val="2563EB"/>
+                </a:solidFill>
+              </a:defRPr>
+            </a:pPr>
+            <a:r>
+              <a:t>Speicherbereinigung bei Massendaten-Verarbeitung</a:t>
+            </a:r>
+          </a:p>
+          <a:p>
+            <a:pPr>
+              <a:spcAft>
+                <a:spcPts val="600"/>
+              </a:spcAft>
+              <a:defRPr sz="1200">
+                <a:solidFill>
+                  <a:srgbClr val="0F172A"/>
+                </a:solidFill>
+                <a:latin typeface="Segoe UI"/>
+              </a:defRPr>
+            </a:pPr>
+            <a:r>
+              <a:t>• Jede geladene oder persistierte Entity verbleibt dauerhaft im 1st-Level-Cache (EntityManager).</a:t>
+            </a:r>
+          </a:p>
+          <a:p>
+            <a:pPr>
+              <a:spcAft>
+                <a:spcPts val="600"/>
+              </a:spcAft>
+              <a:defRPr sz="1200">
+                <a:solidFill>
+                  <a:srgbClr val="0F172A"/>
+                </a:solidFill>
+                <a:latin typeface="Segoe UI"/>
+              </a:defRPr>
+            </a:pPr>
+            <a:r>
+              <a:t>• Beim Import von 100.000 Datensätzen führt dies zwangsläufig zu einem OutOfMemoryError.</a:t>
+            </a:r>
+          </a:p>
+          <a:p>
+            <a:pPr>
+              <a:spcAft>
+                <a:spcPts val="600"/>
+              </a:spcAft>
+              <a:defRPr sz="1200">
+                <a:solidFill>
+                  <a:srgbClr val="0F172A"/>
+                </a:solidFill>
+                <a:latin typeface="Segoe UI"/>
+              </a:defRPr>
+            </a:pPr>
+            <a:r>
+              <a:t>• Lösung: Regelmäßiges Spülen (flush()) und Entleeren (clear()) des Caches in Batches (z.B. alle 50-100 Einträge).</a:t>
+            </a:r>
+          </a:p>
+          <a:p>
+            <a:pPr>
+              <a:spcAft>
+                <a:spcPts val="800"/>
+              </a:spcAft>
+              <a:defRPr sz="1050">
+                <a:solidFill>
+                  <a:srgbClr val="1E293B"/>
+                </a:solidFill>
+                <a:latin typeface="Consolas"/>
+              </a:defRPr>
+            </a:pPr>
+            <a:r>
+              <a:t>for (int i = 0; i &lt; vehicles.size(); i++) {</a:t>
+            </a:r>
+            <a:br/>
+            <a:r>
+              <a:t>    em.persist(vehicles.get(i));</a:t>
+            </a:r>
+            <a:br/>
+            <a:r>
+              <a:t>    if (i &gt; 0 &amp;&amp; i % 50 == 0) {</a:t>
+            </a:r>
+            <a:br/>
+            <a:r>
+              <a:t>        em.flush(); // Schreibt anstehende INSERTs in die DB</a:t>
+            </a:r>
+            <a:br/>
+            <a:r>
+              <a:t>        em.clear(); // Leert den 1st-Level-Cache vollständig!</a:t>
+            </a:r>
+            <a:br/>
+            <a:r>
+              <a:t>    }</a:t>
+            </a:r>
+            <a:br/>
+            <a:r>
+              <a:t>}</a:t>
+            </a:r>
+            <a:br/>
+            <a:r>
+              <a:t>tx.commit();</a:t>
+            </a:r>
+          </a:p>
+        </p:txBody>
+      </p:sp>
+    </p:spTree>
+  </p:cSld>
+  <p:clrMapOvr>
+    <a:masterClrMapping/>
+  </p:clrMapOvr>
+</p:sld>
+</file>
+
+<file path=ppt/slides/slide16.xml><?xml version="1.0" encoding="utf-8"?>
+<p:sld xmlns:a="http://schemas.openxmlformats.org/drawingml/2006/main" xmlns:p="http://schemas.openxmlformats.org/presentationml/2006/main" xmlns:r="http://schemas.openxmlformats.org/officeDocument/2006/relationships">
+  <p:cSld>
+    <p:bg>
+      <p:bgPr>
+        <a:solidFill>
+          <a:srgbClr val="F8FAFC"/>
+        </a:solidFill>
+        <a:effectLst/>
+      </p:bgPr>
+    </p:bg>
+    <p:spTree>
+      <p:nvGrpSpPr>
+        <p:cNvPr id="1" name=""/>
+        <p:cNvGrpSpPr/>
+        <p:nvPr/>
+      </p:nvGrpSpPr>
+      <p:grpSpPr/>
+      <p:sp>
+        <p:nvSpPr>
+          <p:cNvPr id="2" name="Rectangle 1"/>
+          <p:cNvSpPr/>
+          <p:nvPr/>
+        </p:nvSpPr>
+        <p:spPr>
+          <a:xfrm>
+            <a:off x="731520" y="365760"/>
+            <a:ext cx="10728655" cy="54864"/>
+          </a:xfrm>
+          <a:prstGeom prst="rect">
+            <a:avLst/>
+          </a:prstGeom>
+          <a:solidFill>
+            <a:srgbClr val="D97706"/>
+          </a:solidFill>
+          <a:ln>
+            <a:noFill/>
+          </a:ln>
+        </p:spPr>
+        <p:style>
+          <a:lnRef idx="1">
+            <a:schemeClr val="accent1"/>
+          </a:lnRef>
+          <a:fillRef idx="3">
+            <a:schemeClr val="accent1"/>
+          </a:fillRef>
+          <a:effectRef idx="2">
+            <a:schemeClr val="accent1"/>
+          </a:effectRef>
+          <a:fontRef idx="minor">
+            <a:schemeClr val="lt1"/>
+          </a:fontRef>
+        </p:style>
+        <p:txBody>
+          <a:bodyPr rtlCol="0" anchor="ctr"/>
+          <a:lstStyle/>
+          <a:p>
+            <a:pPr algn="ctr"/>
+          </a:p>
+        </p:txBody>
+      </p:sp>
+      <p:sp>
+        <p:nvSpPr>
+          <p:cNvPr id="3" name="TextBox 2"/>
+          <p:cNvSpPr txBox="1"/>
+          <p:nvPr/>
+        </p:nvSpPr>
+        <p:spPr>
+          <a:xfrm>
+            <a:off x="731520" y="475488"/>
+            <a:ext cx="10728655" cy="292608"/>
+          </a:xfrm>
+          <a:prstGeom prst="rect">
+            <a:avLst/>
+          </a:prstGeom>
+          <a:noFill/>
+        </p:spPr>
+        <p:txBody>
+          <a:bodyPr wrap="square" lIns="0" rIns="0" tIns="0" bIns="0">
+            <a:spAutoFit/>
+          </a:bodyPr>
+          <a:lstStyle/>
+          <a:p>
+            <a:pPr>
               <a:defRPr sz="1100" b="1">
                 <a:solidFill>
-                  <a:srgbClr val="2563EB"/>
-                </a:solidFill>
-                <a:latin typeface="Segoe UI"/>
-              </a:defRPr>
-            </a:pPr>
-            <a:r>
-              <a:t>REFERENZ</a:t>
+                  <a:srgbClr val="D97706"/>
+                </a:solidFill>
+                <a:latin typeface="Segoe UI"/>
+              </a:defRPr>
+            </a:pPr>
+            <a:r>
+              <a:t>ARCHITEKTUR &amp; PERFORMANCE</a:t>
             </a:r>
           </a:p>
         </p:txBody>
@@ -6112,6 +5798,87 @@
           <a:xfrm>
             <a:off x="731520" y="749808"/>
             <a:ext cx="10728655" cy="548640"/>
+          </a:xfrm>
+          <a:prstGeom prst="rect">
+            <a:avLst/>
+          </a:prstGeom>
+          <a:noFill/>
+        </p:spPr>
+        <p:txBody>
+          <a:bodyPr wrap="square" lIns="0" rIns="0" tIns="0" bIns="0">
+            <a:spAutoFit/>
+          </a:bodyPr>
+          <a:lstStyle/>
+          <a:p>
+            <a:pPr>
+              <a:defRPr sz="2100" b="1">
+                <a:solidFill>
+                  <a:srgbClr val="1E293B"/>
+                </a:solidFill>
+                <a:latin typeface="Segoe UI"/>
+              </a:defRPr>
+            </a:pPr>
+            <a:r>
+              <a:t>2.6 Bulk Operations (executeUpdate) &amp; 1st-Level Cache</a:t>
+            </a:r>
+          </a:p>
+        </p:txBody>
+      </p:sp>
+      <p:sp>
+        <p:nvSpPr>
+          <p:cNvPr id="5" name="Rounded Rectangle 4"/>
+          <p:cNvSpPr/>
+          <p:nvPr/>
+        </p:nvSpPr>
+        <p:spPr>
+          <a:xfrm>
+            <a:off x="731520" y="1463040"/>
+            <a:ext cx="5212080" cy="4846320"/>
+          </a:xfrm>
+          <a:prstGeom prst="roundRect">
+            <a:avLst/>
+          </a:prstGeom>
+          <a:solidFill>
+            <a:srgbClr val="FEF2F2"/>
+          </a:solidFill>
+          <a:ln w="19050">
+            <a:solidFill>
+              <a:srgbClr val="FECACA"/>
+            </a:solidFill>
+          </a:ln>
+        </p:spPr>
+        <p:style>
+          <a:lnRef idx="1">
+            <a:schemeClr val="accent1"/>
+          </a:lnRef>
+          <a:fillRef idx="3">
+            <a:schemeClr val="accent1"/>
+          </a:fillRef>
+          <a:effectRef idx="2">
+            <a:schemeClr val="accent1"/>
+          </a:effectRef>
+          <a:fontRef idx="minor">
+            <a:schemeClr val="lt1"/>
+          </a:fontRef>
+        </p:style>
+        <p:txBody>
+          <a:bodyPr rtlCol="0" anchor="ctr"/>
+          <a:lstStyle/>
+          <a:p>
+            <a:pPr algn="ctr"/>
+          </a:p>
+        </p:txBody>
+      </p:sp>
+      <p:sp>
+        <p:nvSpPr>
+          <p:cNvPr id="6" name="TextBox 5"/>
+          <p:cNvSpPr txBox="1"/>
+          <p:nvPr/>
+        </p:nvSpPr>
+        <p:spPr>
+          <a:xfrm>
+            <a:off x="914400" y="1645920"/>
+            <a:ext cx="4846320" cy="4480560"/>
           </a:xfrm>
           <a:prstGeom prst="rect">
             <a:avLst/>
@@ -6125,15 +5892,2416 @@
           <a:lstStyle/>
           <a:p>
             <a:pPr>
-              <a:defRPr sz="2200" b="1">
+              <a:spcAft>
+                <a:spcPts val="600"/>
+              </a:spcAft>
+              <a:defRPr sz="1400" b="1">
+                <a:solidFill>
+                  <a:srgbClr val="DC2626"/>
+                </a:solidFill>
+              </a:defRPr>
+            </a:pPr>
+            <a:r>
+              <a:t>Die Stale-State-Falle bei Massenupdates</a:t>
+            </a:r>
+          </a:p>
+          <a:p>
+            <a:pPr>
+              <a:spcAft>
+                <a:spcPts val="600"/>
+              </a:spcAft>
+              <a:defRPr sz="1150">
+                <a:solidFill>
+                  <a:srgbClr val="0F172A"/>
+                </a:solidFill>
+                <a:latin typeface="Segoe UI"/>
+              </a:defRPr>
+            </a:pPr>
+            <a:r>
+              <a:t>• JPQL UPDATE und DELETE (query.executeUpdate()) werden direkt als SQL an die Datenbank gesendet.</a:t>
+            </a:r>
+          </a:p>
+          <a:p>
+            <a:pPr>
+              <a:spcAft>
+                <a:spcPts val="600"/>
+              </a:spcAft>
+              <a:defRPr sz="1150">
+                <a:solidFill>
+                  <a:srgbClr val="0F172A"/>
+                </a:solidFill>
+                <a:latin typeface="Segoe UI"/>
+              </a:defRPr>
+            </a:pPr>
+            <a:r>
+              <a:t>• Wichtig: Der Persistence Context (1st-Level-Cache) weiß nichts von dieser Massenänderung!</a:t>
+            </a:r>
+          </a:p>
+          <a:p>
+            <a:pPr>
+              <a:spcAft>
+                <a:spcPts val="600"/>
+              </a:spcAft>
+              <a:defRPr sz="1150">
+                <a:solidFill>
+                  <a:srgbClr val="0F172A"/>
+                </a:solidFill>
+                <a:latin typeface="Segoe UI"/>
+              </a:defRPr>
+            </a:pPr>
+            <a:r>
+              <a:t>• Bereits zuvor geladene Managed Entities behalten ihren alten Speicherstand (Stale Data).</a:t>
+            </a:r>
+          </a:p>
+          <a:p>
+            <a:pPr>
+              <a:spcAft>
+                <a:spcPts val="600"/>
+              </a:spcAft>
+              <a:defRPr sz="1150">
+                <a:solidFill>
+                  <a:srgbClr val="0F172A"/>
+                </a:solidFill>
+                <a:latin typeface="Segoe UI"/>
+              </a:defRPr>
+            </a:pPr>
+            <a:r>
+              <a:t>• Gefahr: Folgezugriffe arbeiten auf veralteten Objekten oder überschreiben den DB-Stand beim nächsten Flush!</a:t>
+            </a:r>
+          </a:p>
+        </p:txBody>
+      </p:sp>
+      <p:sp>
+        <p:nvSpPr>
+          <p:cNvPr id="7" name="Rounded Rectangle 6"/>
+          <p:cNvSpPr/>
+          <p:nvPr/>
+        </p:nvSpPr>
+        <p:spPr>
+          <a:xfrm>
+            <a:off x="6217920" y="1463040"/>
+            <a:ext cx="5212080" cy="4846320"/>
+          </a:xfrm>
+          <a:prstGeom prst="roundRect">
+            <a:avLst/>
+          </a:prstGeom>
+          <a:solidFill>
+            <a:srgbClr val="F0FDF4"/>
+          </a:solidFill>
+          <a:ln w="19050">
+            <a:solidFill>
+              <a:srgbClr val="BBF7D0"/>
+            </a:solidFill>
+          </a:ln>
+        </p:spPr>
+        <p:style>
+          <a:lnRef idx="1">
+            <a:schemeClr val="accent1"/>
+          </a:lnRef>
+          <a:fillRef idx="3">
+            <a:schemeClr val="accent1"/>
+          </a:fillRef>
+          <a:effectRef idx="2">
+            <a:schemeClr val="accent1"/>
+          </a:effectRef>
+          <a:fontRef idx="minor">
+            <a:schemeClr val="lt1"/>
+          </a:fontRef>
+        </p:style>
+        <p:txBody>
+          <a:bodyPr rtlCol="0" anchor="ctr"/>
+          <a:lstStyle/>
+          <a:p>
+            <a:pPr algn="ctr"/>
+          </a:p>
+        </p:txBody>
+      </p:sp>
+      <p:sp>
+        <p:nvSpPr>
+          <p:cNvPr id="8" name="TextBox 7"/>
+          <p:cNvSpPr txBox="1"/>
+          <p:nvPr/>
+        </p:nvSpPr>
+        <p:spPr>
+          <a:xfrm>
+            <a:off x="6400800" y="1645920"/>
+            <a:ext cx="4846320" cy="4480560"/>
+          </a:xfrm>
+          <a:prstGeom prst="rect">
+            <a:avLst/>
+          </a:prstGeom>
+          <a:noFill/>
+        </p:spPr>
+        <p:txBody>
+          <a:bodyPr wrap="square">
+            <a:spAutoFit/>
+          </a:bodyPr>
+          <a:lstStyle/>
+          <a:p>
+            <a:pPr>
+              <a:spcAft>
+                <a:spcPts val="600"/>
+              </a:spcAft>
+              <a:defRPr sz="1400" b="1">
+                <a:solidFill>
+                  <a:srgbClr val="0D9488"/>
+                </a:solidFill>
+              </a:defRPr>
+            </a:pPr>
+            <a:r>
+              <a:t>Das 3-Schritt-Muster (Flush -&gt; Execute -&gt; Clear)</a:t>
+            </a:r>
+          </a:p>
+          <a:p>
+            <a:pPr>
+              <a:spcAft>
+                <a:spcPts val="800"/>
+              </a:spcAft>
+              <a:defRPr sz="1000">
                 <a:solidFill>
                   <a:srgbClr val="1E293B"/>
                 </a:solidFill>
-                <a:latin typeface="Segoe UI"/>
-              </a:defRPr>
-            </a:pPr>
-            <a:r>
-              <a:t>3.1 CascadeType-Entscheidungsmatrix</a:t>
+                <a:latin typeface="Consolas"/>
+              </a:defRPr>
+            </a:pPr>
+            <a:r>
+              <a:t>// 1. Ungespeicherte Änderungen in die DB flushen</a:t>
+            </a:r>
+            <a:br/>
+            <a:r>
+              <a:t>em.flush();</a:t>
+            </a:r>
+            <a:br/>
+            <a:br/>
+            <a:r>
+              <a:t>// 2. Massen-Update direkt auf DB ausführen</a:t>
+            </a:r>
+            <a:br/>
+            <a:r>
+              <a:t>int updated = em.createQuery(</a:t>
+            </a:r>
+            <a:br/>
+            <a:r>
+              <a:t>    "UPDATE BulkVehicle v SET v.dailyRate = v.dailyRate * 1.1 " +</a:t>
+            </a:r>
+            <a:br/>
+            <a:r>
+              <a:t>    "WHERE v.active = true")</a:t>
+            </a:r>
+            <a:br/>
+            <a:r>
+              <a:t>    .executeUpdate();</a:t>
+            </a:r>
+            <a:br/>
+            <a:br/>
+            <a:r>
+              <a:t>// 3. Cache leeren, damit Entities frisch geladen werden!</a:t>
+            </a:r>
+            <a:br/>
+            <a:r>
+              <a:t>em.clear(); // oder gezielt em.refresh(entity);</a:t>
+            </a:r>
+          </a:p>
+          <a:p>
+            <a:pPr>
+              <a:spcAft>
+                <a:spcPts val="400"/>
+              </a:spcAft>
+              <a:defRPr sz="1150">
+                <a:solidFill>
+                  <a:srgbClr val="0F172A"/>
+                </a:solidFill>
+                <a:latin typeface="Segoe UI"/>
+              </a:defRPr>
+            </a:pPr>
+            <a:r>
+              <a:t>• Regel: Nach executeUpdate() immer em.clear() aufrufen, bevor weiter mit Entities gearbeitet wird.</a:t>
+            </a:r>
+          </a:p>
+        </p:txBody>
+      </p:sp>
+    </p:spTree>
+  </p:cSld>
+  <p:clrMapOvr>
+    <a:masterClrMapping/>
+  </p:clrMapOvr>
+</p:sld>
+</file>
+
+<file path=ppt/slides/slide17.xml><?xml version="1.0" encoding="utf-8"?>
+<p:sld xmlns:a="http://schemas.openxmlformats.org/drawingml/2006/main" xmlns:p="http://schemas.openxmlformats.org/presentationml/2006/main" xmlns:r="http://schemas.openxmlformats.org/officeDocument/2006/relationships">
+  <p:cSld>
+    <p:bg>
+      <p:bgPr>
+        <a:solidFill>
+          <a:srgbClr val="F8FAFC"/>
+        </a:solidFill>
+        <a:effectLst/>
+      </p:bgPr>
+    </p:bg>
+    <p:spTree>
+      <p:nvGrpSpPr>
+        <p:cNvPr id="1" name=""/>
+        <p:cNvGrpSpPr/>
+        <p:nvPr/>
+      </p:nvGrpSpPr>
+      <p:grpSpPr/>
+      <p:sp>
+        <p:nvSpPr>
+          <p:cNvPr id="2" name="Rectangle 1"/>
+          <p:cNvSpPr/>
+          <p:nvPr/>
+        </p:nvSpPr>
+        <p:spPr>
+          <a:xfrm>
+            <a:off x="731520" y="365760"/>
+            <a:ext cx="10728655" cy="54864"/>
+          </a:xfrm>
+          <a:prstGeom prst="rect">
+            <a:avLst/>
+          </a:prstGeom>
+          <a:solidFill>
+            <a:srgbClr val="2563EB"/>
+          </a:solidFill>
+          <a:ln>
+            <a:noFill/>
+          </a:ln>
+        </p:spPr>
+        <p:style>
+          <a:lnRef idx="1">
+            <a:schemeClr val="accent1"/>
+          </a:lnRef>
+          <a:fillRef idx="3">
+            <a:schemeClr val="accent1"/>
+          </a:fillRef>
+          <a:effectRef idx="2">
+            <a:schemeClr val="accent1"/>
+          </a:effectRef>
+          <a:fontRef idx="minor">
+            <a:schemeClr val="lt1"/>
+          </a:fontRef>
+        </p:style>
+        <p:txBody>
+          <a:bodyPr rtlCol="0" anchor="ctr"/>
+          <a:lstStyle/>
+          <a:p>
+            <a:pPr algn="ctr"/>
+          </a:p>
+        </p:txBody>
+      </p:sp>
+      <p:sp>
+        <p:nvSpPr>
+          <p:cNvPr id="3" name="TextBox 2"/>
+          <p:cNvSpPr txBox="1"/>
+          <p:nvPr/>
+        </p:nvSpPr>
+        <p:spPr>
+          <a:xfrm>
+            <a:off x="731520" y="475488"/>
+            <a:ext cx="10728655" cy="292608"/>
+          </a:xfrm>
+          <a:prstGeom prst="rect">
+            <a:avLst/>
+          </a:prstGeom>
+          <a:noFill/>
+        </p:spPr>
+        <p:txBody>
+          <a:bodyPr wrap="square" lIns="0" rIns="0" tIns="0" bIns="0">
+            <a:spAutoFit/>
+          </a:bodyPr>
+          <a:lstStyle/>
+          <a:p>
+            <a:pPr>
+              <a:defRPr sz="1100" b="1">
+                <a:solidFill>
+                  <a:srgbClr val="2563EB"/>
+                </a:solidFill>
+                <a:latin typeface="Segoe UI"/>
+              </a:defRPr>
+            </a:pPr>
+            <a:r>
+              <a:t>ARCHITEKTUR &amp; PERFORMANCE</a:t>
+            </a:r>
+          </a:p>
+        </p:txBody>
+      </p:sp>
+      <p:sp>
+        <p:nvSpPr>
+          <p:cNvPr id="4" name="TextBox 3"/>
+          <p:cNvSpPr txBox="1"/>
+          <p:nvPr/>
+        </p:nvSpPr>
+        <p:spPr>
+          <a:xfrm>
+            <a:off x="731520" y="749808"/>
+            <a:ext cx="10728655" cy="548640"/>
+          </a:xfrm>
+          <a:prstGeom prst="rect">
+            <a:avLst/>
+          </a:prstGeom>
+          <a:noFill/>
+        </p:spPr>
+        <p:txBody>
+          <a:bodyPr wrap="square" lIns="0" rIns="0" tIns="0" bIns="0">
+            <a:spAutoFit/>
+          </a:bodyPr>
+          <a:lstStyle/>
+          <a:p>
+            <a:pPr>
+              <a:defRPr sz="2100" b="1">
+                <a:solidFill>
+                  <a:srgbClr val="1E293B"/>
+                </a:solidFill>
+                <a:latin typeface="Segoe UI"/>
+              </a:defRPr>
+            </a:pPr>
+            <a:r>
+              <a:t>2.7 DTO-Projektionen (Constructor Expressions)</a:t>
+            </a:r>
+          </a:p>
+        </p:txBody>
+      </p:sp>
+      <p:sp>
+        <p:nvSpPr>
+          <p:cNvPr id="5" name="Rounded Rectangle 4"/>
+          <p:cNvSpPr/>
+          <p:nvPr/>
+        </p:nvSpPr>
+        <p:spPr>
+          <a:xfrm>
+            <a:off x="731520" y="1463040"/>
+            <a:ext cx="10728655" cy="4846320"/>
+          </a:xfrm>
+          <a:prstGeom prst="roundRect">
+            <a:avLst/>
+          </a:prstGeom>
+          <a:solidFill>
+            <a:srgbClr val="FFFFFF"/>
+          </a:solidFill>
+          <a:ln w="19050">
+            <a:solidFill>
+              <a:srgbClr val="E2E8F0"/>
+            </a:solidFill>
+          </a:ln>
+        </p:spPr>
+        <p:style>
+          <a:lnRef idx="1">
+            <a:schemeClr val="accent1"/>
+          </a:lnRef>
+          <a:fillRef idx="3">
+            <a:schemeClr val="accent1"/>
+          </a:fillRef>
+          <a:effectRef idx="2">
+            <a:schemeClr val="accent1"/>
+          </a:effectRef>
+          <a:fontRef idx="minor">
+            <a:schemeClr val="lt1"/>
+          </a:fontRef>
+        </p:style>
+        <p:txBody>
+          <a:bodyPr rtlCol="0" anchor="ctr"/>
+          <a:lstStyle/>
+          <a:p>
+            <a:pPr algn="ctr"/>
+          </a:p>
+        </p:txBody>
+      </p:sp>
+      <p:sp>
+        <p:nvSpPr>
+          <p:cNvPr id="6" name="TextBox 5"/>
+          <p:cNvSpPr txBox="1"/>
+          <p:nvPr/>
+        </p:nvSpPr>
+        <p:spPr>
+          <a:xfrm>
+            <a:off x="914400" y="1645920"/>
+            <a:ext cx="10362895" cy="4480560"/>
+          </a:xfrm>
+          <a:prstGeom prst="rect">
+            <a:avLst/>
+          </a:prstGeom>
+          <a:noFill/>
+        </p:spPr>
+        <p:txBody>
+          <a:bodyPr wrap="square">
+            <a:spAutoFit/>
+          </a:bodyPr>
+          <a:lstStyle/>
+          <a:p>
+            <a:pPr>
+              <a:spcAft>
+                <a:spcPts val="600"/>
+              </a:spcAft>
+              <a:defRPr sz="1400" b="1">
+                <a:solidFill>
+                  <a:srgbClr val="2563EB"/>
+                </a:solidFill>
+              </a:defRPr>
+            </a:pPr>
+            <a:r>
+              <a:t>Reine Lese-Views ohne Entity-Overhead projizieren</a:t>
+            </a:r>
+          </a:p>
+          <a:p>
+            <a:pPr>
+              <a:spcAft>
+                <a:spcPts val="600"/>
+              </a:spcAft>
+              <a:defRPr sz="1200">
+                <a:solidFill>
+                  <a:srgbClr val="0F172A"/>
+                </a:solidFill>
+                <a:latin typeface="Segoe UI"/>
+              </a:defRPr>
+            </a:pPr>
+            <a:r>
+              <a:t>• Für REST-APIs, Tabellenansichten und Reports müssen selten vollständige Managed Entities geladen werden.</a:t>
+            </a:r>
+          </a:p>
+          <a:p>
+            <a:pPr>
+              <a:spcAft>
+                <a:spcPts val="600"/>
+              </a:spcAft>
+              <a:defRPr sz="1200">
+                <a:solidFill>
+                  <a:srgbClr val="0F172A"/>
+                </a:solidFill>
+                <a:latin typeface="Segoe UI"/>
+              </a:defRPr>
+            </a:pPr>
+            <a:r>
+              <a:t>• Constructor Expressions (SELECT new ...) instanziieren schlanke, unveränderliche Java-Records oder DTOs direkt im SELECT.</a:t>
+            </a:r>
+          </a:p>
+          <a:p>
+            <a:pPr>
+              <a:spcAft>
+                <a:spcPts val="600"/>
+              </a:spcAft>
+              <a:defRPr sz="1200">
+                <a:solidFill>
+                  <a:srgbClr val="0F172A"/>
+                </a:solidFill>
+                <a:latin typeface="Segoe UI"/>
+              </a:defRPr>
+            </a:pPr>
+            <a:r>
+              <a:t>• Kein Dirty Checking Overhead, kein First-Level-Cache, keine LazyInitializationException im Web-Layer!</a:t>
+            </a:r>
+          </a:p>
+          <a:p>
+            <a:pPr>
+              <a:spcAft>
+                <a:spcPts val="800"/>
+              </a:spcAft>
+              <a:defRPr sz="1050">
+                <a:solidFill>
+                  <a:srgbClr val="1E293B"/>
+                </a:solidFill>
+                <a:latin typeface="Consolas"/>
+              </a:defRPr>
+            </a:pPr>
+            <a:r>
+              <a:t>// DTO Definition (z.B. Java Record):</a:t>
+            </a:r>
+            <a:br/>
+            <a:r>
+              <a:t>public record VehicleSummaryDto(String brand, String model, double dailyRate) {}</a:t>
+            </a:r>
+            <a:br/>
+            <a:br/>
+            <a:r>
+              <a:t>// JPQL Query mit vollqualifiziertem Klassennamen:</a:t>
+            </a:r>
+            <a:br/>
+            <a:r>
+              <a:t>List&lt;VehicleSummaryDto&gt; dtos = em.createQuery(</a:t>
+            </a:r>
+            <a:br/>
+            <a:r>
+              <a:t>    "SELECT new net.rentacar.dto.VehicleSummaryDto(v.brand, v.modell, v.dailyRate) " +</a:t>
+            </a:r>
+            <a:br/>
+            <a:r>
+              <a:t>    "FROM Vehicle v WHERE v.active = true", VehicleSummaryDto.class)</a:t>
+            </a:r>
+            <a:br/>
+            <a:r>
+              <a:t>    .getResultList();</a:t>
+            </a:r>
+          </a:p>
+        </p:txBody>
+      </p:sp>
+    </p:spTree>
+  </p:cSld>
+  <p:clrMapOvr>
+    <a:masterClrMapping/>
+  </p:clrMapOvr>
+</p:sld>
+</file>
+
+<file path=ppt/slides/slide18.xml><?xml version="1.0" encoding="utf-8"?>
+<p:sld xmlns:a="http://schemas.openxmlformats.org/drawingml/2006/main" xmlns:p="http://schemas.openxmlformats.org/presentationml/2006/main" xmlns:r="http://schemas.openxmlformats.org/officeDocument/2006/relationships">
+  <p:cSld>
+    <p:bg>
+      <p:bgPr>
+        <a:solidFill>
+          <a:srgbClr val="F8FAFC"/>
+        </a:solidFill>
+        <a:effectLst/>
+      </p:bgPr>
+    </p:bg>
+    <p:spTree>
+      <p:nvGrpSpPr>
+        <p:cNvPr id="1" name=""/>
+        <p:cNvGrpSpPr/>
+        <p:nvPr/>
+      </p:nvGrpSpPr>
+      <p:grpSpPr/>
+      <p:sp>
+        <p:nvSpPr>
+          <p:cNvPr id="2" name="Rectangle 1"/>
+          <p:cNvSpPr/>
+          <p:nvPr/>
+        </p:nvSpPr>
+        <p:spPr>
+          <a:xfrm>
+            <a:off x="731520" y="365760"/>
+            <a:ext cx="10728655" cy="54864"/>
+          </a:xfrm>
+          <a:prstGeom prst="rect">
+            <a:avLst/>
+          </a:prstGeom>
+          <a:solidFill>
+            <a:srgbClr val="2563EB"/>
+          </a:solidFill>
+          <a:ln>
+            <a:noFill/>
+          </a:ln>
+        </p:spPr>
+        <p:style>
+          <a:lnRef idx="1">
+            <a:schemeClr val="accent1"/>
+          </a:lnRef>
+          <a:fillRef idx="3">
+            <a:schemeClr val="accent1"/>
+          </a:fillRef>
+          <a:effectRef idx="2">
+            <a:schemeClr val="accent1"/>
+          </a:effectRef>
+          <a:fontRef idx="minor">
+            <a:schemeClr val="lt1"/>
+          </a:fontRef>
+        </p:style>
+        <p:txBody>
+          <a:bodyPr rtlCol="0" anchor="ctr"/>
+          <a:lstStyle/>
+          <a:p>
+            <a:pPr algn="ctr"/>
+          </a:p>
+        </p:txBody>
+      </p:sp>
+      <p:sp>
+        <p:nvSpPr>
+          <p:cNvPr id="3" name="TextBox 2"/>
+          <p:cNvSpPr txBox="1"/>
+          <p:nvPr/>
+        </p:nvSpPr>
+        <p:spPr>
+          <a:xfrm>
+            <a:off x="731520" y="475488"/>
+            <a:ext cx="10728655" cy="292608"/>
+          </a:xfrm>
+          <a:prstGeom prst="rect">
+            <a:avLst/>
+          </a:prstGeom>
+          <a:noFill/>
+        </p:spPr>
+        <p:txBody>
+          <a:bodyPr wrap="square" lIns="0" rIns="0" tIns="0" bIns="0">
+            <a:spAutoFit/>
+          </a:bodyPr>
+          <a:lstStyle/>
+          <a:p>
+            <a:pPr>
+              <a:defRPr sz="1100" b="1">
+                <a:solidFill>
+                  <a:srgbClr val="2563EB"/>
+                </a:solidFill>
+                <a:latin typeface="Segoe UI"/>
+              </a:defRPr>
+            </a:pPr>
+            <a:r>
+              <a:t>ARCHITEKTUR &amp; SCHLÜSSEL</a:t>
+            </a:r>
+          </a:p>
+        </p:txBody>
+      </p:sp>
+      <p:sp>
+        <p:nvSpPr>
+          <p:cNvPr id="4" name="TextBox 3"/>
+          <p:cNvSpPr txBox="1"/>
+          <p:nvPr/>
+        </p:nvSpPr>
+        <p:spPr>
+          <a:xfrm>
+            <a:off x="731520" y="749808"/>
+            <a:ext cx="10728655" cy="548640"/>
+          </a:xfrm>
+          <a:prstGeom prst="rect">
+            <a:avLst/>
+          </a:prstGeom>
+          <a:noFill/>
+        </p:spPr>
+        <p:txBody>
+          <a:bodyPr wrap="square" lIns="0" rIns="0" tIns="0" bIns="0">
+            <a:spAutoFit/>
+          </a:bodyPr>
+          <a:lstStyle/>
+          <a:p>
+            <a:pPr>
+              <a:defRPr sz="2100" b="1">
+                <a:solidFill>
+                  <a:srgbClr val="1E293B"/>
+                </a:solidFill>
+                <a:latin typeface="Segoe UI"/>
+              </a:defRPr>
+            </a:pPr>
+            <a:r>
+              <a:t>2.8 Composite Keys: @EmbeddedId vs. @IdClass</a:t>
+            </a:r>
+          </a:p>
+        </p:txBody>
+      </p:sp>
+      <p:sp>
+        <p:nvSpPr>
+          <p:cNvPr id="5" name="Rounded Rectangle 4"/>
+          <p:cNvSpPr/>
+          <p:nvPr/>
+        </p:nvSpPr>
+        <p:spPr>
+          <a:xfrm>
+            <a:off x="731520" y="1463040"/>
+            <a:ext cx="5212080" cy="4846320"/>
+          </a:xfrm>
+          <a:prstGeom prst="roundRect">
+            <a:avLst/>
+          </a:prstGeom>
+          <a:solidFill>
+            <a:srgbClr val="F0FDF4"/>
+          </a:solidFill>
+          <a:ln w="19050">
+            <a:solidFill>
+              <a:srgbClr val="BBF7D0"/>
+            </a:solidFill>
+          </a:ln>
+        </p:spPr>
+        <p:style>
+          <a:lnRef idx="1">
+            <a:schemeClr val="accent1"/>
+          </a:lnRef>
+          <a:fillRef idx="3">
+            <a:schemeClr val="accent1"/>
+          </a:fillRef>
+          <a:effectRef idx="2">
+            <a:schemeClr val="accent1"/>
+          </a:effectRef>
+          <a:fontRef idx="minor">
+            <a:schemeClr val="lt1"/>
+          </a:fontRef>
+        </p:style>
+        <p:txBody>
+          <a:bodyPr rtlCol="0" anchor="ctr"/>
+          <a:lstStyle/>
+          <a:p>
+            <a:pPr algn="ctr"/>
+          </a:p>
+        </p:txBody>
+      </p:sp>
+      <p:sp>
+        <p:nvSpPr>
+          <p:cNvPr id="6" name="TextBox 5"/>
+          <p:cNvSpPr txBox="1"/>
+          <p:nvPr/>
+        </p:nvSpPr>
+        <p:spPr>
+          <a:xfrm>
+            <a:off x="914400" y="1645920"/>
+            <a:ext cx="4846320" cy="4480560"/>
+          </a:xfrm>
+          <a:prstGeom prst="rect">
+            <a:avLst/>
+          </a:prstGeom>
+          <a:noFill/>
+        </p:spPr>
+        <p:txBody>
+          <a:bodyPr wrap="square">
+            <a:spAutoFit/>
+          </a:bodyPr>
+          <a:lstStyle/>
+          <a:p>
+            <a:pPr>
+              <a:spcAft>
+                <a:spcPts val="600"/>
+              </a:spcAft>
+              <a:defRPr sz="1400" b="1">
+                <a:solidFill>
+                  <a:srgbClr val="0D9488"/>
+                </a:solidFill>
+              </a:defRPr>
+            </a:pPr>
+            <a:r>
+              <a:t>@EmbeddedId (Empfohlener Standard)</a:t>
+            </a:r>
+          </a:p>
+          <a:p>
+            <a:pPr>
+              <a:spcAft>
+                <a:spcPts val="600"/>
+              </a:spcAft>
+              <a:defRPr sz="1150">
+                <a:solidFill>
+                  <a:srgbClr val="0F172A"/>
+                </a:solidFill>
+                <a:latin typeface="Segoe UI"/>
+              </a:defRPr>
+            </a:pPr>
+            <a:r>
+              <a:t>• Kompaktes Schlüsselobjekt mit @Embeddable, Serializable und equals/hashCode.</a:t>
+            </a:r>
+          </a:p>
+          <a:p>
+            <a:pPr>
+              <a:spcAft>
+                <a:spcPts val="600"/>
+              </a:spcAft>
+              <a:defRPr sz="1150">
+                <a:solidFill>
+                  <a:srgbClr val="0F172A"/>
+                </a:solidFill>
+                <a:latin typeface="Segoe UI"/>
+              </a:defRPr>
+            </a:pPr>
+            <a:r>
+              <a:t>• Klare Objektorientierung: Entity hat genau 1 ID-Attribut:</a:t>
+            </a:r>
+          </a:p>
+          <a:p>
+            <a:pPr>
+              <a:spcAft>
+                <a:spcPts val="600"/>
+              </a:spcAft>
+              <a:defRPr sz="1150">
+                <a:solidFill>
+                  <a:srgbClr val="0F172A"/>
+                </a:solidFill>
+                <a:latin typeface="Segoe UI"/>
+              </a:defRPr>
+            </a:pPr>
+            <a:r>
+              <a:t>•   @EmbeddedId private BookingId id;</a:t>
+            </a:r>
+          </a:p>
+          <a:p>
+            <a:pPr>
+              <a:spcAft>
+                <a:spcPts val="600"/>
+              </a:spcAft>
+              <a:defRPr sz="1150">
+                <a:solidFill>
+                  <a:srgbClr val="0F172A"/>
+                </a:solidFill>
+                <a:latin typeface="Segoe UI"/>
+              </a:defRPr>
+            </a:pPr>
+            <a:r>
+              <a:t>• Einfaches und typsicheres Finden:</a:t>
+            </a:r>
+          </a:p>
+          <a:p>
+            <a:pPr>
+              <a:spcAft>
+                <a:spcPts val="600"/>
+              </a:spcAft>
+              <a:defRPr sz="1150">
+                <a:solidFill>
+                  <a:srgbClr val="0F172A"/>
+                </a:solidFill>
+                <a:latin typeface="Segoe UI"/>
+              </a:defRPr>
+            </a:pPr>
+            <a:r>
+              <a:t>•   em.find(Booking.class, new BookingId('R-01', 'BER'));</a:t>
+            </a:r>
+          </a:p>
+          <a:p>
+            <a:pPr>
+              <a:spcAft>
+                <a:spcPts val="600"/>
+              </a:spcAft>
+              <a:defRPr sz="1150">
+                <a:solidFill>
+                  <a:srgbClr val="0F172A"/>
+                </a:solidFill>
+                <a:latin typeface="Segoe UI"/>
+              </a:defRPr>
+            </a:pPr>
+            <a:r>
+              <a:t>• Wartungsfreundlich und robust bei Refactorings.</a:t>
+            </a:r>
+          </a:p>
+        </p:txBody>
+      </p:sp>
+      <p:sp>
+        <p:nvSpPr>
+          <p:cNvPr id="7" name="Rounded Rectangle 6"/>
+          <p:cNvSpPr/>
+          <p:nvPr/>
+        </p:nvSpPr>
+        <p:spPr>
+          <a:xfrm>
+            <a:off x="6217920" y="1463040"/>
+            <a:ext cx="5212080" cy="4846320"/>
+          </a:xfrm>
+          <a:prstGeom prst="roundRect">
+            <a:avLst/>
+          </a:prstGeom>
+          <a:solidFill>
+            <a:srgbClr val="FFFFFF"/>
+          </a:solidFill>
+          <a:ln w="19050">
+            <a:solidFill>
+              <a:srgbClr val="E2E8F0"/>
+            </a:solidFill>
+          </a:ln>
+        </p:spPr>
+        <p:style>
+          <a:lnRef idx="1">
+            <a:schemeClr val="accent1"/>
+          </a:lnRef>
+          <a:fillRef idx="3">
+            <a:schemeClr val="accent1"/>
+          </a:fillRef>
+          <a:effectRef idx="2">
+            <a:schemeClr val="accent1"/>
+          </a:effectRef>
+          <a:fontRef idx="minor">
+            <a:schemeClr val="lt1"/>
+          </a:fontRef>
+        </p:style>
+        <p:txBody>
+          <a:bodyPr rtlCol="0" anchor="ctr"/>
+          <a:lstStyle/>
+          <a:p>
+            <a:pPr algn="ctr"/>
+          </a:p>
+        </p:txBody>
+      </p:sp>
+      <p:sp>
+        <p:nvSpPr>
+          <p:cNvPr id="8" name="TextBox 7"/>
+          <p:cNvSpPr txBox="1"/>
+          <p:nvPr/>
+        </p:nvSpPr>
+        <p:spPr>
+          <a:xfrm>
+            <a:off x="6400800" y="1645920"/>
+            <a:ext cx="4846320" cy="4480560"/>
+          </a:xfrm>
+          <a:prstGeom prst="rect">
+            <a:avLst/>
+          </a:prstGeom>
+          <a:noFill/>
+        </p:spPr>
+        <p:txBody>
+          <a:bodyPr wrap="square">
+            <a:spAutoFit/>
+          </a:bodyPr>
+          <a:lstStyle/>
+          <a:p>
+            <a:pPr>
+              <a:spcAft>
+                <a:spcPts val="600"/>
+              </a:spcAft>
+              <a:defRPr sz="1400" b="1">
+                <a:solidFill>
+                  <a:srgbClr val="1E293B"/>
+                </a:solidFill>
+              </a:defRPr>
+            </a:pPr>
+            <a:r>
+              <a:t>@IdClass (Historische Alternative)</a:t>
+            </a:r>
+          </a:p>
+          <a:p>
+            <a:pPr>
+              <a:spcAft>
+                <a:spcPts val="600"/>
+              </a:spcAft>
+              <a:defRPr sz="1150">
+                <a:solidFill>
+                  <a:srgbClr val="0F172A"/>
+                </a:solidFill>
+                <a:latin typeface="Segoe UI"/>
+              </a:defRPr>
+            </a:pPr>
+            <a:r>
+              <a:t>• Die Schlüsselattribute werden flach in der Entity wiederholt:</a:t>
+            </a:r>
+          </a:p>
+          <a:p>
+            <a:pPr>
+              <a:spcAft>
+                <a:spcPts val="600"/>
+              </a:spcAft>
+              <a:defRPr sz="1150">
+                <a:solidFill>
+                  <a:srgbClr val="0F172A"/>
+                </a:solidFill>
+                <a:latin typeface="Segoe UI"/>
+              </a:defRPr>
+            </a:pPr>
+            <a:r>
+              <a:t>•   @Id private String contractNumber;</a:t>
+            </a:r>
+          </a:p>
+          <a:p>
+            <a:pPr>
+              <a:spcAft>
+                <a:spcPts val="600"/>
+              </a:spcAft>
+              <a:defRPr sz="1150">
+                <a:solidFill>
+                  <a:srgbClr val="0F172A"/>
+                </a:solidFill>
+                <a:latin typeface="Segoe UI"/>
+              </a:defRPr>
+            </a:pPr>
+            <a:r>
+              <a:t>•   @Id private String branchCode;</a:t>
+            </a:r>
+          </a:p>
+          <a:p>
+            <a:pPr>
+              <a:spcAft>
+                <a:spcPts val="600"/>
+              </a:spcAft>
+              <a:defRPr sz="1150">
+                <a:solidFill>
+                  <a:srgbClr val="0F172A"/>
+                </a:solidFill>
+                <a:latin typeface="Segoe UI"/>
+              </a:defRPr>
+            </a:pPr>
+            <a:r>
+              <a:t>• Zusätzlich separate IdClass mit identischen Attributnamen nötig.</a:t>
+            </a:r>
+          </a:p>
+          <a:p>
+            <a:pPr>
+              <a:spcAft>
+                <a:spcPts val="600"/>
+              </a:spcAft>
+              <a:defRPr sz="1150">
+                <a:solidFill>
+                  <a:srgbClr val="0F172A"/>
+                </a:solidFill>
+                <a:latin typeface="Segoe UI"/>
+              </a:defRPr>
+            </a:pPr>
+            <a:r>
+              <a:t>• Nachteile: Redundanz, flaches Modell, unübersichtlich bei Beziehungen.</a:t>
+            </a:r>
+          </a:p>
+          <a:p>
+            <a:pPr>
+              <a:spcAft>
+                <a:spcPts val="600"/>
+              </a:spcAft>
+              <a:defRPr sz="1150">
+                <a:solidFill>
+                  <a:srgbClr val="0F172A"/>
+                </a:solidFill>
+                <a:latin typeface="Segoe UI"/>
+              </a:defRPr>
+            </a:pPr>
+            <a:r>
+              <a:t>• Fazit: In modernen Projekten immer @EmbeddedId bevorzugen!</a:t>
+            </a:r>
+          </a:p>
+        </p:txBody>
+      </p:sp>
+    </p:spTree>
+  </p:cSld>
+  <p:clrMapOvr>
+    <a:masterClrMapping/>
+  </p:clrMapOvr>
+</p:sld>
+</file>
+
+<file path=ppt/slides/slide19.xml><?xml version="1.0" encoding="utf-8"?>
+<p:sld xmlns:a="http://schemas.openxmlformats.org/drawingml/2006/main" xmlns:p="http://schemas.openxmlformats.org/presentationml/2006/main" xmlns:r="http://schemas.openxmlformats.org/officeDocument/2006/relationships">
+  <p:cSld>
+    <p:bg>
+      <p:bgPr>
+        <a:solidFill>
+          <a:srgbClr val="F8FAFC"/>
+        </a:solidFill>
+        <a:effectLst/>
+      </p:bgPr>
+    </p:bg>
+    <p:spTree>
+      <p:nvGrpSpPr>
+        <p:cNvPr id="1" name=""/>
+        <p:cNvGrpSpPr/>
+        <p:nvPr/>
+      </p:nvGrpSpPr>
+      <p:grpSpPr/>
+      <p:sp>
+        <p:nvSpPr>
+          <p:cNvPr id="2" name="Rectangle 1"/>
+          <p:cNvSpPr/>
+          <p:nvPr/>
+        </p:nvSpPr>
+        <p:spPr>
+          <a:xfrm>
+            <a:off x="731520" y="365760"/>
+            <a:ext cx="10728655" cy="54864"/>
+          </a:xfrm>
+          <a:prstGeom prst="rect">
+            <a:avLst/>
+          </a:prstGeom>
+          <a:solidFill>
+            <a:srgbClr val="0D9488"/>
+          </a:solidFill>
+          <a:ln>
+            <a:noFill/>
+          </a:ln>
+        </p:spPr>
+        <p:style>
+          <a:lnRef idx="1">
+            <a:schemeClr val="accent1"/>
+          </a:lnRef>
+          <a:fillRef idx="3">
+            <a:schemeClr val="accent1"/>
+          </a:fillRef>
+          <a:effectRef idx="2">
+            <a:schemeClr val="accent1"/>
+          </a:effectRef>
+          <a:fontRef idx="minor">
+            <a:schemeClr val="lt1"/>
+          </a:fontRef>
+        </p:style>
+        <p:txBody>
+          <a:bodyPr rtlCol="0" anchor="ctr"/>
+          <a:lstStyle/>
+          <a:p>
+            <a:pPr algn="ctr"/>
+          </a:p>
+        </p:txBody>
+      </p:sp>
+      <p:sp>
+        <p:nvSpPr>
+          <p:cNvPr id="3" name="TextBox 2"/>
+          <p:cNvSpPr txBox="1"/>
+          <p:nvPr/>
+        </p:nvSpPr>
+        <p:spPr>
+          <a:xfrm>
+            <a:off x="731520" y="475488"/>
+            <a:ext cx="10728655" cy="292608"/>
+          </a:xfrm>
+          <a:prstGeom prst="rect">
+            <a:avLst/>
+          </a:prstGeom>
+          <a:noFill/>
+        </p:spPr>
+        <p:txBody>
+          <a:bodyPr wrap="square" lIns="0" rIns="0" tIns="0" bIns="0">
+            <a:spAutoFit/>
+          </a:bodyPr>
+          <a:lstStyle/>
+          <a:p>
+            <a:pPr>
+              <a:defRPr sz="1100" b="1">
+                <a:solidFill>
+                  <a:srgbClr val="0D9488"/>
+                </a:solidFill>
+                <a:latin typeface="Segoe UI"/>
+              </a:defRPr>
+            </a:pPr>
+            <a:r>
+              <a:t>ARCHITEKTUR &amp; MAPPINGS</a:t>
+            </a:r>
+          </a:p>
+        </p:txBody>
+      </p:sp>
+      <p:sp>
+        <p:nvSpPr>
+          <p:cNvPr id="4" name="TextBox 3"/>
+          <p:cNvSpPr txBox="1"/>
+          <p:nvPr/>
+        </p:nvSpPr>
+        <p:spPr>
+          <a:xfrm>
+            <a:off x="731520" y="749808"/>
+            <a:ext cx="10728655" cy="548640"/>
+          </a:xfrm>
+          <a:prstGeom prst="rect">
+            <a:avLst/>
+          </a:prstGeom>
+          <a:noFill/>
+        </p:spPr>
+        <p:txBody>
+          <a:bodyPr wrap="square" lIns="0" rIns="0" tIns="0" bIns="0">
+            <a:spAutoFit/>
+          </a:bodyPr>
+          <a:lstStyle/>
+          <a:p>
+            <a:pPr>
+              <a:defRPr sz="2100" b="1">
+                <a:solidFill>
+                  <a:srgbClr val="1E293B"/>
+                </a:solidFill>
+                <a:latin typeface="Segoe UI"/>
+              </a:defRPr>
+            </a:pPr>
+            <a:r>
+              <a:t>2.9 Custom Type Mapping mit AttributeConverter</a:t>
+            </a:r>
+          </a:p>
+        </p:txBody>
+      </p:sp>
+      <p:sp>
+        <p:nvSpPr>
+          <p:cNvPr id="5" name="Rounded Rectangle 4"/>
+          <p:cNvSpPr/>
+          <p:nvPr/>
+        </p:nvSpPr>
+        <p:spPr>
+          <a:xfrm>
+            <a:off x="731520" y="1463040"/>
+            <a:ext cx="5212080" cy="4846320"/>
+          </a:xfrm>
+          <a:prstGeom prst="roundRect">
+            <a:avLst/>
+          </a:prstGeom>
+          <a:solidFill>
+            <a:srgbClr val="FEF2F2"/>
+          </a:solidFill>
+          <a:ln w="19050">
+            <a:solidFill>
+              <a:srgbClr val="FECACA"/>
+            </a:solidFill>
+          </a:ln>
+        </p:spPr>
+        <p:style>
+          <a:lnRef idx="1">
+            <a:schemeClr val="accent1"/>
+          </a:lnRef>
+          <a:fillRef idx="3">
+            <a:schemeClr val="accent1"/>
+          </a:fillRef>
+          <a:effectRef idx="2">
+            <a:schemeClr val="accent1"/>
+          </a:effectRef>
+          <a:fontRef idx="minor">
+            <a:schemeClr val="lt1"/>
+          </a:fontRef>
+        </p:style>
+        <p:txBody>
+          <a:bodyPr rtlCol="0" anchor="ctr"/>
+          <a:lstStyle/>
+          <a:p>
+            <a:pPr algn="ctr"/>
+          </a:p>
+        </p:txBody>
+      </p:sp>
+      <p:sp>
+        <p:nvSpPr>
+          <p:cNvPr id="6" name="TextBox 5"/>
+          <p:cNvSpPr txBox="1"/>
+          <p:nvPr/>
+        </p:nvSpPr>
+        <p:spPr>
+          <a:xfrm>
+            <a:off x="914400" y="1645920"/>
+            <a:ext cx="4846320" cy="4480560"/>
+          </a:xfrm>
+          <a:prstGeom prst="rect">
+            <a:avLst/>
+          </a:prstGeom>
+          <a:noFill/>
+        </p:spPr>
+        <p:txBody>
+          <a:bodyPr wrap="square">
+            <a:spAutoFit/>
+          </a:bodyPr>
+          <a:lstStyle/>
+          <a:p>
+            <a:pPr>
+              <a:spcAft>
+                <a:spcPts val="600"/>
+              </a:spcAft>
+              <a:defRPr sz="1400" b="1">
+                <a:solidFill>
+                  <a:srgbClr val="DC2626"/>
+                </a:solidFill>
+              </a:defRPr>
+            </a:pPr>
+            <a:r>
+              <a:t>Die Risiken klassischer Enum-Mappings</a:t>
+            </a:r>
+          </a:p>
+          <a:p>
+            <a:pPr>
+              <a:spcAft>
+                <a:spcPts val="600"/>
+              </a:spcAft>
+              <a:defRPr sz="1150">
+                <a:solidFill>
+                  <a:srgbClr val="0F172A"/>
+                </a:solidFill>
+                <a:latin typeface="Segoe UI"/>
+              </a:defRPr>
+            </a:pPr>
+            <a:r>
+              <a:t>• @Enumerated(EnumType.ORDINAL): Speichert 0, 1, 2... Ein Umsortieren der Enum-Konstanten führt zu unbemerkter, massiver Datenkorruption!</a:t>
+            </a:r>
+          </a:p>
+          <a:p>
+            <a:pPr>
+              <a:spcAft>
+                <a:spcPts val="600"/>
+              </a:spcAft>
+              <a:defRPr sz="1150">
+                <a:solidFill>
+                  <a:srgbClr val="0F172A"/>
+                </a:solidFill>
+                <a:latin typeface="Segoe UI"/>
+              </a:defRPr>
+            </a:pPr>
+            <a:r>
+              <a:t>• @Enumerated(EnumType.STRING): Speichert 'ELECTRIC', 'PETROL'... Braucht viel DB-Speicherplatz und bricht bei Java-Umbenennungen.</a:t>
+            </a:r>
+          </a:p>
+          <a:p>
+            <a:pPr>
+              <a:spcAft>
+                <a:spcPts val="600"/>
+              </a:spcAft>
+              <a:defRPr sz="1150">
+                <a:solidFill>
+                  <a:srgbClr val="0F172A"/>
+                </a:solidFill>
+                <a:latin typeface="Segoe UI"/>
+              </a:defRPr>
+            </a:pPr>
+            <a:r>
+              <a:t>• Lösung: JPA AttributeConverter (JPA 2.1+).</a:t>
+            </a:r>
+          </a:p>
+        </p:txBody>
+      </p:sp>
+      <p:sp>
+        <p:nvSpPr>
+          <p:cNvPr id="7" name="Rounded Rectangle 6"/>
+          <p:cNvSpPr/>
+          <p:nvPr/>
+        </p:nvSpPr>
+        <p:spPr>
+          <a:xfrm>
+            <a:off x="6217920" y="1463040"/>
+            <a:ext cx="5212080" cy="4846320"/>
+          </a:xfrm>
+          <a:prstGeom prst="roundRect">
+            <a:avLst/>
+          </a:prstGeom>
+          <a:solidFill>
+            <a:srgbClr val="F0FDF4"/>
+          </a:solidFill>
+          <a:ln w="19050">
+            <a:solidFill>
+              <a:srgbClr val="BBF7D0"/>
+            </a:solidFill>
+          </a:ln>
+        </p:spPr>
+        <p:style>
+          <a:lnRef idx="1">
+            <a:schemeClr val="accent1"/>
+          </a:lnRef>
+          <a:fillRef idx="3">
+            <a:schemeClr val="accent1"/>
+          </a:fillRef>
+          <a:effectRef idx="2">
+            <a:schemeClr val="accent1"/>
+          </a:effectRef>
+          <a:fontRef idx="minor">
+            <a:schemeClr val="lt1"/>
+          </a:fontRef>
+        </p:style>
+        <p:txBody>
+          <a:bodyPr rtlCol="0" anchor="ctr"/>
+          <a:lstStyle/>
+          <a:p>
+            <a:pPr algn="ctr"/>
+          </a:p>
+        </p:txBody>
+      </p:sp>
+      <p:sp>
+        <p:nvSpPr>
+          <p:cNvPr id="8" name="TextBox 7"/>
+          <p:cNvSpPr txBox="1"/>
+          <p:nvPr/>
+        </p:nvSpPr>
+        <p:spPr>
+          <a:xfrm>
+            <a:off x="6400800" y="1645920"/>
+            <a:ext cx="4846320" cy="4480560"/>
+          </a:xfrm>
+          <a:prstGeom prst="rect">
+            <a:avLst/>
+          </a:prstGeom>
+          <a:noFill/>
+        </p:spPr>
+        <p:txBody>
+          <a:bodyPr wrap="square">
+            <a:spAutoFit/>
+          </a:bodyPr>
+          <a:lstStyle/>
+          <a:p>
+            <a:pPr>
+              <a:spcAft>
+                <a:spcPts val="600"/>
+              </a:spcAft>
+              <a:defRPr sz="1400" b="1">
+                <a:solidFill>
+                  <a:srgbClr val="0D9488"/>
+                </a:solidFill>
+              </a:defRPr>
+            </a:pPr>
+            <a:r>
+              <a:t>Implementierung mit @Converter</a:t>
+            </a:r>
+          </a:p>
+          <a:p>
+            <a:pPr>
+              <a:spcAft>
+                <a:spcPts val="800"/>
+              </a:spcAft>
+              <a:defRPr sz="950">
+                <a:solidFill>
+                  <a:srgbClr val="1E293B"/>
+                </a:solidFill>
+                <a:latin typeface="Consolas"/>
+              </a:defRPr>
+            </a:pPr>
+            <a:r>
+              <a:t>@Converter(autoApply = true)</a:t>
+            </a:r>
+            <a:br/>
+            <a:r>
+              <a:t>public class FuelTypeConverter </a:t>
+            </a:r>
+            <a:br/>
+            <a:r>
+              <a:t>    implements AttributeConverter&lt;FuelType, String&gt; {</a:t>
+            </a:r>
+            <a:br/>
+            <a:br/>
+            <a:r>
+              <a:t>    public String convertToDatabaseColumn(FuelType type) {</a:t>
+            </a:r>
+            <a:br/>
+            <a:r>
+              <a:t>        return type != null ? type.getCode() : null; // z.B. "E", "D"</a:t>
+            </a:r>
+            <a:br/>
+            <a:r>
+              <a:t>    }</a:t>
+            </a:r>
+            <a:br/>
+            <a:br/>
+            <a:r>
+              <a:t>    public FuelType convertToEntityAttribute(String code) {</a:t>
+            </a:r>
+            <a:br/>
+            <a:r>
+              <a:t>        return FuelType.fromCode(code);</a:t>
+            </a:r>
+            <a:br/>
+            <a:r>
+              <a:t>    }</a:t>
+            </a:r>
+            <a:br/>
+            <a:r>
+              <a:t>}</a:t>
+            </a:r>
+          </a:p>
+          <a:p>
+            <a:pPr>
+              <a:spcAft>
+                <a:spcPts val="400"/>
+              </a:spcAft>
+              <a:defRPr sz="1100">
+                <a:solidFill>
+                  <a:srgbClr val="0F172A"/>
+                </a:solidFill>
+                <a:latin typeface="Segoe UI"/>
+              </a:defRPr>
+            </a:pPr>
+            <a:r>
+              <a:t>• Vorteil: DB speichert kompakte Einzelzeichen, Java nutzt typsicheres Enum. autoApply = true bindet den Konverter global!</a:t>
+            </a:r>
+          </a:p>
+        </p:txBody>
+      </p:sp>
+    </p:spTree>
+  </p:cSld>
+  <p:clrMapOvr>
+    <a:masterClrMapping/>
+  </p:clrMapOvr>
+</p:sld>
+</file>
+
+<file path=ppt/slides/slide2.xml><?xml version="1.0" encoding="utf-8"?>
+<p:sld xmlns:a="http://schemas.openxmlformats.org/drawingml/2006/main" xmlns:p="http://schemas.openxmlformats.org/presentationml/2006/main" xmlns:r="http://schemas.openxmlformats.org/officeDocument/2006/relationships">
+  <p:cSld>
+    <p:bg>
+      <p:bgPr>
+        <a:solidFill>
+          <a:srgbClr val="F8FAFC"/>
+        </a:solidFill>
+        <a:effectLst/>
+      </p:bgPr>
+    </p:bg>
+    <p:spTree>
+      <p:nvGrpSpPr>
+        <p:cNvPr id="1" name=""/>
+        <p:cNvGrpSpPr/>
+        <p:nvPr/>
+      </p:nvGrpSpPr>
+      <p:grpSpPr/>
+      <p:sp>
+        <p:nvSpPr>
+          <p:cNvPr id="2" name="Rectangle 1"/>
+          <p:cNvSpPr/>
+          <p:nvPr/>
+        </p:nvSpPr>
+        <p:spPr>
+          <a:xfrm>
+            <a:off x="731520" y="365760"/>
+            <a:ext cx="10728655" cy="54864"/>
+          </a:xfrm>
+          <a:prstGeom prst="rect">
+            <a:avLst/>
+          </a:prstGeom>
+          <a:solidFill>
+            <a:srgbClr val="2563EB"/>
+          </a:solidFill>
+          <a:ln>
+            <a:noFill/>
+          </a:ln>
+        </p:spPr>
+        <p:style>
+          <a:lnRef idx="1">
+            <a:schemeClr val="accent1"/>
+          </a:lnRef>
+          <a:fillRef idx="3">
+            <a:schemeClr val="accent1"/>
+          </a:fillRef>
+          <a:effectRef idx="2">
+            <a:schemeClr val="accent1"/>
+          </a:effectRef>
+          <a:fontRef idx="minor">
+            <a:schemeClr val="lt1"/>
+          </a:fontRef>
+        </p:style>
+        <p:txBody>
+          <a:bodyPr rtlCol="0" anchor="ctr"/>
+          <a:lstStyle/>
+          <a:p>
+            <a:pPr algn="ctr"/>
+          </a:p>
+        </p:txBody>
+      </p:sp>
+      <p:sp>
+        <p:nvSpPr>
+          <p:cNvPr id="3" name="TextBox 2"/>
+          <p:cNvSpPr txBox="1"/>
+          <p:nvPr/>
+        </p:nvSpPr>
+        <p:spPr>
+          <a:xfrm>
+            <a:off x="731520" y="475488"/>
+            <a:ext cx="10728655" cy="292608"/>
+          </a:xfrm>
+          <a:prstGeom prst="rect">
+            <a:avLst/>
+          </a:prstGeom>
+          <a:noFill/>
+        </p:spPr>
+        <p:txBody>
+          <a:bodyPr wrap="square" lIns="0" rIns="0" tIns="0" bIns="0">
+            <a:spAutoFit/>
+          </a:bodyPr>
+          <a:lstStyle/>
+          <a:p>
+            <a:pPr>
+              <a:defRPr sz="1100" b="1">
+                <a:solidFill>
+                  <a:srgbClr val="2563EB"/>
+                </a:solidFill>
+                <a:latin typeface="Segoe UI"/>
+              </a:defRPr>
+            </a:pPr>
+            <a:r>
+              <a:t>ÜBERBLICK</a:t>
+            </a:r>
+          </a:p>
+        </p:txBody>
+      </p:sp>
+      <p:sp>
+        <p:nvSpPr>
+          <p:cNvPr id="4" name="TextBox 3"/>
+          <p:cNvSpPr txBox="1"/>
+          <p:nvPr/>
+        </p:nvSpPr>
+        <p:spPr>
+          <a:xfrm>
+            <a:off x="731520" y="749808"/>
+            <a:ext cx="10728655" cy="548640"/>
+          </a:xfrm>
+          <a:prstGeom prst="rect">
+            <a:avLst/>
+          </a:prstGeom>
+          <a:noFill/>
+        </p:spPr>
+        <p:txBody>
+          <a:bodyPr wrap="square" lIns="0" rIns="0" tIns="0" bIns="0">
+            <a:spAutoFit/>
+          </a:bodyPr>
+          <a:lstStyle/>
+          <a:p>
+            <a:pPr>
+              <a:defRPr sz="2100" b="1">
+                <a:solidFill>
+                  <a:srgbClr val="1E293B"/>
+                </a:solidFill>
+                <a:latin typeface="Segoe UI"/>
+              </a:defRPr>
+            </a:pPr>
+            <a:r>
+              <a:t>Leitfaden-Struktur &amp; Themenübersicht</a:t>
+            </a:r>
+          </a:p>
+        </p:txBody>
+      </p:sp>
+      <p:sp>
+        <p:nvSpPr>
+          <p:cNvPr id="5" name="Rounded Rectangle 4"/>
+          <p:cNvSpPr/>
+          <p:nvPr/>
+        </p:nvSpPr>
+        <p:spPr>
+          <a:xfrm>
+            <a:off x="731520" y="1463040"/>
+            <a:ext cx="3474720" cy="4846320"/>
+          </a:xfrm>
+          <a:prstGeom prst="roundRect">
+            <a:avLst/>
+          </a:prstGeom>
+          <a:solidFill>
+            <a:srgbClr val="FFFFFF"/>
+          </a:solidFill>
+          <a:ln w="19050">
+            <a:solidFill>
+              <a:srgbClr val="E2E8F0"/>
+            </a:solidFill>
+          </a:ln>
+        </p:spPr>
+        <p:style>
+          <a:lnRef idx="1">
+            <a:schemeClr val="accent1"/>
+          </a:lnRef>
+          <a:fillRef idx="3">
+            <a:schemeClr val="accent1"/>
+          </a:fillRef>
+          <a:effectRef idx="2">
+            <a:schemeClr val="accent1"/>
+          </a:effectRef>
+          <a:fontRef idx="minor">
+            <a:schemeClr val="lt1"/>
+          </a:fontRef>
+        </p:style>
+        <p:txBody>
+          <a:bodyPr rtlCol="0" anchor="ctr"/>
+          <a:lstStyle/>
+          <a:p>
+            <a:pPr algn="ctr"/>
+          </a:p>
+        </p:txBody>
+      </p:sp>
+      <p:sp>
+        <p:nvSpPr>
+          <p:cNvPr id="6" name="Rectangle 5"/>
+          <p:cNvSpPr/>
+          <p:nvPr/>
+        </p:nvSpPr>
+        <p:spPr>
+          <a:xfrm>
+            <a:off x="731520" y="1463040"/>
+            <a:ext cx="3474720" cy="548640"/>
+          </a:xfrm>
+          <a:prstGeom prst="rect">
+            <a:avLst/>
+          </a:prstGeom>
+          <a:solidFill>
+            <a:srgbClr val="DC2626"/>
+          </a:solidFill>
+          <a:ln>
+            <a:noFill/>
+          </a:ln>
+        </p:spPr>
+        <p:style>
+          <a:lnRef idx="1">
+            <a:schemeClr val="accent1"/>
+          </a:lnRef>
+          <a:fillRef idx="3">
+            <a:schemeClr val="accent1"/>
+          </a:fillRef>
+          <a:effectRef idx="2">
+            <a:schemeClr val="accent1"/>
+          </a:effectRef>
+          <a:fontRef idx="minor">
+            <a:schemeClr val="lt1"/>
+          </a:fontRef>
+        </p:style>
+        <p:txBody>
+          <a:bodyPr rtlCol="0" anchor="ctr"/>
+          <a:lstStyle/>
+          <a:p>
+            <a:pPr algn="ctr">
+              <a:defRPr sz="1350" b="1">
+                <a:solidFill>
+                  <a:srgbClr val="FFFFFF"/>
+                </a:solidFill>
+                <a:latin typeface="Segoe UI"/>
+              </a:defRPr>
+            </a:pPr>
+            <a:r>
+              <a:t>1. Typische Fehlerbilder</a:t>
+            </a:r>
+          </a:p>
+        </p:txBody>
+      </p:sp>
+      <p:sp>
+        <p:nvSpPr>
+          <p:cNvPr id="7" name="TextBox 6"/>
+          <p:cNvSpPr txBox="1"/>
+          <p:nvPr/>
+        </p:nvSpPr>
+        <p:spPr>
+          <a:xfrm>
+            <a:off x="868680" y="2103120"/>
+            <a:ext cx="3200400" cy="4114800"/>
+          </a:xfrm>
+          <a:prstGeom prst="rect">
+            <a:avLst/>
+          </a:prstGeom>
+          <a:noFill/>
+        </p:spPr>
+        <p:txBody>
+          <a:bodyPr wrap="square">
+            <a:spAutoFit/>
+          </a:bodyPr>
+          <a:lstStyle/>
+          <a:p>
+            <a:pPr>
+              <a:spcAft>
+                <a:spcPts val="600"/>
+              </a:spcAft>
+              <a:defRPr sz="1150">
+                <a:solidFill>
+                  <a:srgbClr val="0F172A"/>
+                </a:solidFill>
+                <a:latin typeface="Segoe UI"/>
+              </a:defRPr>
+            </a:pPr>
+            <a:r>
+              <a:t>• 1.1 LazyInitializationException &amp; Proxies</a:t>
+            </a:r>
+          </a:p>
+          <a:p>
+            <a:pPr>
+              <a:spcAft>
+                <a:spcPts val="600"/>
+              </a:spcAft>
+              <a:defRPr sz="1150">
+                <a:solidFill>
+                  <a:srgbClr val="0F172A"/>
+                </a:solidFill>
+                <a:latin typeface="Segoe UI"/>
+              </a:defRPr>
+            </a:pPr>
+            <a:r>
+              <a:t>• 1.2 N+1 Select Problem &amp; JOIN FETCH</a:t>
+            </a:r>
+          </a:p>
+          <a:p>
+            <a:pPr>
+              <a:spcAft>
+                <a:spcPts val="600"/>
+              </a:spcAft>
+              <a:defRPr sz="1150">
+                <a:solidFill>
+                  <a:srgbClr val="0F172A"/>
+                </a:solidFill>
+                <a:latin typeface="Segoe UI"/>
+              </a:defRPr>
+            </a:pPr>
+            <a:r>
+              <a:t>• 1.3 Entity Graphs (fetchgraph / loadgraph)</a:t>
+            </a:r>
+          </a:p>
+          <a:p>
+            <a:pPr>
+              <a:spcAft>
+                <a:spcPts val="600"/>
+              </a:spcAft>
+              <a:defRPr sz="1150">
+                <a:solidFill>
+                  <a:srgbClr val="0F172A"/>
+                </a:solidFill>
+                <a:latin typeface="Segoe UI"/>
+              </a:defRPr>
+            </a:pPr>
+            <a:r>
+              <a:t>• 1.4 OptimisticLockException &amp; @Version</a:t>
+            </a:r>
+          </a:p>
+          <a:p>
+            <a:pPr>
+              <a:spcAft>
+                <a:spcPts val="600"/>
+              </a:spcAft>
+              <a:defRPr sz="1150">
+                <a:solidFill>
+                  <a:srgbClr val="0F172A"/>
+                </a:solidFill>
+                <a:latin typeface="Segoe UI"/>
+              </a:defRPr>
+            </a:pPr>
+            <a:r>
+              <a:t>• 1.5 Pessimistisches Locking &amp; Concurrency</a:t>
+            </a:r>
+          </a:p>
+          <a:p>
+            <a:pPr>
+              <a:spcAft>
+                <a:spcPts val="600"/>
+              </a:spcAft>
+              <a:defRPr sz="1150">
+                <a:solidFill>
+                  <a:srgbClr val="0F172A"/>
+                </a:solidFill>
+                <a:latin typeface="Segoe UI"/>
+              </a:defRPr>
+            </a:pPr>
+            <a:r>
+              <a:t>• 1.6 Transiente &amp; Detached Entity Ausnahmen</a:t>
+            </a:r>
+          </a:p>
+          <a:p>
+            <a:pPr>
+              <a:spcAft>
+                <a:spcPts val="600"/>
+              </a:spcAft>
+              <a:defRPr sz="1150">
+                <a:solidFill>
+                  <a:srgbClr val="0F172A"/>
+                </a:solidFill>
+                <a:latin typeface="Segoe UI"/>
+              </a:defRPr>
+            </a:pPr>
+            <a:r>
+              <a:t>• 1.7 Bean Validation &amp; Constraints</a:t>
+            </a:r>
+          </a:p>
+        </p:txBody>
+      </p:sp>
+      <p:sp>
+        <p:nvSpPr>
+          <p:cNvPr id="8" name="Rounded Rectangle 7"/>
+          <p:cNvSpPr/>
+          <p:nvPr/>
+        </p:nvSpPr>
+        <p:spPr>
+          <a:xfrm>
+            <a:off x="4343400" y="1463040"/>
+            <a:ext cx="3474720" cy="4846320"/>
+          </a:xfrm>
+          <a:prstGeom prst="roundRect">
+            <a:avLst/>
+          </a:prstGeom>
+          <a:solidFill>
+            <a:srgbClr val="FFFFFF"/>
+          </a:solidFill>
+          <a:ln w="19050">
+            <a:solidFill>
+              <a:srgbClr val="E2E8F0"/>
+            </a:solidFill>
+          </a:ln>
+        </p:spPr>
+        <p:style>
+          <a:lnRef idx="1">
+            <a:schemeClr val="accent1"/>
+          </a:lnRef>
+          <a:fillRef idx="3">
+            <a:schemeClr val="accent1"/>
+          </a:fillRef>
+          <a:effectRef idx="2">
+            <a:schemeClr val="accent1"/>
+          </a:effectRef>
+          <a:fontRef idx="minor">
+            <a:schemeClr val="lt1"/>
+          </a:fontRef>
+        </p:style>
+        <p:txBody>
+          <a:bodyPr rtlCol="0" anchor="ctr"/>
+          <a:lstStyle/>
+          <a:p>
+            <a:pPr algn="ctr"/>
+          </a:p>
+        </p:txBody>
+      </p:sp>
+      <p:sp>
+        <p:nvSpPr>
+          <p:cNvPr id="9" name="Rectangle 8"/>
+          <p:cNvSpPr/>
+          <p:nvPr/>
+        </p:nvSpPr>
+        <p:spPr>
+          <a:xfrm>
+            <a:off x="4343400" y="1463040"/>
+            <a:ext cx="3474720" cy="548640"/>
+          </a:xfrm>
+          <a:prstGeom prst="rect">
+            <a:avLst/>
+          </a:prstGeom>
+          <a:solidFill>
+            <a:srgbClr val="2563EB"/>
+          </a:solidFill>
+          <a:ln>
+            <a:noFill/>
+          </a:ln>
+        </p:spPr>
+        <p:style>
+          <a:lnRef idx="1">
+            <a:schemeClr val="accent1"/>
+          </a:lnRef>
+          <a:fillRef idx="3">
+            <a:schemeClr val="accent1"/>
+          </a:fillRef>
+          <a:effectRef idx="2">
+            <a:schemeClr val="accent1"/>
+          </a:effectRef>
+          <a:fontRef idx="minor">
+            <a:schemeClr val="lt1"/>
+          </a:fontRef>
+        </p:style>
+        <p:txBody>
+          <a:bodyPr rtlCol="0" anchor="ctr"/>
+          <a:lstStyle/>
+          <a:p>
+            <a:pPr algn="ctr">
+              <a:defRPr sz="1350" b="1">
+                <a:solidFill>
+                  <a:srgbClr val="FFFFFF"/>
+                </a:solidFill>
+                <a:latin typeface="Segoe UI"/>
+              </a:defRPr>
+            </a:pPr>
+            <a:r>
+              <a:t>2. Architecture &amp; Best Practices</a:t>
+            </a:r>
+          </a:p>
+        </p:txBody>
+      </p:sp>
+      <p:sp>
+        <p:nvSpPr>
+          <p:cNvPr id="10" name="TextBox 9"/>
+          <p:cNvSpPr txBox="1"/>
+          <p:nvPr/>
+        </p:nvSpPr>
+        <p:spPr>
+          <a:xfrm>
+            <a:off x="4480560" y="2103120"/>
+            <a:ext cx="3200400" cy="4114800"/>
+          </a:xfrm>
+          <a:prstGeom prst="rect">
+            <a:avLst/>
+          </a:prstGeom>
+          <a:noFill/>
+        </p:spPr>
+        <p:txBody>
+          <a:bodyPr wrap="square">
+            <a:spAutoFit/>
+          </a:bodyPr>
+          <a:lstStyle/>
+          <a:p>
+            <a:pPr>
+              <a:spcAft>
+                <a:spcPts val="600"/>
+              </a:spcAft>
+              <a:defRPr sz="1150">
+                <a:solidFill>
+                  <a:srgbClr val="0F172A"/>
+                </a:solidFill>
+                <a:latin typeface="Segoe UI"/>
+              </a:defRPr>
+            </a:pPr>
+            <a:r>
+              <a:t>• 2.1 FetchType-Regeln (LAZY als Default)</a:t>
+            </a:r>
+          </a:p>
+          <a:p>
+            <a:pPr>
+              <a:spcAft>
+                <a:spcPts val="600"/>
+              </a:spcAft>
+              <a:defRPr sz="1150">
+                <a:solidFill>
+                  <a:srgbClr val="0F172A"/>
+                </a:solidFill>
+                <a:latin typeface="Segoe UI"/>
+              </a:defRPr>
+            </a:pPr>
+            <a:r>
+              <a:t>• 2.2 Defensive Assoziations-Synchronisation</a:t>
+            </a:r>
+          </a:p>
+          <a:p>
+            <a:pPr>
+              <a:spcAft>
+                <a:spcPts val="600"/>
+              </a:spcAft>
+              <a:defRPr sz="1150">
+                <a:solidFill>
+                  <a:srgbClr val="0F172A"/>
+                </a:solidFill>
+                <a:latin typeface="Segoe UI"/>
+              </a:defRPr>
+            </a:pPr>
+            <a:r>
+              <a:t>• 2.3 CascadeType &amp; orphanRemoval</a:t>
+            </a:r>
+          </a:p>
+          <a:p>
+            <a:pPr>
+              <a:spcAft>
+                <a:spcPts val="600"/>
+              </a:spcAft>
+              <a:defRPr sz="1150">
+                <a:solidFill>
+                  <a:srgbClr val="0F172A"/>
+                </a:solidFill>
+                <a:latin typeface="Segoe UI"/>
+              </a:defRPr>
+            </a:pPr>
+            <a:r>
+              <a:t>• 2.4 equals() &amp; hashCode() Regeln bei Entities</a:t>
+            </a:r>
+          </a:p>
+          <a:p>
+            <a:pPr>
+              <a:spcAft>
+                <a:spcPts val="600"/>
+              </a:spcAft>
+              <a:defRPr sz="1150">
+                <a:solidFill>
+                  <a:srgbClr val="0F172A"/>
+                </a:solidFill>
+                <a:latin typeface="Segoe UI"/>
+              </a:defRPr>
+            </a:pPr>
+            <a:r>
+              <a:t>• 2.5 Persistence Context &amp; Batch Processing</a:t>
+            </a:r>
+          </a:p>
+          <a:p>
+            <a:pPr>
+              <a:spcAft>
+                <a:spcPts val="600"/>
+              </a:spcAft>
+              <a:defRPr sz="1150">
+                <a:solidFill>
+                  <a:srgbClr val="0F172A"/>
+                </a:solidFill>
+                <a:latin typeface="Segoe UI"/>
+              </a:defRPr>
+            </a:pPr>
+            <a:r>
+              <a:t>• 2.6 Bulk Operations &amp; Cache Invalidation</a:t>
+            </a:r>
+          </a:p>
+          <a:p>
+            <a:pPr>
+              <a:spcAft>
+                <a:spcPts val="600"/>
+              </a:spcAft>
+              <a:defRPr sz="1150">
+                <a:solidFill>
+                  <a:srgbClr val="0F172A"/>
+                </a:solidFill>
+                <a:latin typeface="Segoe UI"/>
+              </a:defRPr>
+            </a:pPr>
+            <a:r>
+              <a:t>• 2.7 DTO-Projektionen &amp; Constructor Expressions</a:t>
+            </a:r>
+          </a:p>
+          <a:p>
+            <a:pPr>
+              <a:spcAft>
+                <a:spcPts val="600"/>
+              </a:spcAft>
+              <a:defRPr sz="1150">
+                <a:solidFill>
+                  <a:srgbClr val="0F172A"/>
+                </a:solidFill>
+                <a:latin typeface="Segoe UI"/>
+              </a:defRPr>
+            </a:pPr>
+            <a:r>
+              <a:t>• 2.8 Composite Keys (@EmbeddedId vs @IdClass)</a:t>
+            </a:r>
+          </a:p>
+          <a:p>
+            <a:pPr>
+              <a:spcAft>
+                <a:spcPts val="600"/>
+              </a:spcAft>
+              <a:defRPr sz="1150">
+                <a:solidFill>
+                  <a:srgbClr val="0F172A"/>
+                </a:solidFill>
+                <a:latin typeface="Segoe UI"/>
+              </a:defRPr>
+            </a:pPr>
+            <a:r>
+              <a:t>• 2.9 AttributeConverter (@Converter)</a:t>
+            </a:r>
+          </a:p>
+        </p:txBody>
+      </p:sp>
+      <p:sp>
+        <p:nvSpPr>
+          <p:cNvPr id="11" name="Rounded Rectangle 10"/>
+          <p:cNvSpPr/>
+          <p:nvPr/>
+        </p:nvSpPr>
+        <p:spPr>
+          <a:xfrm>
+            <a:off x="7955280" y="1463040"/>
+            <a:ext cx="3474720" cy="4846320"/>
+          </a:xfrm>
+          <a:prstGeom prst="roundRect">
+            <a:avLst/>
+          </a:prstGeom>
+          <a:solidFill>
+            <a:srgbClr val="FFFFFF"/>
+          </a:solidFill>
+          <a:ln w="19050">
+            <a:solidFill>
+              <a:srgbClr val="E2E8F0"/>
+            </a:solidFill>
+          </a:ln>
+        </p:spPr>
+        <p:style>
+          <a:lnRef idx="1">
+            <a:schemeClr val="accent1"/>
+          </a:lnRef>
+          <a:fillRef idx="3">
+            <a:schemeClr val="accent1"/>
+          </a:fillRef>
+          <a:effectRef idx="2">
+            <a:schemeClr val="accent1"/>
+          </a:effectRef>
+          <a:fontRef idx="minor">
+            <a:schemeClr val="lt1"/>
+          </a:fontRef>
+        </p:style>
+        <p:txBody>
+          <a:bodyPr rtlCol="0" anchor="ctr"/>
+          <a:lstStyle/>
+          <a:p>
+            <a:pPr algn="ctr"/>
+          </a:p>
+        </p:txBody>
+      </p:sp>
+      <p:sp>
+        <p:nvSpPr>
+          <p:cNvPr id="12" name="Rectangle 11"/>
+          <p:cNvSpPr/>
+          <p:nvPr/>
+        </p:nvSpPr>
+        <p:spPr>
+          <a:xfrm>
+            <a:off x="7955280" y="1463040"/>
+            <a:ext cx="3474720" cy="548640"/>
+          </a:xfrm>
+          <a:prstGeom prst="rect">
+            <a:avLst/>
+          </a:prstGeom>
+          <a:solidFill>
+            <a:srgbClr val="0D9488"/>
+          </a:solidFill>
+          <a:ln>
+            <a:noFill/>
+          </a:ln>
+        </p:spPr>
+        <p:style>
+          <a:lnRef idx="1">
+            <a:schemeClr val="accent1"/>
+          </a:lnRef>
+          <a:fillRef idx="3">
+            <a:schemeClr val="accent1"/>
+          </a:fillRef>
+          <a:effectRef idx="2">
+            <a:schemeClr val="accent1"/>
+          </a:effectRef>
+          <a:fontRef idx="minor">
+            <a:schemeClr val="lt1"/>
+          </a:fontRef>
+        </p:style>
+        <p:txBody>
+          <a:bodyPr rtlCol="0" anchor="ctr"/>
+          <a:lstStyle/>
+          <a:p>
+            <a:pPr algn="ctr">
+              <a:defRPr sz="1350" b="1">
+                <a:solidFill>
+                  <a:srgbClr val="FFFFFF"/>
+                </a:solidFill>
+                <a:latin typeface="Segoe UI"/>
+              </a:defRPr>
+            </a:pPr>
+            <a:r>
+              <a:t>3. Referenz- &amp; Entscheidungstabellen</a:t>
+            </a:r>
+          </a:p>
+        </p:txBody>
+      </p:sp>
+      <p:sp>
+        <p:nvSpPr>
+          <p:cNvPr id="13" name="TextBox 12"/>
+          <p:cNvSpPr txBox="1"/>
+          <p:nvPr/>
+        </p:nvSpPr>
+        <p:spPr>
+          <a:xfrm>
+            <a:off x="8092440" y="2103120"/>
+            <a:ext cx="3200400" cy="4114800"/>
+          </a:xfrm>
+          <a:prstGeom prst="rect">
+            <a:avLst/>
+          </a:prstGeom>
+          <a:noFill/>
+        </p:spPr>
+        <p:txBody>
+          <a:bodyPr wrap="square">
+            <a:spAutoFit/>
+          </a:bodyPr>
+          <a:lstStyle/>
+          <a:p>
+            <a:pPr>
+              <a:spcAft>
+                <a:spcPts val="600"/>
+              </a:spcAft>
+              <a:defRPr sz="1150">
+                <a:solidFill>
+                  <a:srgbClr val="0F172A"/>
+                </a:solidFill>
+                <a:latin typeface="Segoe UI"/>
+              </a:defRPr>
+            </a:pPr>
+            <a:r>
+              <a:t>• 3.1 CascadeType-Matrix &amp; Orphan Removal</a:t>
+            </a:r>
+          </a:p>
+          <a:p>
+            <a:pPr>
+              <a:spcAft>
+                <a:spcPts val="600"/>
+              </a:spcAft>
+              <a:defRPr sz="1150">
+                <a:solidFill>
+                  <a:srgbClr val="0F172A"/>
+                </a:solidFill>
+                <a:latin typeface="Segoe UI"/>
+              </a:defRPr>
+            </a:pPr>
+            <a:r>
+              <a:t>• 3.2 Entity-Lifecycle Callbacks (@PrePersist etc.)</a:t>
+            </a:r>
+          </a:p>
+          <a:p>
+            <a:pPr>
+              <a:spcAft>
+                <a:spcPts val="600"/>
+              </a:spcAft>
+              <a:defRPr sz="1150">
+                <a:solidFill>
+                  <a:srgbClr val="0F172A"/>
+                </a:solidFill>
+                <a:latin typeface="Segoe UI"/>
+              </a:defRPr>
+            </a:pPr>
+            <a:r>
+              <a:t>• 3.3 Checkliste für den Produktiveinsatz</a:t>
+            </a:r>
+          </a:p>
+        </p:txBody>
+      </p:sp>
+    </p:spTree>
+  </p:cSld>
+  <p:clrMapOvr>
+    <a:masterClrMapping/>
+  </p:clrMapOvr>
+</p:sld>
+</file>
+
+<file path=ppt/slides/slide20.xml><?xml version="1.0" encoding="utf-8"?>
+<p:sld xmlns:a="http://schemas.openxmlformats.org/drawingml/2006/main" xmlns:p="http://schemas.openxmlformats.org/presentationml/2006/main" xmlns:r="http://schemas.openxmlformats.org/officeDocument/2006/relationships">
+  <p:cSld>
+    <p:bg>
+      <p:bgPr>
+        <a:solidFill>
+          <a:srgbClr val="F8FAFC"/>
+        </a:solidFill>
+        <a:effectLst/>
+      </p:bgPr>
+    </p:bg>
+    <p:spTree>
+      <p:nvGrpSpPr>
+        <p:cNvPr id="1" name=""/>
+        <p:cNvGrpSpPr/>
+        <p:nvPr/>
+      </p:nvGrpSpPr>
+      <p:grpSpPr/>
+      <p:sp>
+        <p:nvSpPr>
+          <p:cNvPr id="2" name="Rectangle 1"/>
+          <p:cNvSpPr/>
+          <p:nvPr/>
+        </p:nvSpPr>
+        <p:spPr>
+          <a:xfrm>
+            <a:off x="731520" y="365760"/>
+            <a:ext cx="10728655" cy="54864"/>
+          </a:xfrm>
+          <a:prstGeom prst="rect">
+            <a:avLst/>
+          </a:prstGeom>
+          <a:solidFill>
+            <a:srgbClr val="0D9488"/>
+          </a:solidFill>
+          <a:ln>
+            <a:noFill/>
+          </a:ln>
+        </p:spPr>
+        <p:style>
+          <a:lnRef idx="1">
+            <a:schemeClr val="accent1"/>
+          </a:lnRef>
+          <a:fillRef idx="3">
+            <a:schemeClr val="accent1"/>
+          </a:fillRef>
+          <a:effectRef idx="2">
+            <a:schemeClr val="accent1"/>
+          </a:effectRef>
+          <a:fontRef idx="minor">
+            <a:schemeClr val="lt1"/>
+          </a:fontRef>
+        </p:style>
+        <p:txBody>
+          <a:bodyPr rtlCol="0" anchor="ctr"/>
+          <a:lstStyle/>
+          <a:p>
+            <a:pPr algn="ctr"/>
+          </a:p>
+        </p:txBody>
+      </p:sp>
+      <p:sp>
+        <p:nvSpPr>
+          <p:cNvPr id="3" name="TextBox 2"/>
+          <p:cNvSpPr txBox="1"/>
+          <p:nvPr/>
+        </p:nvSpPr>
+        <p:spPr>
+          <a:xfrm>
+            <a:off x="731520" y="475488"/>
+            <a:ext cx="10728655" cy="292608"/>
+          </a:xfrm>
+          <a:prstGeom prst="rect">
+            <a:avLst/>
+          </a:prstGeom>
+          <a:noFill/>
+        </p:spPr>
+        <p:txBody>
+          <a:bodyPr wrap="square" lIns="0" rIns="0" tIns="0" bIns="0">
+            <a:spAutoFit/>
+          </a:bodyPr>
+          <a:lstStyle/>
+          <a:p>
+            <a:pPr>
+              <a:defRPr sz="1100" b="1">
+                <a:solidFill>
+                  <a:srgbClr val="0D9488"/>
+                </a:solidFill>
+                <a:latin typeface="Segoe UI"/>
+              </a:defRPr>
+            </a:pPr>
+            <a:r>
+              <a:t>REFERENZ</a:t>
+            </a:r>
+          </a:p>
+        </p:txBody>
+      </p:sp>
+      <p:sp>
+        <p:nvSpPr>
+          <p:cNvPr id="4" name="TextBox 3"/>
+          <p:cNvSpPr txBox="1"/>
+          <p:nvPr/>
+        </p:nvSpPr>
+        <p:spPr>
+          <a:xfrm>
+            <a:off x="731520" y="749808"/>
+            <a:ext cx="10728655" cy="548640"/>
+          </a:xfrm>
+          <a:prstGeom prst="rect">
+            <a:avLst/>
+          </a:prstGeom>
+          <a:noFill/>
+        </p:spPr>
+        <p:txBody>
+          <a:bodyPr wrap="square" lIns="0" rIns="0" tIns="0" bIns="0">
+            <a:spAutoFit/>
+          </a:bodyPr>
+          <a:lstStyle/>
+          <a:p>
+            <a:pPr>
+              <a:defRPr sz="2100" b="1">
+                <a:solidFill>
+                  <a:srgbClr val="1E293B"/>
+                </a:solidFill>
+                <a:latin typeface="Segoe UI"/>
+              </a:defRPr>
+            </a:pPr>
+            <a:r>
+              <a:t>3.1 CascadeType Referenztabelle</a:t>
             </a:r>
           </a:p>
         </p:txBody>
@@ -6158,8 +8326,9 @@
               </a:tblPr>
               <a:tblGrid>
                 <a:gridCol w="2103120"/>
-                <a:gridCol w="4297680"/>
-                <a:gridCol w="4327855"/>
+                <a:gridCol w="2011680"/>
+                <a:gridCol w="3291840"/>
+                <a:gridCol w="3322015"/>
               </a:tblGrid>
               <a:tr h="640080">
                 <a:tc>
@@ -6198,7 +8367,7 @@
                         </a:defRPr>
                       </a:pPr>
                       <a:r>
-                        <a:t>Wirkung auf Kind-Objekt</a:t>
+                        <a:t>JPA Operation</a:t>
                       </a:r>
                     </a:p>
                   </a:txBody>
@@ -6221,7 +8390,30 @@
                         </a:defRPr>
                       </a:pPr>
                       <a:r>
-                        <a:t>Typischer Anwendungsfall &amp; Warnung</a:t>
+                        <a:t>Wirkung auf Kind-Entities</a:t>
+                      </a:r>
+                    </a:p>
+                  </a:txBody>
+                  <a:tcPr>
+                    <a:solidFill>
+                      <a:srgbClr val="1E293B"/>
+                    </a:solidFill>
+                  </a:tcPr>
+                </a:tc>
+                <a:tc>
+                  <a:txBody>
+                    <a:bodyPr/>
+                    <a:lstStyle/>
+                    <a:p>
+                      <a:pPr>
+                        <a:defRPr b="1" sz="1200">
+                          <a:solidFill>
+                            <a:srgbClr val="FFFFFF"/>
+                          </a:solidFill>
+                        </a:defRPr>
+                      </a:pPr>
+                      <a:r>
+                        <a:t>Empfohlener Einsatz</a:t>
                       </a:r>
                     </a:p>
                   </a:txBody>
@@ -6269,7 +8461,7 @@
                         </a:defRPr>
                       </a:pPr>
                       <a:r>
-                        <a:t>Kind wird beim persist(parent) automatisch mitgespeichert.</a:t>
+                        <a:t>em.persist()</a:t>
                       </a:r>
                     </a:p>
                   </a:txBody>
@@ -6292,7 +8484,30 @@
                         </a:defRPr>
                       </a:pPr>
                       <a:r>
-                        <a:t>Aggregate Roots, Kompositionen (Rechnung -&gt; Positionen).</a:t>
+                        <a:t>Transiente Kinder werden automatisch persistiert</a:t>
+                      </a:r>
+                    </a:p>
+                  </a:txBody>
+                  <a:tcPr>
+                    <a:solidFill>
+                      <a:srgbClr val="F1F5F9"/>
+                    </a:solidFill>
+                  </a:tcPr>
+                </a:tc>
+                <a:tc>
+                  <a:txBody>
+                    <a:bodyPr/>
+                    <a:lstStyle/>
+                    <a:p>
+                      <a:pPr>
+                        <a:defRPr sz="1100">
+                          <a:solidFill>
+                            <a:srgbClr val="1E293B"/>
+                          </a:solidFill>
+                        </a:defRPr>
+                      </a:pPr>
+                      <a:r>
+                        <a:t>1:1, 1:N Aggregate (z.B. Rechnung -&gt; Posten)</a:t>
                       </a:r>
                     </a:p>
                   </a:txBody>
@@ -6340,7 +8555,7 @@
                         </a:defRPr>
                       </a:pPr>
                       <a:r>
-                        <a:t>Änderungen am Kind werden beim merge(parent) übernommen.</a:t>
+                        <a:t>em.merge()</a:t>
                       </a:r>
                     </a:p>
                   </a:txBody>
@@ -6363,7 +8578,30 @@
                         </a:defRPr>
                       </a:pPr>
                       <a:r>
-                        <a:t>Web-Anwendungen mit Detached Objekten.</a:t>
+                        <a:t>Detached Kinder werden mit aktualisiert</a:t>
+                      </a:r>
+                    </a:p>
+                  </a:txBody>
+                  <a:tcPr>
+                    <a:solidFill>
+                      <a:srgbClr val="FFFFFF"/>
+                    </a:solidFill>
+                  </a:tcPr>
+                </a:tc>
+                <a:tc>
+                  <a:txBody>
+                    <a:bodyPr/>
+                    <a:lstStyle/>
+                    <a:p>
+                      <a:pPr>
+                        <a:defRPr sz="1100">
+                          <a:solidFill>
+                            <a:srgbClr val="1E293B"/>
+                          </a:solidFill>
+                        </a:defRPr>
+                      </a:pPr>
+                      <a:r>
+                        <a:t>Web-Formulare mit verschachtelten Daten</a:t>
                       </a:r>
                     </a:p>
                   </a:txBody>
@@ -6411,7 +8649,7 @@
                         </a:defRPr>
                       </a:pPr>
                       <a:r>
-                        <a:t>Wird beim remove(parent) mitgelöscht.</a:t>
+                        <a:t>em.remove()</a:t>
                       </a:r>
                     </a:p>
                   </a:txBody>
@@ -6434,7 +8672,30 @@
                         </a:defRPr>
                       </a:pPr>
                       <a:r>
-                        <a:t>Strikte Eltern-Kind-Beziehung. WARNUNG: Niemals bei ManyToMany!</a:t>
+                        <a:t>Löscht alle Kinder beim Löschen des Parents</a:t>
+                      </a:r>
+                    </a:p>
+                  </a:txBody>
+                  <a:tcPr>
+                    <a:solidFill>
+                      <a:srgbClr val="F1F5F9"/>
+                    </a:solidFill>
+                  </a:tcPr>
+                </a:tc>
+                <a:tc>
+                  <a:txBody>
+                    <a:bodyPr/>
+                    <a:lstStyle/>
+                    <a:p>
+                      <a:pPr>
+                        <a:defRPr sz="1100">
+                          <a:solidFill>
+                            <a:srgbClr val="1E293B"/>
+                          </a:solidFill>
+                        </a:defRPr>
+                      </a:pPr>
+                      <a:r>
+                        <a:t>Strikte 1:1 und echte Parent-Child Aggregate</a:t>
                       </a:r>
                     </a:p>
                   </a:txBody>
@@ -6459,7 +8720,7 @@
                         </a:defRPr>
                       </a:pPr>
                       <a:r>
-                        <a:t>REFRESH / DETACH</a:t>
+                        <a:t>REFRESH</a:t>
                       </a:r>
                     </a:p>
                   </a:txBody>
@@ -6482,7 +8743,7 @@
                         </a:defRPr>
                       </a:pPr>
                       <a:r>
-                        <a:t>Reicht refresh() bzw. detach() an abhängige Kind-Objekte weiter.</a:t>
+                        <a:t>em.refresh()</a:t>
                       </a:r>
                     </a:p>
                   </a:txBody>
@@ -6505,7 +8766,30 @@
                         </a:defRPr>
                       </a:pPr>
                       <a:r>
-                        <a:t>Manuelle Cache-Verwaltung und externe DB-Updates.</a:t>
+                        <a:t>Lädt Kind-Zustand aus DB neu</a:t>
+                      </a:r>
+                    </a:p>
+                  </a:txBody>
+                  <a:tcPr>
+                    <a:solidFill>
+                      <a:srgbClr val="FFFFFF"/>
+                    </a:solidFill>
+                  </a:tcPr>
+                </a:tc>
+                <a:tc>
+                  <a:txBody>
+                    <a:bodyPr/>
+                    <a:lstStyle/>
+                    <a:p>
+                      <a:pPr>
+                        <a:defRPr sz="1100">
+                          <a:solidFill>
+                            <a:srgbClr val="1E293B"/>
+                          </a:solidFill>
+                        </a:defRPr>
+                      </a:pPr>
+                      <a:r>
+                        <a:t>Selten; bei extern geänderten DB-Triggern</a:t>
                       </a:r>
                     </a:p>
                   </a:txBody>
@@ -6530,7 +8814,7 @@
                         </a:defRPr>
                       </a:pPr>
                       <a:r>
-                        <a:t>ALL</a:t>
+                        <a:t>DETACH</a:t>
                       </a:r>
                     </a:p>
                   </a:txBody>
@@ -6553,7 +8837,7 @@
                         </a:defRPr>
                       </a:pPr>
                       <a:r>
-                        <a:t>Beinhaltet alle Kaskadierungen inklusive REMOVE.</a:t>
+                        <a:t>em.detach()</a:t>
                       </a:r>
                     </a:p>
                   </a:txBody>
@@ -6576,7 +8860,30 @@
                         </a:defRPr>
                       </a:pPr>
                       <a:r>
-                        <a:t>Nur bei exklusiver Eigentümerschaft (Composition).</a:t>
+                        <a:t>Entfernt auch Kinder aus dem Cache</a:t>
+                      </a:r>
+                    </a:p>
+                  </a:txBody>
+                  <a:tcPr>
+                    <a:solidFill>
+                      <a:srgbClr val="F1F5F9"/>
+                    </a:solidFill>
+                  </a:tcPr>
+                </a:tc>
+                <a:tc>
+                  <a:txBody>
+                    <a:bodyPr/>
+                    <a:lstStyle/>
+                    <a:p>
+                      <a:pPr>
+                        <a:defRPr sz="1100">
+                          <a:solidFill>
+                            <a:srgbClr val="1E293B"/>
+                          </a:solidFill>
+                        </a:defRPr>
+                      </a:pPr>
+                      <a:r>
+                        <a:t>Manuelle Session-Bereinigung</a:t>
                       </a:r>
                     </a:p>
                   </a:txBody>
@@ -6621,7 +8928,7 @@
               </a:defRPr>
             </a:pPr>
             <a:r>
-              <a:t>Achtung: CascadeType.ALL auf @ManyToMany führt dazu, dass beim Löschen eines Datensatzes verknüpfte Stammdaten (z.B. Fahrer, Kategorien) gelöscht werden!</a:t>
+              <a:t>Achtung: CascadeType.ALL oder REMOVE auf @ManyToMany führt dazu, dass beim Löschen eines Datensatzes verknüpfte Stammdaten (z.B. Fahrer, Kategorien) gelöscht werden!</a:t>
             </a:r>
           </a:p>
         </p:txBody>
@@ -6634,7 +8941,7 @@
 </p:sld>
 </file>
 
-<file path=ppt/slides/slide16.xml><?xml version="1.0" encoding="utf-8"?>
+<file path=ppt/slides/slide21.xml><?xml version="1.0" encoding="utf-8"?>
 <p:sld xmlns:a="http://schemas.openxmlformats.org/drawingml/2006/main" xmlns:p="http://schemas.openxmlformats.org/presentationml/2006/main" xmlns:r="http://schemas.openxmlformats.org/officeDocument/2006/relationships">
   <p:cSld>
     <p:bg>
@@ -6667,7 +8974,7 @@
             <a:avLst/>
           </a:prstGeom>
           <a:solidFill>
-            <a:srgbClr val="2563EB"/>
+            <a:srgbClr val="0D9488"/>
           </a:solidFill>
           <a:ln>
             <a:noFill/>
@@ -6712,7 +9019,7 @@
           <a:noFill/>
         </p:spPr>
         <p:txBody>
-          <a:bodyPr wrap="square">
+          <a:bodyPr wrap="square" lIns="0" rIns="0" tIns="0" bIns="0">
             <a:spAutoFit/>
           </a:bodyPr>
           <a:lstStyle/>
@@ -6720,7 +9027,7 @@
             <a:pPr>
               <a:defRPr sz="1100" b="1">
                 <a:solidFill>
-                  <a:srgbClr val="2563EB"/>
+                  <a:srgbClr val="0D9488"/>
                 </a:solidFill>
                 <a:latin typeface="Segoe UI"/>
               </a:defRPr>
@@ -6748,13 +9055,13 @@
           <a:noFill/>
         </p:spPr>
         <p:txBody>
-          <a:bodyPr wrap="square">
+          <a:bodyPr wrap="square" lIns="0" rIns="0" tIns="0" bIns="0">
             <a:spAutoFit/>
           </a:bodyPr>
           <a:lstStyle/>
           <a:p>
             <a:pPr>
-              <a:defRPr sz="2200" b="1">
+              <a:defRPr sz="2100" b="1">
                 <a:solidFill>
                   <a:srgbClr val="1E293B"/>
                 </a:solidFill>
@@ -7370,7 +9677,7 @@
 </p:sld>
 </file>
 
-<file path=ppt/slides/slide17.xml><?xml version="1.0" encoding="utf-8"?>
+<file path=ppt/slides/slide22.xml><?xml version="1.0" encoding="utf-8"?>
 <p:sld xmlns:a="http://schemas.openxmlformats.org/drawingml/2006/main" xmlns:p="http://schemas.openxmlformats.org/presentationml/2006/main" xmlns:r="http://schemas.openxmlformats.org/officeDocument/2006/relationships">
   <p:cSld>
     <p:bg>
@@ -7403,7 +9710,7 @@
             <a:avLst/>
           </a:prstGeom>
           <a:solidFill>
-            <a:srgbClr val="2563EB"/>
+            <a:srgbClr val="0D9488"/>
           </a:solidFill>
           <a:ln>
             <a:noFill/>
@@ -7448,7 +9755,7 @@
           <a:noFill/>
         </p:spPr>
         <p:txBody>
-          <a:bodyPr wrap="square">
+          <a:bodyPr wrap="square" lIns="0" rIns="0" tIns="0" bIns="0">
             <a:spAutoFit/>
           </a:bodyPr>
           <a:lstStyle/>
@@ -7456,7 +9763,7 @@
             <a:pPr>
               <a:defRPr sz="1100" b="1">
                 <a:solidFill>
-                  <a:srgbClr val="2563EB"/>
+                  <a:srgbClr val="0D9488"/>
                 </a:solidFill>
                 <a:latin typeface="Segoe UI"/>
               </a:defRPr>
@@ -7484,13 +9791,13 @@
           <a:noFill/>
         </p:spPr>
         <p:txBody>
-          <a:bodyPr wrap="square">
+          <a:bodyPr wrap="square" lIns="0" rIns="0" tIns="0" bIns="0">
             <a:spAutoFit/>
           </a:bodyPr>
           <a:lstStyle/>
           <a:p>
             <a:pPr>
-              <a:defRPr sz="2200" b="1">
+              <a:defRPr sz="2100" b="1">
                 <a:solidFill>
                   <a:srgbClr val="1E293B"/>
                 </a:solidFill>
@@ -7512,7 +9819,7 @@
         <p:spPr>
           <a:xfrm>
             <a:off x="731520" y="1463040"/>
-            <a:ext cx="3474720" cy="4754880"/>
+            <a:ext cx="3474720" cy="4846320"/>
           </a:xfrm>
           <a:prstGeom prst="roundRect">
             <a:avLst/>
@@ -7608,8 +9915,8 @@
         </p:nvSpPr>
         <p:spPr>
           <a:xfrm>
-            <a:off x="914400" y="2194560"/>
-            <a:ext cx="3108960" cy="3840480"/>
+            <a:off x="868680" y="2103120"/>
+            <a:ext cx="3200400" cy="4114800"/>
           </a:xfrm>
           <a:prstGeom prst="rect">
             <a:avLst/>
@@ -7624,9 +9931,9 @@
           <a:p>
             <a:pPr>
               <a:spcAft>
-                <a:spcPts val="1200"/>
-              </a:spcAft>
-              <a:defRPr sz="1200">
+                <a:spcPts val="1000"/>
+              </a:spcAft>
+              <a:defRPr sz="1150">
                 <a:solidFill>
                   <a:srgbClr val="0F172A"/>
                 </a:solidFill>
@@ -7634,15 +9941,15 @@
               </a:defRPr>
             </a:pPr>
             <a:r>
-              <a:t>• Alle @ManyToOne / @OneToOne explizit auf FetchType.LAZY.</a:t>
-            </a:r>
-          </a:p>
-          <a:p>
-            <a:pPr>
-              <a:spcAft>
-                <a:spcPts val="1200"/>
-              </a:spcAft>
-              <a:defRPr sz="1200">
+              <a:t>• Alle @ManyToOne / @OneToOne explizit auf LAZY.</a:t>
+            </a:r>
+          </a:p>
+          <a:p>
+            <a:pPr>
+              <a:spcAft>
+                <a:spcPts val="1000"/>
+              </a:spcAft>
+              <a:defRPr sz="1150">
                 <a:solidFill>
                   <a:srgbClr val="0F172A"/>
                 </a:solidFill>
@@ -7656,9 +9963,9 @@
           <a:p>
             <a:pPr>
               <a:spcAft>
-                <a:spcPts val="1200"/>
-              </a:spcAft>
-              <a:defRPr sz="1200">
+                <a:spcPts val="1000"/>
+              </a:spcAft>
+              <a:defRPr sz="1150">
                 <a:solidFill>
                   <a:srgbClr val="0F172A"/>
                 </a:solidFill>
@@ -7666,7 +9973,39 @@
               </a:defRPr>
             </a:pPr>
             <a:r>
+              <a:t>• orphanRemoval=true nur für echte Eltern-Kind-Aggregate.</a:t>
+            </a:r>
+          </a:p>
+          <a:p>
+            <a:pPr>
+              <a:spcAft>
+                <a:spcPts val="1000"/>
+              </a:spcAft>
+              <a:defRPr sz="1150">
+                <a:solidFill>
+                  <a:srgbClr val="0F172A"/>
+                </a:solidFill>
+                <a:latin typeface="Segoe UI"/>
+              </a:defRPr>
+            </a:pPr>
+            <a:r>
               <a:t>• Kein CascadeType.ALL oder REMOVE auf ManyToMany.</a:t>
+            </a:r>
+          </a:p>
+          <a:p>
+            <a:pPr>
+              <a:spcAft>
+                <a:spcPts val="1000"/>
+              </a:spcAft>
+              <a:defRPr sz="1150">
+                <a:solidFill>
+                  <a:srgbClr val="0F172A"/>
+                </a:solidFill>
+                <a:latin typeface="Segoe UI"/>
+              </a:defRPr>
+            </a:pPr>
+            <a:r>
+              <a:t>• AttributeConverter für saubere Enums &amp; Custom Types.</a:t>
             </a:r>
           </a:p>
         </p:txBody>
@@ -7680,7 +10019,7 @@
         <p:spPr>
           <a:xfrm>
             <a:off x="4343400" y="1463040"/>
-            <a:ext cx="3474720" cy="4754880"/>
+            <a:ext cx="3474720" cy="4846320"/>
           </a:xfrm>
           <a:prstGeom prst="roundRect">
             <a:avLst/>
@@ -7776,8 +10115,8 @@
         </p:nvSpPr>
         <p:spPr>
           <a:xfrm>
-            <a:off x="4526280" y="2194560"/>
-            <a:ext cx="3108960" cy="3840480"/>
+            <a:off x="4480560" y="2103120"/>
+            <a:ext cx="3200400" cy="4114800"/>
           </a:xfrm>
           <a:prstGeom prst="rect">
             <a:avLst/>
@@ -7792,9 +10131,9 @@
           <a:p>
             <a:pPr>
               <a:spcAft>
-                <a:spcPts val="1200"/>
-              </a:spcAft>
-              <a:defRPr sz="1200">
+                <a:spcPts val="1000"/>
+              </a:spcAft>
+              <a:defRPr sz="1150">
                 <a:solidFill>
                   <a:srgbClr val="0F172A"/>
                 </a:solidFill>
@@ -7808,9 +10147,9 @@
           <a:p>
             <a:pPr>
               <a:spcAft>
-                <a:spcPts val="1200"/>
-              </a:spcAft>
-              <a:defRPr sz="1200">
+                <a:spcPts val="1000"/>
+              </a:spcAft>
+              <a:defRPr sz="1150">
                 <a:solidFill>
                   <a:srgbClr val="0F172A"/>
                 </a:solidFill>
@@ -7824,9 +10163,9 @@
           <a:p>
             <a:pPr>
               <a:spcAft>
-                <a:spcPts val="1200"/>
-              </a:spcAft>
-              <a:defRPr sz="1200">
+                <a:spcPts val="1000"/>
+              </a:spcAft>
+              <a:defRPr sz="1150">
                 <a:solidFill>
                   <a:srgbClr val="0F172A"/>
                 </a:solidFill>
@@ -7834,7 +10173,23 @@
               </a:defRPr>
             </a:pPr>
             <a:r>
-              <a:t>• OptimisticLockException fangen &amp; Transaktion sauber rollbacken.</a:t>
+              <a:t>• Pessimistic Locking (SELECT FOR UPDATE) für Hotspots.</a:t>
+            </a:r>
+          </a:p>
+          <a:p>
+            <a:pPr>
+              <a:spcAft>
+                <a:spcPts val="1000"/>
+              </a:spcAft>
+              <a:defRPr sz="1150">
+                <a:solidFill>
+                  <a:srgbClr val="0F172A"/>
+                </a:solidFill>
+                <a:latin typeface="Segoe UI"/>
+              </a:defRPr>
+            </a:pPr>
+            <a:r>
+              <a:t>• @EmbeddedId als Standard für zusammengesetzte Schlüssel.</a:t>
             </a:r>
           </a:p>
         </p:txBody>
@@ -7848,7 +10203,7 @@
         <p:spPr>
           <a:xfrm>
             <a:off x="7955280" y="1463040"/>
-            <a:ext cx="3474720" cy="4754880"/>
+            <a:ext cx="3474720" cy="4846320"/>
           </a:xfrm>
           <a:prstGeom prst="roundRect">
             <a:avLst/>
@@ -7944,8 +10299,8 @@
         </p:nvSpPr>
         <p:spPr>
           <a:xfrm>
-            <a:off x="8138160" y="2194560"/>
-            <a:ext cx="3108960" cy="3840480"/>
+            <a:off x="8092440" y="2103120"/>
+            <a:ext cx="3200400" cy="4114800"/>
           </a:xfrm>
           <a:prstGeom prst="rect">
             <a:avLst/>
@@ -7960,9 +10315,9 @@
           <a:p>
             <a:pPr>
               <a:spcAft>
-                <a:spcPts val="1200"/>
-              </a:spcAft>
-              <a:defRPr sz="1200">
+                <a:spcPts val="1000"/>
+              </a:spcAft>
+              <a:defRPr sz="1150">
                 <a:solidFill>
                   <a:srgbClr val="0F172A"/>
                 </a:solidFill>
@@ -7970,15 +10325,15 @@
               </a:defRPr>
             </a:pPr>
             <a:r>
-              <a:t>• JOIN FETCH gegen N+1 Selects bei Entity-Listen.</a:t>
-            </a:r>
-          </a:p>
-          <a:p>
-            <a:pPr>
-              <a:spcAft>
-                <a:spcPts val="1200"/>
-              </a:spcAft>
-              <a:defRPr sz="1200">
+              <a:t>• JOIN FETCH oder Entity Graphs gegen N+1 Selects.</a:t>
+            </a:r>
+          </a:p>
+          <a:p>
+            <a:pPr>
+              <a:spcAft>
+                <a:spcPts val="1000"/>
+              </a:spcAft>
+              <a:defRPr sz="1150">
                 <a:solidFill>
                   <a:srgbClr val="0F172A"/>
                 </a:solidFill>
@@ -7992,9 +10347,9 @@
           <a:p>
             <a:pPr>
               <a:spcAft>
-                <a:spcPts val="1200"/>
-              </a:spcAft>
-              <a:defRPr sz="1200">
+                <a:spcPts val="1000"/>
+              </a:spcAft>
+              <a:defRPr sz="1150">
                 <a:solidFill>
                   <a:srgbClr val="0F172A"/>
                 </a:solidFill>
@@ -8005,274 +10360,12 @@
               <a:t>• Batch Processing: flush() &amp; clear() alle 50-100 Datensätze.</a:t>
             </a:r>
           </a:p>
-        </p:txBody>
-      </p:sp>
-    </p:spTree>
-  </p:cSld>
-  <p:clrMapOvr>
-    <a:masterClrMapping/>
-  </p:clrMapOvr>
-</p:sld>
-</file>
-
-<file path=ppt/slides/slide2.xml><?xml version="1.0" encoding="utf-8"?>
-<p:sld xmlns:a="http://schemas.openxmlformats.org/drawingml/2006/main" xmlns:p="http://schemas.openxmlformats.org/presentationml/2006/main" xmlns:r="http://schemas.openxmlformats.org/officeDocument/2006/relationships">
-  <p:cSld>
-    <p:bg>
-      <p:bgPr>
-        <a:solidFill>
-          <a:srgbClr val="F8FAFC"/>
-        </a:solidFill>
-        <a:effectLst/>
-      </p:bgPr>
-    </p:bg>
-    <p:spTree>
-      <p:nvGrpSpPr>
-        <p:cNvPr id="1" name=""/>
-        <p:cNvGrpSpPr/>
-        <p:nvPr/>
-      </p:nvGrpSpPr>
-      <p:grpSpPr/>
-      <p:sp>
-        <p:nvSpPr>
-          <p:cNvPr id="2" name="Rectangle 1"/>
-          <p:cNvSpPr/>
-          <p:nvPr/>
-        </p:nvSpPr>
-        <p:spPr>
-          <a:xfrm>
-            <a:off x="731520" y="365760"/>
-            <a:ext cx="10728655" cy="54864"/>
-          </a:xfrm>
-          <a:prstGeom prst="rect">
-            <a:avLst/>
-          </a:prstGeom>
-          <a:solidFill>
-            <a:srgbClr val="2563EB"/>
-          </a:solidFill>
-          <a:ln>
-            <a:noFill/>
-          </a:ln>
-        </p:spPr>
-        <p:style>
-          <a:lnRef idx="1">
-            <a:schemeClr val="accent1"/>
-          </a:lnRef>
-          <a:fillRef idx="3">
-            <a:schemeClr val="accent1"/>
-          </a:fillRef>
-          <a:effectRef idx="2">
-            <a:schemeClr val="accent1"/>
-          </a:effectRef>
-          <a:fontRef idx="minor">
-            <a:schemeClr val="lt1"/>
-          </a:fontRef>
-        </p:style>
-        <p:txBody>
-          <a:bodyPr rtlCol="0" anchor="ctr"/>
-          <a:lstStyle/>
-          <a:p>
-            <a:pPr algn="ctr"/>
-          </a:p>
-        </p:txBody>
-      </p:sp>
-      <p:sp>
-        <p:nvSpPr>
-          <p:cNvPr id="3" name="TextBox 2"/>
-          <p:cNvSpPr txBox="1"/>
-          <p:nvPr/>
-        </p:nvSpPr>
-        <p:spPr>
-          <a:xfrm>
-            <a:off x="731520" y="475488"/>
-            <a:ext cx="10728655" cy="292608"/>
-          </a:xfrm>
-          <a:prstGeom prst="rect">
-            <a:avLst/>
-          </a:prstGeom>
-          <a:noFill/>
-        </p:spPr>
-        <p:txBody>
-          <a:bodyPr wrap="square">
-            <a:spAutoFit/>
-          </a:bodyPr>
-          <a:lstStyle/>
-          <a:p>
-            <a:pPr>
-              <a:defRPr sz="1100" b="1">
-                <a:solidFill>
-                  <a:srgbClr val="2563EB"/>
-                </a:solidFill>
-                <a:latin typeface="Segoe UI"/>
-              </a:defRPr>
-            </a:pPr>
-            <a:r>
-              <a:t>ÜBERBLICK</a:t>
-            </a:r>
-          </a:p>
-        </p:txBody>
-      </p:sp>
-      <p:sp>
-        <p:nvSpPr>
-          <p:cNvPr id="4" name="TextBox 3"/>
-          <p:cNvSpPr txBox="1"/>
-          <p:nvPr/>
-        </p:nvSpPr>
-        <p:spPr>
-          <a:xfrm>
-            <a:off x="731520" y="749808"/>
-            <a:ext cx="10728655" cy="548640"/>
-          </a:xfrm>
-          <a:prstGeom prst="rect">
-            <a:avLst/>
-          </a:prstGeom>
-          <a:noFill/>
-        </p:spPr>
-        <p:txBody>
-          <a:bodyPr wrap="square">
-            <a:spAutoFit/>
-          </a:bodyPr>
-          <a:lstStyle/>
-          <a:p>
-            <a:pPr>
-              <a:defRPr sz="2200" b="1">
-                <a:solidFill>
-                  <a:srgbClr val="1E293B"/>
-                </a:solidFill>
-                <a:latin typeface="Segoe UI"/>
-              </a:defRPr>
-            </a:pPr>
-            <a:r>
-              <a:t>Leitfaden-Struktur &amp; Themenübersicht</a:t>
-            </a:r>
-          </a:p>
-        </p:txBody>
-      </p:sp>
-      <p:sp>
-        <p:nvSpPr>
-          <p:cNvPr id="5" name="Rounded Rectangle 4"/>
-          <p:cNvSpPr/>
-          <p:nvPr/>
-        </p:nvSpPr>
-        <p:spPr>
-          <a:xfrm>
-            <a:off x="731520" y="1463040"/>
-            <a:ext cx="3474720" cy="4754880"/>
-          </a:xfrm>
-          <a:prstGeom prst="roundRect">
-            <a:avLst/>
-          </a:prstGeom>
-          <a:solidFill>
-            <a:srgbClr val="FFFFFF"/>
-          </a:solidFill>
-          <a:ln w="19050">
-            <a:solidFill>
-              <a:srgbClr val="E2E8F0"/>
-            </a:solidFill>
-          </a:ln>
-        </p:spPr>
-        <p:style>
-          <a:lnRef idx="1">
-            <a:schemeClr val="accent1"/>
-          </a:lnRef>
-          <a:fillRef idx="3">
-            <a:schemeClr val="accent1"/>
-          </a:fillRef>
-          <a:effectRef idx="2">
-            <a:schemeClr val="accent1"/>
-          </a:effectRef>
-          <a:fontRef idx="minor">
-            <a:schemeClr val="lt1"/>
-          </a:fontRef>
-        </p:style>
-        <p:txBody>
-          <a:bodyPr rtlCol="0" anchor="ctr"/>
-          <a:lstStyle/>
-          <a:p>
-            <a:pPr algn="ctr"/>
-          </a:p>
-        </p:txBody>
-      </p:sp>
-      <p:sp>
-        <p:nvSpPr>
-          <p:cNvPr id="6" name="Rectangle 5"/>
-          <p:cNvSpPr/>
-          <p:nvPr/>
-        </p:nvSpPr>
-        <p:spPr>
-          <a:xfrm>
-            <a:off x="731520" y="1463040"/>
-            <a:ext cx="3474720" cy="548640"/>
-          </a:xfrm>
-          <a:prstGeom prst="rect">
-            <a:avLst/>
-          </a:prstGeom>
-          <a:solidFill>
-            <a:srgbClr val="DC2626"/>
-          </a:solidFill>
-          <a:ln>
-            <a:noFill/>
-          </a:ln>
-        </p:spPr>
-        <p:style>
-          <a:lnRef idx="1">
-            <a:schemeClr val="accent1"/>
-          </a:lnRef>
-          <a:fillRef idx="3">
-            <a:schemeClr val="accent1"/>
-          </a:fillRef>
-          <a:effectRef idx="2">
-            <a:schemeClr val="accent1"/>
-          </a:effectRef>
-          <a:fontRef idx="minor">
-            <a:schemeClr val="lt1"/>
-          </a:fontRef>
-        </p:style>
-        <p:txBody>
-          <a:bodyPr rtlCol="0" anchor="ctr"/>
-          <a:lstStyle/>
-          <a:p>
-            <a:pPr algn="ctr">
-              <a:defRPr sz="1400" b="1">
-                <a:solidFill>
-                  <a:srgbClr val="FFFFFF"/>
-                </a:solidFill>
-                <a:latin typeface="Segoe UI"/>
-              </a:defRPr>
-            </a:pPr>
-            <a:r>
-              <a:t>1. Typische Fehlerbilder</a:t>
-            </a:r>
-          </a:p>
-        </p:txBody>
-      </p:sp>
-      <p:sp>
-        <p:nvSpPr>
-          <p:cNvPr id="7" name="TextBox 6"/>
-          <p:cNvSpPr txBox="1"/>
-          <p:nvPr/>
-        </p:nvSpPr>
-        <p:spPr>
-          <a:xfrm>
-            <a:off x="914400" y="2103120"/>
-            <a:ext cx="3108960" cy="3931920"/>
-          </a:xfrm>
-          <a:prstGeom prst="rect">
-            <a:avLst/>
-          </a:prstGeom>
-          <a:noFill/>
-        </p:spPr>
-        <p:txBody>
-          <a:bodyPr wrap="square">
-            <a:spAutoFit/>
-          </a:bodyPr>
-          <a:lstStyle/>
           <a:p>
             <a:pPr>
               <a:spcAft>
                 <a:spcPts val="1000"/>
               </a:spcAft>
-              <a:defRPr sz="1200">
+              <a:defRPr sz="1150">
                 <a:solidFill>
                   <a:srgbClr val="0F172A"/>
                 </a:solidFill>
@@ -8280,489 +10373,7 @@
               </a:defRPr>
             </a:pPr>
             <a:r>
-              <a:t>• LazyInitializationException &amp; Session Management</a:t>
-            </a:r>
-          </a:p>
-          <a:p>
-            <a:pPr>
-              <a:spcAft>
-                <a:spcPts val="1000"/>
-              </a:spcAft>
-              <a:defRPr sz="1200">
-                <a:solidFill>
-                  <a:srgbClr val="0F172A"/>
-                </a:solidFill>
-                <a:latin typeface="Segoe UI"/>
-              </a:defRPr>
-            </a:pPr>
-            <a:r>
-              <a:t>• N+1 Select Problem &amp; Fetch Joins</a:t>
-            </a:r>
-          </a:p>
-          <a:p>
-            <a:pPr>
-              <a:spcAft>
-                <a:spcPts val="1000"/>
-              </a:spcAft>
-              <a:defRPr sz="1200">
-                <a:solidFill>
-                  <a:srgbClr val="0F172A"/>
-                </a:solidFill>
-                <a:latin typeface="Segoe UI"/>
-              </a:defRPr>
-            </a:pPr>
-            <a:r>
-              <a:t>• OptimisticLockException &amp; Concurrency</a:t>
-            </a:r>
-          </a:p>
-          <a:p>
-            <a:pPr>
-              <a:spcAft>
-                <a:spcPts val="1000"/>
-              </a:spcAft>
-              <a:defRPr sz="1200">
-                <a:solidFill>
-                  <a:srgbClr val="0F172A"/>
-                </a:solidFill>
-                <a:latin typeface="Segoe UI"/>
-              </a:defRPr>
-            </a:pPr>
-            <a:r>
-              <a:t>• Transiente &amp; Detached Entity Ausnahmen</a:t>
-            </a:r>
-          </a:p>
-          <a:p>
-            <a:pPr>
-              <a:spcAft>
-                <a:spcPts val="1000"/>
-              </a:spcAft>
-              <a:defRPr sz="1200">
-                <a:solidFill>
-                  <a:srgbClr val="0F172A"/>
-                </a:solidFill>
-                <a:latin typeface="Segoe UI"/>
-              </a:defRPr>
-            </a:pPr>
-            <a:r>
-              <a:t>• Bean Validation &amp; Constraints</a:t>
-            </a:r>
-          </a:p>
-          <a:p>
-            <a:pPr>
-              <a:spcAft>
-                <a:spcPts val="1000"/>
-              </a:spcAft>
-              <a:defRPr sz="1200">
-                <a:solidFill>
-                  <a:srgbClr val="0F172A"/>
-                </a:solidFill>
-                <a:latin typeface="Segoe UI"/>
-              </a:defRPr>
-            </a:pPr>
-            <a:r>
-              <a:t>• MappedSuperclass vs. Entities, Derby Locks</a:t>
-            </a:r>
-          </a:p>
-        </p:txBody>
-      </p:sp>
-      <p:sp>
-        <p:nvSpPr>
-          <p:cNvPr id="8" name="Rounded Rectangle 7"/>
-          <p:cNvSpPr/>
-          <p:nvPr/>
-        </p:nvSpPr>
-        <p:spPr>
-          <a:xfrm>
-            <a:off x="4343400" y="1463040"/>
-            <a:ext cx="3474720" cy="4754880"/>
-          </a:xfrm>
-          <a:prstGeom prst="roundRect">
-            <a:avLst/>
-          </a:prstGeom>
-          <a:solidFill>
-            <a:srgbClr val="FFFFFF"/>
-          </a:solidFill>
-          <a:ln w="19050">
-            <a:solidFill>
-              <a:srgbClr val="E2E8F0"/>
-            </a:solidFill>
-          </a:ln>
-        </p:spPr>
-        <p:style>
-          <a:lnRef idx="1">
-            <a:schemeClr val="accent1"/>
-          </a:lnRef>
-          <a:fillRef idx="3">
-            <a:schemeClr val="accent1"/>
-          </a:fillRef>
-          <a:effectRef idx="2">
-            <a:schemeClr val="accent1"/>
-          </a:effectRef>
-          <a:fontRef idx="minor">
-            <a:schemeClr val="lt1"/>
-          </a:fontRef>
-        </p:style>
-        <p:txBody>
-          <a:bodyPr rtlCol="0" anchor="ctr"/>
-          <a:lstStyle/>
-          <a:p>
-            <a:pPr algn="ctr"/>
-          </a:p>
-        </p:txBody>
-      </p:sp>
-      <p:sp>
-        <p:nvSpPr>
-          <p:cNvPr id="9" name="Rectangle 8"/>
-          <p:cNvSpPr/>
-          <p:nvPr/>
-        </p:nvSpPr>
-        <p:spPr>
-          <a:xfrm>
-            <a:off x="4343400" y="1463040"/>
-            <a:ext cx="3474720" cy="548640"/>
-          </a:xfrm>
-          <a:prstGeom prst="rect">
-            <a:avLst/>
-          </a:prstGeom>
-          <a:solidFill>
-            <a:srgbClr val="2563EB"/>
-          </a:solidFill>
-          <a:ln>
-            <a:noFill/>
-          </a:ln>
-        </p:spPr>
-        <p:style>
-          <a:lnRef idx="1">
-            <a:schemeClr val="accent1"/>
-          </a:lnRef>
-          <a:fillRef idx="3">
-            <a:schemeClr val="accent1"/>
-          </a:fillRef>
-          <a:effectRef idx="2">
-            <a:schemeClr val="accent1"/>
-          </a:effectRef>
-          <a:fontRef idx="minor">
-            <a:schemeClr val="lt1"/>
-          </a:fontRef>
-        </p:style>
-        <p:txBody>
-          <a:bodyPr rtlCol="0" anchor="ctr"/>
-          <a:lstStyle/>
-          <a:p>
-            <a:pPr algn="ctr">
-              <a:defRPr sz="1400" b="1">
-                <a:solidFill>
-                  <a:srgbClr val="FFFFFF"/>
-                </a:solidFill>
-                <a:latin typeface="Segoe UI"/>
-              </a:defRPr>
-            </a:pPr>
-            <a:r>
-              <a:t>2. Architecture &amp; Best Practices</a:t>
-            </a:r>
-          </a:p>
-        </p:txBody>
-      </p:sp>
-      <p:sp>
-        <p:nvSpPr>
-          <p:cNvPr id="10" name="TextBox 9"/>
-          <p:cNvSpPr txBox="1"/>
-          <p:nvPr/>
-        </p:nvSpPr>
-        <p:spPr>
-          <a:xfrm>
-            <a:off x="4526280" y="2103120"/>
-            <a:ext cx="3108960" cy="3931920"/>
-          </a:xfrm>
-          <a:prstGeom prst="rect">
-            <a:avLst/>
-          </a:prstGeom>
-          <a:noFill/>
-        </p:spPr>
-        <p:txBody>
-          <a:bodyPr wrap="square">
-            <a:spAutoFit/>
-          </a:bodyPr>
-          <a:lstStyle/>
-          <a:p>
-            <a:pPr>
-              <a:spcAft>
-                <a:spcPts val="1000"/>
-              </a:spcAft>
-              <a:defRPr sz="1200">
-                <a:solidFill>
-                  <a:srgbClr val="0F172A"/>
-                </a:solidFill>
-                <a:latin typeface="Segoe UI"/>
-              </a:defRPr>
-            </a:pPr>
-            <a:r>
-              <a:t>• FetchType-Regeln (LAZY als Default)</a:t>
-            </a:r>
-          </a:p>
-          <a:p>
-            <a:pPr>
-              <a:spcAft>
-                <a:spcPts val="1000"/>
-              </a:spcAft>
-              <a:defRPr sz="1200">
-                <a:solidFill>
-                  <a:srgbClr val="0F172A"/>
-                </a:solidFill>
-                <a:latin typeface="Segoe UI"/>
-              </a:defRPr>
-            </a:pPr>
-            <a:r>
-              <a:t>• Defensive Assoziations-Synchronisation</a:t>
-            </a:r>
-          </a:p>
-          <a:p>
-            <a:pPr>
-              <a:spcAft>
-                <a:spcPts val="1000"/>
-              </a:spcAft>
-              <a:defRPr sz="1200">
-                <a:solidFill>
-                  <a:srgbClr val="0F172A"/>
-                </a:solidFill>
-                <a:latin typeface="Segoe UI"/>
-              </a:defRPr>
-            </a:pPr>
-            <a:r>
-              <a:t>• equals() &amp; hashCode() Regeln bei Entities</a:t>
-            </a:r>
-          </a:p>
-          <a:p>
-            <a:pPr>
-              <a:spcAft>
-                <a:spcPts val="1000"/>
-              </a:spcAft>
-              <a:defRPr sz="1200">
-                <a:solidFill>
-                  <a:srgbClr val="0F172A"/>
-                </a:solidFill>
-                <a:latin typeface="Segoe UI"/>
-              </a:defRPr>
-            </a:pPr>
-            <a:r>
-              <a:t>• Persistence Context &amp; Batch Processing</a:t>
-            </a:r>
-          </a:p>
-          <a:p>
-            <a:pPr>
-              <a:spcAft>
-                <a:spcPts val="1000"/>
-              </a:spcAft>
-              <a:defRPr sz="1200">
-                <a:solidFill>
-                  <a:srgbClr val="0F172A"/>
-                </a:solidFill>
-                <a:latin typeface="Segoe UI"/>
-              </a:defRPr>
-            </a:pPr>
-            <a:r>
-              <a:t>• DTO-Projektionen (Constructor Expressions)</a:t>
-            </a:r>
-          </a:p>
-          <a:p>
-            <a:pPr>
-              <a:spcAft>
-                <a:spcPts val="1000"/>
-              </a:spcAft>
-              <a:defRPr sz="1200">
-                <a:solidFill>
-                  <a:srgbClr val="0F172A"/>
-                </a:solidFill>
-                <a:latin typeface="Segoe UI"/>
-              </a:defRPr>
-            </a:pPr>
-            <a:r>
-              <a:t>• ID-Strategien (IDENTITY, SEQUENCE, TABLE)</a:t>
-            </a:r>
-          </a:p>
-        </p:txBody>
-      </p:sp>
-      <p:sp>
-        <p:nvSpPr>
-          <p:cNvPr id="11" name="Rounded Rectangle 10"/>
-          <p:cNvSpPr/>
-          <p:nvPr/>
-        </p:nvSpPr>
-        <p:spPr>
-          <a:xfrm>
-            <a:off x="7955280" y="1463040"/>
-            <a:ext cx="3474720" cy="4754880"/>
-          </a:xfrm>
-          <a:prstGeom prst="roundRect">
-            <a:avLst/>
-          </a:prstGeom>
-          <a:solidFill>
-            <a:srgbClr val="FFFFFF"/>
-          </a:solidFill>
-          <a:ln w="19050">
-            <a:solidFill>
-              <a:srgbClr val="E2E8F0"/>
-            </a:solidFill>
-          </a:ln>
-        </p:spPr>
-        <p:style>
-          <a:lnRef idx="1">
-            <a:schemeClr val="accent1"/>
-          </a:lnRef>
-          <a:fillRef idx="3">
-            <a:schemeClr val="accent1"/>
-          </a:fillRef>
-          <a:effectRef idx="2">
-            <a:schemeClr val="accent1"/>
-          </a:effectRef>
-          <a:fontRef idx="minor">
-            <a:schemeClr val="lt1"/>
-          </a:fontRef>
-        </p:style>
-        <p:txBody>
-          <a:bodyPr rtlCol="0" anchor="ctr"/>
-          <a:lstStyle/>
-          <a:p>
-            <a:pPr algn="ctr"/>
-          </a:p>
-        </p:txBody>
-      </p:sp>
-      <p:sp>
-        <p:nvSpPr>
-          <p:cNvPr id="12" name="Rectangle 11"/>
-          <p:cNvSpPr/>
-          <p:nvPr/>
-        </p:nvSpPr>
-        <p:spPr>
-          <a:xfrm>
-            <a:off x="7955280" y="1463040"/>
-            <a:ext cx="3474720" cy="548640"/>
-          </a:xfrm>
-          <a:prstGeom prst="rect">
-            <a:avLst/>
-          </a:prstGeom>
-          <a:solidFill>
-            <a:srgbClr val="0D9488"/>
-          </a:solidFill>
-          <a:ln>
-            <a:noFill/>
-          </a:ln>
-        </p:spPr>
-        <p:style>
-          <a:lnRef idx="1">
-            <a:schemeClr val="accent1"/>
-          </a:lnRef>
-          <a:fillRef idx="3">
-            <a:schemeClr val="accent1"/>
-          </a:fillRef>
-          <a:effectRef idx="2">
-            <a:schemeClr val="accent1"/>
-          </a:effectRef>
-          <a:fontRef idx="minor">
-            <a:schemeClr val="lt1"/>
-          </a:fontRef>
-        </p:style>
-        <p:txBody>
-          <a:bodyPr rtlCol="0" anchor="ctr"/>
-          <a:lstStyle/>
-          <a:p>
-            <a:pPr algn="ctr">
-              <a:defRPr sz="1400" b="1">
-                <a:solidFill>
-                  <a:srgbClr val="FFFFFF"/>
-                </a:solidFill>
-                <a:latin typeface="Segoe UI"/>
-              </a:defRPr>
-            </a:pPr>
-            <a:r>
-              <a:t>3. Referenz- &amp; Entscheidungstabellen</a:t>
-            </a:r>
-          </a:p>
-        </p:txBody>
-      </p:sp>
-      <p:sp>
-        <p:nvSpPr>
-          <p:cNvPr id="13" name="TextBox 12"/>
-          <p:cNvSpPr txBox="1"/>
-          <p:nvPr/>
-        </p:nvSpPr>
-        <p:spPr>
-          <a:xfrm>
-            <a:off x="8138160" y="2103120"/>
-            <a:ext cx="3108960" cy="3931920"/>
-          </a:xfrm>
-          <a:prstGeom prst="rect">
-            <a:avLst/>
-          </a:prstGeom>
-          <a:noFill/>
-        </p:spPr>
-        <p:txBody>
-          <a:bodyPr wrap="square">
-            <a:spAutoFit/>
-          </a:bodyPr>
-          <a:lstStyle/>
-          <a:p>
-            <a:pPr>
-              <a:spcAft>
-                <a:spcPts val="1000"/>
-              </a:spcAft>
-              <a:defRPr sz="1200">
-                <a:solidFill>
-                  <a:srgbClr val="0F172A"/>
-                </a:solidFill>
-                <a:latin typeface="Segoe UI"/>
-              </a:defRPr>
-            </a:pPr>
-            <a:r>
-              <a:t>• CascadeType-Matrix (PERSIST, MERGE, REMOVE, ALL)</a:t>
-            </a:r>
-          </a:p>
-          <a:p>
-            <a:pPr>
-              <a:spcAft>
-                <a:spcPts val="1000"/>
-              </a:spcAft>
-              <a:defRPr sz="1200">
-                <a:solidFill>
-                  <a:srgbClr val="0F172A"/>
-                </a:solidFill>
-                <a:latin typeface="Segoe UI"/>
-              </a:defRPr>
-            </a:pPr>
-            <a:r>
-              <a:t>• Entity-Lifecycle Callbacks (@PrePersist etc.)</a:t>
-            </a:r>
-          </a:p>
-          <a:p>
-            <a:pPr>
-              <a:spcAft>
-                <a:spcPts val="1000"/>
-              </a:spcAft>
-              <a:defRPr sz="1200">
-                <a:solidFill>
-                  <a:srgbClr val="0F172A"/>
-                </a:solidFill>
-                <a:latin typeface="Segoe UI"/>
-              </a:defRPr>
-            </a:pPr>
-            <a:r>
-              <a:t>• Transaktionsgrenzen &amp; Flush-Verhalten</a:t>
-            </a:r>
-          </a:p>
-          <a:p>
-            <a:pPr>
-              <a:spcAft>
-                <a:spcPts val="1000"/>
-              </a:spcAft>
-              <a:defRPr sz="1200">
-                <a:solidFill>
-                  <a:srgbClr val="0F172A"/>
-                </a:solidFill>
-                <a:latin typeface="Segoe UI"/>
-              </a:defRPr>
-            </a:pPr>
-            <a:r>
-              <a:t>• Checkliste für den Produktiveinsatz</a:t>
+              <a:t>• Nach executeUpdate() immer em.clear() aufrufen!</a:t>
             </a:r>
           </a:p>
         </p:txBody>
@@ -8808,7 +10419,7 @@
             <a:avLst/>
           </a:prstGeom>
           <a:solidFill>
-            <a:srgbClr val="2563EB"/>
+            <a:srgbClr val="DC2626"/>
           </a:solidFill>
           <a:ln>
             <a:noFill/>
@@ -8853,7 +10464,7 @@
           <a:noFill/>
         </p:spPr>
         <p:txBody>
-          <a:bodyPr wrap="square">
+          <a:bodyPr wrap="square" lIns="0" rIns="0" tIns="0" bIns="0">
             <a:spAutoFit/>
           </a:bodyPr>
           <a:lstStyle/>
@@ -8861,13 +10472,13 @@
             <a:pPr>
               <a:defRPr sz="1100" b="1">
                 <a:solidFill>
-                  <a:srgbClr val="2563EB"/>
-                </a:solidFill>
-                <a:latin typeface="Segoe UI"/>
-              </a:defRPr>
-            </a:pPr>
-            <a:r>
-              <a:t>TROUBLESHOOTING</a:t>
+                  <a:srgbClr val="DC2626"/>
+                </a:solidFill>
+                <a:latin typeface="Segoe UI"/>
+              </a:defRPr>
+            </a:pPr>
+            <a:r>
+              <a:t>TROUBLESHOOTING &amp; PROXIES</a:t>
             </a:r>
           </a:p>
         </p:txBody>
@@ -8889,13 +10500,13 @@
           <a:noFill/>
         </p:spPr>
         <p:txBody>
-          <a:bodyPr wrap="square">
+          <a:bodyPr wrap="square" lIns="0" rIns="0" tIns="0" bIns="0">
             <a:spAutoFit/>
           </a:bodyPr>
           <a:lstStyle/>
           <a:p>
             <a:pPr>
-              <a:defRPr sz="2200" b="1">
+              <a:defRPr sz="2100" b="1">
                 <a:solidFill>
                   <a:srgbClr val="1E293B"/>
                 </a:solidFill>
@@ -8917,7 +10528,7 @@
         <p:spPr>
           <a:xfrm>
             <a:off x="731520" y="1463040"/>
-            <a:ext cx="5212080" cy="4754880"/>
+            <a:ext cx="5212080" cy="4846320"/>
           </a:xfrm>
           <a:prstGeom prst="roundRect">
             <a:avLst/>
@@ -8962,7 +10573,7 @@
         <p:spPr>
           <a:xfrm>
             <a:off x="914400" y="1645920"/>
-            <a:ext cx="4846320" cy="4389120"/>
+            <a:ext cx="4846320" cy="4480560"/>
           </a:xfrm>
           <a:prstGeom prst="rect">
             <a:avLst/>
@@ -8977,95 +10588,110 @@
           <a:p>
             <a:pPr>
               <a:spcAft>
+                <a:spcPts val="400"/>
+              </a:spcAft>
+              <a:defRPr sz="1400" b="1">
+                <a:solidFill>
+                  <a:srgbClr val="DC2626"/>
+                </a:solidFill>
+              </a:defRPr>
+            </a:pPr>
+            <a:r>
+              <a:t>Symptom &amp; Fehlermeldung</a:t>
+            </a:r>
+          </a:p>
+          <a:p>
+            <a:pPr>
+              <a:spcAft>
+                <a:spcPts val="800"/>
+              </a:spcAft>
+              <a:defRPr sz="1000">
+                <a:solidFill>
+                  <a:srgbClr val="1E293B"/>
+                </a:solidFill>
+                <a:latin typeface="Consolas"/>
+              </a:defRPr>
+            </a:pPr>
+            <a:r>
+              <a:t>org.hibernate.LazyInitializationException: could not initialize proxy [net.rentacar.model.Shop#1] - no Session</a:t>
+            </a:r>
+          </a:p>
+          <a:p>
+            <a:pPr>
+              <a:spcAft>
+                <a:spcPts val="400"/>
+              </a:spcAft>
+              <a:defRPr sz="1300" b="1">
+                <a:solidFill>
+                  <a:srgbClr val="1E293B"/>
+                </a:solidFill>
+              </a:defRPr>
+            </a:pPr>
+            <a:r>
+              <a:t>Ursache &amp; Mechanismen</a:t>
+            </a:r>
+          </a:p>
+          <a:p>
+            <a:pPr>
+              <a:spcAft>
                 <a:spcPts val="600"/>
               </a:spcAft>
-              <a:defRPr sz="1400" b="1">
+              <a:defRPr sz="1150">
+                <a:solidFill>
+                  <a:srgbClr val="0F172A"/>
+                </a:solidFill>
+                <a:latin typeface="Segoe UI"/>
+              </a:defRPr>
+            </a:pPr>
+            <a:r>
+              <a:t>• Zugriff auf eine LAZY-Relation bei einer Detached Entity (Session geschlossen / Tx beendet).</a:t>
+            </a:r>
+          </a:p>
+          <a:p>
+            <a:pPr>
+              <a:spcAft>
+                <a:spcPts val="600"/>
+              </a:spcAft>
+              <a:defRPr sz="1150">
+                <a:solidFill>
+                  <a:srgbClr val="0F172A"/>
+                </a:solidFill>
+                <a:latin typeface="Segoe UI"/>
+              </a:defRPr>
+            </a:pPr>
+            <a:r>
+              <a:t>• Der Bytecode-Proxy kann ohne aktive Datenbankverbindung kein SQL nachladen.</a:t>
+            </a:r>
+          </a:p>
+          <a:p>
+            <a:pPr>
+              <a:spcAft>
+                <a:spcPts val="400"/>
+              </a:spcAft>
+              <a:defRPr sz="1200" b="1">
                 <a:solidFill>
                   <a:srgbClr val="DC2626"/>
                 </a:solidFill>
               </a:defRPr>
             </a:pPr>
             <a:r>
-              <a:t>Symptom &amp; Fehlermeldung</a:t>
-            </a:r>
-          </a:p>
-          <a:p>
-            <a:pPr>
-              <a:spcAft>
-                <a:spcPts val="1400"/>
+              <a:t>Antipatterns (Vermeiden!):</a:t>
+            </a:r>
+          </a:p>
+          <a:p>
+            <a:pPr>
+              <a:spcAft>
+                <a:spcPts val="400"/>
               </a:spcAft>
               <a:defRPr sz="1100">
                 <a:solidFill>
-                  <a:srgbClr val="1E293B"/>
-                </a:solidFill>
-                <a:latin typeface="Courier New"/>
-              </a:defRPr>
-            </a:pPr>
-            <a:r>
-              <a:t>org.hibernate.LazyInitializationException: could not initialize proxy [net.rentacar.model.Shop#1] - no Session</a:t>
-            </a:r>
-          </a:p>
-          <a:p>
-            <a:pPr>
-              <a:spcAft>
-                <a:spcPts val="600"/>
-              </a:spcAft>
-              <a:defRPr sz="1400" b="1">
-                <a:solidFill>
-                  <a:srgbClr val="1E293B"/>
-                </a:solidFill>
-              </a:defRPr>
-            </a:pPr>
-            <a:r>
-              <a:t>Ursache &amp; Mechanismen</a:t>
-            </a:r>
-          </a:p>
-          <a:p>
-            <a:pPr>
-              <a:spcAft>
-                <a:spcPts val="800"/>
-              </a:spcAft>
-              <a:defRPr sz="1200">
-                <a:solidFill>
-                  <a:srgbClr val="0F172A"/>
-                </a:solidFill>
-                <a:latin typeface="Segoe UI"/>
-              </a:defRPr>
-            </a:pPr>
-            <a:r>
-              <a:t>• Zugriff auf eine LAZY-Relation oder Collection bei einer Detached Entity.</a:t>
-            </a:r>
-          </a:p>
-          <a:p>
-            <a:pPr>
-              <a:spcAft>
-                <a:spcPts val="800"/>
-              </a:spcAft>
-              <a:defRPr sz="1200">
-                <a:solidFill>
-                  <a:srgbClr val="0F172A"/>
-                </a:solidFill>
-                <a:latin typeface="Segoe UI"/>
-              </a:defRPr>
-            </a:pPr>
-            <a:r>
-              <a:t>• Der EntityManager / die Hibernate-Session wurde zuvor geschlossen (close()) oder die Transaktion committet.</a:t>
-            </a:r>
-          </a:p>
-          <a:p>
-            <a:pPr>
-              <a:spcAft>
-                <a:spcPts val="800"/>
-              </a:spcAft>
-              <a:defRPr sz="1200">
-                <a:solidFill>
-                  <a:srgbClr val="0F172A"/>
-                </a:solidFill>
-                <a:latin typeface="Segoe UI"/>
-              </a:defRPr>
-            </a:pPr>
-            <a:r>
-              <a:t>• Der Lazy-Proxy kann ohne aktive Datenbankverbindung keine SQL-Abfrage nachladen.</a:t>
+                  <a:srgbClr val="64748B"/>
+                </a:solidFill>
+                <a:latin typeface="Segoe UI"/>
+              </a:defRPr>
+            </a:pPr>
+            <a:r>
+              <a:t>• Globales Umstellen auf FetchType.EAGER (verschleppt Performance-Probleme).</a:t>
             </a:r>
           </a:p>
           <a:p>
@@ -9073,21 +10699,6 @@
               <a:spcAft>
                 <a:spcPts val="400"/>
               </a:spcAft>
-              <a:defRPr sz="1200" b="1">
-                <a:solidFill>
-                  <a:srgbClr val="DC2626"/>
-                </a:solidFill>
-              </a:defRPr>
-            </a:pPr>
-            <a:r>
-              <a:t>Antipatterns (Vermeiden!):</a:t>
-            </a:r>
-          </a:p>
-          <a:p>
-            <a:pPr>
-              <a:spcAft>
-                <a:spcPts val="400"/>
-              </a:spcAft>
               <a:defRPr sz="1100">
                 <a:solidFill>
                   <a:srgbClr val="64748B"/>
@@ -9096,23 +10707,7 @@
               </a:defRPr>
             </a:pPr>
             <a:r>
-              <a:t>• Globales Umstellen aller Relationen auf FetchType.EAGER.</a:t>
-            </a:r>
-          </a:p>
-          <a:p>
-            <a:pPr>
-              <a:spcAft>
-                <a:spcPts val="400"/>
-              </a:spcAft>
-              <a:defRPr sz="1100">
-                <a:solidFill>
-                  <a:srgbClr val="64748B"/>
-                </a:solidFill>
-                <a:latin typeface="Segoe UI"/>
-              </a:defRPr>
-            </a:pPr>
-            <a:r>
-              <a:t>• Open Session in View (OSIV) im Web/API-Layer (verschleiert DB-Zugriffe).</a:t>
+              <a:t>• Open Session in View (OSIV) im Web/API-Layer (verschleiert unkontrollierte Queries).</a:t>
             </a:r>
           </a:p>
         </p:txBody>
@@ -9126,7 +10721,7 @@
         <p:spPr>
           <a:xfrm>
             <a:off x="6217920" y="1463040"/>
-            <a:ext cx="5212080" cy="4754880"/>
+            <a:ext cx="5212080" cy="4846320"/>
           </a:xfrm>
           <a:prstGeom prst="roundRect">
             <a:avLst/>
@@ -9171,7 +10766,7 @@
         <p:spPr>
           <a:xfrm>
             <a:off x="6400800" y="1645920"/>
-            <a:ext cx="4846320" cy="4389120"/>
+            <a:ext cx="4846320" cy="4480560"/>
           </a:xfrm>
           <a:prstGeom prst="rect">
             <a:avLst/>
@@ -9186,114 +10781,89 @@
           <a:p>
             <a:pPr>
               <a:spcAft>
+                <a:spcPts val="600"/>
+              </a:spcAft>
+              <a:defRPr sz="1400" b="1">
+                <a:solidFill>
+                  <a:srgbClr val="0D9488"/>
+                </a:solidFill>
+              </a:defRPr>
+            </a:pPr>
+            <a:r>
+              <a:t>Lösungsstrategien (Best Practice)</a:t>
+            </a:r>
+          </a:p>
+          <a:p>
+            <a:pPr>
+              <a:spcAft>
+                <a:spcPts val="600"/>
+              </a:spcAft>
+              <a:defRPr sz="1200">
+                <a:solidFill>
+                  <a:srgbClr val="0F172A"/>
+                </a:solidFill>
+                <a:latin typeface="Segoe UI"/>
+              </a:defRPr>
+            </a:pPr>
+            <a:r>
+              <a:t>• 1. JPQL JOIN FETCH: Gezieltes Eager-Laden genau für diesen Abfragepfad.</a:t>
+            </a:r>
+          </a:p>
+          <a:p>
+            <a:pPr>
+              <a:spcAft>
+                <a:spcPts val="600"/>
+              </a:spcAft>
+              <a:defRPr sz="1200">
+                <a:solidFill>
+                  <a:srgbClr val="0F172A"/>
+                </a:solidFill>
+                <a:latin typeface="Segoe UI"/>
+              </a:defRPr>
+            </a:pPr>
+            <a:r>
+              <a:t>• 2. JPA Entity Graphs: Deklarative oder dynamische Ladepläne definieren.</a:t>
+            </a:r>
+          </a:p>
+          <a:p>
+            <a:pPr>
+              <a:spcAft>
+                <a:spcPts val="600"/>
+              </a:spcAft>
+              <a:defRPr sz="1200">
+                <a:solidFill>
+                  <a:srgbClr val="0F172A"/>
+                </a:solidFill>
+                <a:latin typeface="Segoe UI"/>
+              </a:defRPr>
+            </a:pPr>
+            <a:r>
+              <a:t>• 3. DTO Constructor Expressions: Flache Datentransfers direkt per JPQL projizieren.</a:t>
+            </a:r>
+          </a:p>
+          <a:p>
+            <a:pPr>
+              <a:spcAft>
                 <a:spcPts val="800"/>
               </a:spcAft>
-              <a:defRPr sz="1400" b="1">
-                <a:solidFill>
-                  <a:srgbClr val="0D9488"/>
-                </a:solidFill>
-              </a:defRPr>
-            </a:pPr>
-            <a:r>
-              <a:t>Lösungsstrategien (Best Practice)</a:t>
-            </a:r>
-          </a:p>
-          <a:p>
-            <a:pPr>
-              <a:spcAft>
-                <a:spcPts val="400"/>
-              </a:spcAft>
-              <a:defRPr sz="1200" b="1">
-                <a:solidFill>
-                  <a:srgbClr val="1E293B"/>
-                </a:solidFill>
-              </a:defRPr>
-            </a:pPr>
-            <a:r>
-              <a:t>1. JPQL JOIN FETCH (Gezieltes Initialisieren)</a:t>
-            </a:r>
-          </a:p>
-          <a:p>
-            <a:pPr>
-              <a:spcAft>
-                <a:spcPts val="1200"/>
-              </a:spcAft>
-              <a:defRPr sz="1100">
-                <a:solidFill>
-                  <a:srgbClr val="2563EB"/>
-                </a:solidFill>
-                <a:latin typeface="Courier New"/>
+              <a:defRPr sz="1000">
+                <a:solidFill>
+                  <a:srgbClr val="334155"/>
+                </a:solidFill>
+                <a:latin typeface="Consolas"/>
               </a:defRPr>
             </a:pPr>
             <a:r>
               <a:t>SELECT s FROM Shop s JOIN FETCH s.vehicles WHERE s.id = :id</a:t>
             </a:r>
-          </a:p>
-          <a:p>
-            <a:pPr>
-              <a:spcAft>
-                <a:spcPts val="400"/>
-              </a:spcAft>
-              <a:defRPr sz="1200" b="1">
-                <a:solidFill>
-                  <a:srgbClr val="1E293B"/>
-                </a:solidFill>
-              </a:defRPr>
-            </a:pPr>
-            <a:r>
-              <a:t>2. JPA Entity Graphs (Dynamische Fetch-Pläne)</a:t>
-            </a:r>
-          </a:p>
-          <a:p>
-            <a:pPr>
-              <a:spcAft>
-                <a:spcPts val="1200"/>
-              </a:spcAft>
-              <a:defRPr sz="1000">
-                <a:solidFill>
-                  <a:srgbClr val="334155"/>
-                </a:solidFill>
-                <a:latin typeface="Courier New"/>
-              </a:defRPr>
-            </a:pPr>
-            <a:r>
-              <a:t>EntityGraph&lt;Shop&gt; graph = em.createEntityGraph(Shop.class);</a:t>
-            </a:r>
             <a:br/>
-            <a:r>
-              <a:t>graph.addAttributeNodes("vehicles");</a:t>
-            </a:r>
             <a:br/>
             <a:r>
-              <a:t>em.find(Shop.class, id, Map.of("jakarta.persistence.fetchgraph", graph));</a:t>
-            </a:r>
-          </a:p>
-          <a:p>
-            <a:pPr>
-              <a:spcAft>
-                <a:spcPts val="400"/>
-              </a:spcAft>
-              <a:defRPr sz="1200" b="1">
-                <a:solidFill>
-                  <a:srgbClr val="1E293B"/>
-                </a:solidFill>
-              </a:defRPr>
-            </a:pPr>
-            <a:r>
-              <a:t>3. DTO-Projektionen für GUI / REST APIs</a:t>
-            </a:r>
-          </a:p>
-          <a:p>
-            <a:pPr>
-              <a:defRPr sz="1000">
-                <a:solidFill>
-                  <a:srgbClr val="334155"/>
-                </a:solidFill>
-                <a:latin typeface="Courier New"/>
-              </a:defRPr>
-            </a:pPr>
-            <a:r>
-              <a:t>SELECT new net.rentacar.dto.ShopSummaryDto(s.name, count(v)) FROM ...</a:t>
+              <a:t>// DTO Projektion:</a:t>
+            </a:r>
+            <a:br/>
+            <a:r>
+              <a:t>SELECT new net.rentacar.dto.ShopDto(s.name, size(s.vehicles)) FROM Shop s</a:t>
             </a:r>
           </a:p>
         </p:txBody>
@@ -9339,7 +10909,7 @@
             <a:avLst/>
           </a:prstGeom>
           <a:solidFill>
-            <a:srgbClr val="2563EB"/>
+            <a:srgbClr val="DC2626"/>
           </a:solidFill>
           <a:ln>
             <a:noFill/>
@@ -9384,7 +10954,7 @@
           <a:noFill/>
         </p:spPr>
         <p:txBody>
-          <a:bodyPr wrap="square">
+          <a:bodyPr wrap="square" lIns="0" rIns="0" tIns="0" bIns="0">
             <a:spAutoFit/>
           </a:bodyPr>
           <a:lstStyle/>
@@ -9392,7 +10962,7 @@
             <a:pPr>
               <a:defRPr sz="1100" b="1">
                 <a:solidFill>
-                  <a:srgbClr val="2563EB"/>
+                  <a:srgbClr val="DC2626"/>
                 </a:solidFill>
                 <a:latin typeface="Segoe UI"/>
               </a:defRPr>
@@ -9420,13 +10990,13 @@
           <a:noFill/>
         </p:spPr>
         <p:txBody>
-          <a:bodyPr wrap="square">
+          <a:bodyPr wrap="square" lIns="0" rIns="0" tIns="0" bIns="0">
             <a:spAutoFit/>
           </a:bodyPr>
           <a:lstStyle/>
           <a:p>
             <a:pPr>
-              <a:defRPr sz="2200" b="1">
+              <a:defRPr sz="2100" b="1">
                 <a:solidFill>
                   <a:srgbClr val="1E293B"/>
                 </a:solidFill>
@@ -9434,7 +11004,7 @@
               </a:defRPr>
             </a:pPr>
             <a:r>
-              <a:t>1.2 Das N+1-Select-Problem</a:t>
+              <a:t>1.2 Das N+1-Select-Problem &amp; JOIN FETCH</a:t>
             </a:r>
           </a:p>
         </p:txBody>
@@ -9448,7 +11018,7 @@
         <p:spPr>
           <a:xfrm>
             <a:off x="731520" y="1463040"/>
-            <a:ext cx="5212080" cy="4754880"/>
+            <a:ext cx="5212080" cy="4846320"/>
           </a:xfrm>
           <a:prstGeom prst="roundRect">
             <a:avLst/>
@@ -9493,7 +11063,7 @@
         <p:spPr>
           <a:xfrm>
             <a:off x="914400" y="1645920"/>
-            <a:ext cx="4846320" cy="4389120"/>
+            <a:ext cx="4846320" cy="4480560"/>
           </a:xfrm>
           <a:prstGeom prst="rect">
             <a:avLst/>
@@ -9508,7 +11078,7 @@
           <a:p>
             <a:pPr>
               <a:spcAft>
-                <a:spcPts val="800"/>
+                <a:spcPts val="600"/>
               </a:spcAft>
               <a:defRPr sz="1400" b="1">
                 <a:solidFill>
@@ -9525,7 +11095,7 @@
               <a:spcAft>
                 <a:spcPts val="600"/>
               </a:spcAft>
-              <a:defRPr sz="1100">
+              <a:defRPr sz="1150">
                 <a:solidFill>
                   <a:srgbClr val="0F172A"/>
                 </a:solidFill>
@@ -9533,7 +11103,7 @@
               </a:defRPr>
             </a:pPr>
             <a:r>
-              <a:t>• 1 initiale Abfrage lädt N Stammsätze (z.B. 50 Shops):</a:t>
+              <a:t>• 1 initiale Abfrage lädt N Stammsätze (z.B. 50 Standorte):</a:t>
             </a:r>
           </a:p>
           <a:p>
@@ -9541,7 +11111,7 @@
               <a:spcAft>
                 <a:spcPts val="600"/>
               </a:spcAft>
-              <a:defRPr sz="1100">
+              <a:defRPr sz="1150">
                 <a:solidFill>
                   <a:srgbClr val="0F172A"/>
                 </a:solidFill>
@@ -9557,7 +11127,7 @@
               <a:spcAft>
                 <a:spcPts val="600"/>
               </a:spcAft>
-              <a:defRPr sz="1100">
+              <a:defRPr sz="1150">
                 <a:solidFill>
                   <a:srgbClr val="0F172A"/>
                 </a:solidFill>
@@ -9565,7 +11135,7 @@
               </a:defRPr>
             </a:pPr>
             <a:r>
-              <a:t>• Beim Zugriff auf die verknüpfte Relation (z.B. shop.getVehicles()) feuert Hibernate für jeden einzelnen Shop ein separates SELECT:</a:t>
+              <a:t>• Bei Iteration über shop.getVehicles() feuert Hibernate für jeden einzelnen Shop ein separates SELECT:</a:t>
             </a:r>
           </a:p>
           <a:p>
@@ -9573,7 +11143,7 @@
               <a:spcAft>
                 <a:spcPts val="600"/>
               </a:spcAft>
-              <a:defRPr sz="1100">
+              <a:defRPr sz="1150">
                 <a:solidFill>
                   <a:srgbClr val="0F172A"/>
                 </a:solidFill>
@@ -9597,7 +11167,7 @@
               <a:spcAft>
                 <a:spcPts val="600"/>
               </a:spcAft>
-              <a:defRPr sz="1100">
+              <a:defRPr sz="1150">
                 <a:solidFill>
                   <a:srgbClr val="0F172A"/>
                 </a:solidFill>
@@ -9619,7 +11189,7 @@
         <p:spPr>
           <a:xfrm>
             <a:off x="6217920" y="1463040"/>
-            <a:ext cx="5212080" cy="4754880"/>
+            <a:ext cx="5212080" cy="4846320"/>
           </a:xfrm>
           <a:prstGeom prst="roundRect">
             <a:avLst/>
@@ -9664,7 +11234,7 @@
         <p:spPr>
           <a:xfrm>
             <a:off x="6400800" y="1645920"/>
-            <a:ext cx="4846320" cy="4389120"/>
+            <a:ext cx="4846320" cy="4480560"/>
           </a:xfrm>
           <a:prstGeom prst="rect">
             <a:avLst/>
@@ -9679,113 +11249,92 @@
           <a:p>
             <a:pPr>
               <a:spcAft>
+                <a:spcPts val="600"/>
+              </a:spcAft>
+              <a:defRPr sz="1400" b="1">
+                <a:solidFill>
+                  <a:srgbClr val="0D9488"/>
+                </a:solidFill>
+              </a:defRPr>
+            </a:pPr>
+            <a:r>
+              <a:t>Lösung &amp; Diagnose</a:t>
+            </a:r>
+          </a:p>
+          <a:p>
+            <a:pPr>
+              <a:defRPr b="1" sz="1200">
+                <a:solidFill>
+                  <a:srgbClr val="1E293B"/>
+                </a:solidFill>
+              </a:defRPr>
+            </a:pPr>
+            <a:r>
+              <a:t>1. JOIN FETCH Abfrage (1 einziger SQL-Join)</a:t>
+            </a:r>
+          </a:p>
+          <a:p>
+            <a:pPr>
+              <a:spcAft>
                 <a:spcPts val="800"/>
               </a:spcAft>
-              <a:defRPr sz="1400" b="1">
-                <a:solidFill>
-                  <a:srgbClr val="0D9488"/>
-                </a:solidFill>
-              </a:defRPr>
-            </a:pPr>
-            <a:r>
-              <a:t>Lösung &amp; Diagnose</a:t>
-            </a:r>
-          </a:p>
-          <a:p>
-            <a:pPr>
-              <a:spcAft>
-                <a:spcPts val="400"/>
-              </a:spcAft>
-              <a:defRPr sz="1200" b="1">
+              <a:defRPr sz="1050">
+                <a:solidFill>
+                  <a:srgbClr val="2563EB"/>
+                </a:solidFill>
+                <a:latin typeface="Consolas"/>
+              </a:defRPr>
+            </a:pPr>
+            <a:r>
+              <a:t>SELECT DISTINCT s FROM Shop s</a:t>
+            </a:r>
+            <a:br/>
+            <a:r>
+              <a:t>LEFT JOIN FETCH s.vehicles</a:t>
+            </a:r>
+          </a:p>
+          <a:p>
+            <a:pPr>
+              <a:defRPr b="1" sz="1200">
                 <a:solidFill>
                   <a:srgbClr val="1E293B"/>
                 </a:solidFill>
               </a:defRPr>
             </a:pPr>
             <a:r>
-              <a:t>1. JOIN FETCH Abfrage (1 einziger SQL-Join)</a:t>
-            </a:r>
-          </a:p>
-          <a:p>
-            <a:pPr>
-              <a:spcAft>
-                <a:spcPts val="1200"/>
-              </a:spcAft>
-              <a:defRPr sz="1100">
-                <a:solidFill>
-                  <a:srgbClr val="2563EB"/>
-                </a:solidFill>
-                <a:latin typeface="Courier New"/>
-              </a:defRPr>
-            </a:pPr>
-            <a:r>
-              <a:t>SELECT DISTINCT s FROM Shop s</a:t>
+              <a:t>2. Batch Fetching per @BatchSize</a:t>
+            </a:r>
+          </a:p>
+          <a:p>
+            <a:pPr>
+              <a:spcAft>
+                <a:spcPts val="800"/>
+              </a:spcAft>
+              <a:defRPr sz="1000">
+                <a:solidFill>
+                  <a:srgbClr val="334155"/>
+                </a:solidFill>
+                <a:latin typeface="Consolas"/>
+              </a:defRPr>
+            </a:pPr>
+            <a:r>
+              <a:t>@OneToMany(mappedBy = "shop")</a:t>
             </a:r>
             <a:br/>
             <a:r>
-              <a:t>LEFT JOIN FETCH s.vehicles</a:t>
-            </a:r>
-          </a:p>
-          <a:p>
-            <a:pPr>
-              <a:spcAft>
-                <a:spcPts val="400"/>
-              </a:spcAft>
-              <a:defRPr sz="1200" b="1">
-                <a:solidFill>
-                  <a:srgbClr val="1E293B"/>
-                </a:solidFill>
-              </a:defRPr>
-            </a:pPr>
-            <a:r>
-              <a:t>2. Batch Fetching per @BatchSize</a:t>
-            </a:r>
-          </a:p>
-          <a:p>
-            <a:pPr>
-              <a:spcAft>
-                <a:spcPts val="1200"/>
-              </a:spcAft>
-              <a:defRPr sz="1000">
-                <a:solidFill>
-                  <a:srgbClr val="334155"/>
-                </a:solidFill>
-                <a:latin typeface="Courier New"/>
-              </a:defRPr>
-            </a:pPr>
-            <a:r>
-              <a:t>@OneToMany(mappedBy = "shop")</a:t>
+              <a:t>@BatchSize(size = 25)</a:t>
             </a:r>
             <a:br/>
             <a:r>
-              <a:t>@BatchSize(size = 25)</a:t>
-            </a:r>
-            <a:br/>
-            <a:r>
               <a:t>private Set&lt;Vehicle&gt; vehicles;</a:t>
             </a:r>
           </a:p>
           <a:p>
             <a:pPr>
               <a:spcAft>
-                <a:spcPts val="400"/>
-              </a:spcAft>
-              <a:defRPr sz="1200" b="1">
-                <a:solidFill>
-                  <a:srgbClr val="1E293B"/>
-                </a:solidFill>
-              </a:defRPr>
-            </a:pPr>
-            <a:r>
-              <a:t>Diagnose-Tipp:</a:t>
-            </a:r>
-          </a:p>
-          <a:p>
-            <a:pPr>
-              <a:spcAft>
-                <a:spcPts val="400"/>
-              </a:spcAft>
-              <a:defRPr sz="1100">
+                <a:spcPts val="600"/>
+              </a:spcAft>
+              <a:defRPr sz="1150">
                 <a:solidFill>
                   <a:srgbClr val="0F172A"/>
                 </a:solidFill>
@@ -9793,23 +11342,7 @@
               </a:defRPr>
             </a:pPr>
             <a:r>
-              <a:t>• hibernate.show_sql=true im Test aktivieren.</a:t>
-            </a:r>
-          </a:p>
-          <a:p>
-            <a:pPr>
-              <a:spcAft>
-                <a:spcPts val="400"/>
-              </a:spcAft>
-              <a:defRPr sz="1100">
-                <a:solidFill>
-                  <a:srgbClr val="0F172A"/>
-                </a:solidFill>
-                <a:latin typeface="Segoe UI"/>
-              </a:defRPr>
-            </a:pPr>
-            <a:r>
-              <a:t>• Query-Count Assertions in Modultests einbauen.</a:t>
+              <a:t>• Diagnose: hibernate.show_sql=true und hibernate.generate_statistics=true aktivieren, um Statement-Zähler in Tests zu assertieren.</a:t>
             </a:r>
           </a:p>
         </p:txBody>
@@ -9900,7 +11433,7 @@
           <a:noFill/>
         </p:spPr>
         <p:txBody>
-          <a:bodyPr wrap="square">
+          <a:bodyPr wrap="square" lIns="0" rIns="0" tIns="0" bIns="0">
             <a:spAutoFit/>
           </a:bodyPr>
           <a:lstStyle/>
@@ -9914,7 +11447,7 @@
               </a:defRPr>
             </a:pPr>
             <a:r>
-              <a:t>TROUBLESHOOTING</a:t>
+              <a:t>TROUBLESHOOTING &amp; PERFORMANCE</a:t>
             </a:r>
           </a:p>
         </p:txBody>
@@ -9936,13 +11469,13 @@
           <a:noFill/>
         </p:spPr>
         <p:txBody>
-          <a:bodyPr wrap="square">
+          <a:bodyPr wrap="square" lIns="0" rIns="0" tIns="0" bIns="0">
             <a:spAutoFit/>
           </a:bodyPr>
           <a:lstStyle/>
           <a:p>
             <a:pPr>
-              <a:defRPr sz="2200" b="1">
+              <a:defRPr sz="2100" b="1">
                 <a:solidFill>
                   <a:srgbClr val="1E293B"/>
                 </a:solidFill>
@@ -9950,7 +11483,7 @@
               </a:defRPr>
             </a:pPr>
             <a:r>
-              <a:t>1.3 Optimistic Locking &amp; Concurrency</a:t>
+              <a:t>1.3 JPA Entity Graphs &amp; Dynamisches Fetching</a:t>
             </a:r>
           </a:p>
         </p:txBody>
@@ -9964,7 +11497,7 @@
         <p:spPr>
           <a:xfrm>
             <a:off x="731520" y="1463040"/>
-            <a:ext cx="5212080" cy="4754880"/>
+            <a:ext cx="5212080" cy="4846320"/>
           </a:xfrm>
           <a:prstGeom prst="roundRect">
             <a:avLst/>
@@ -10009,7 +11542,7 @@
         <p:spPr>
           <a:xfrm>
             <a:off x="914400" y="1645920"/>
-            <a:ext cx="4846320" cy="4389120"/>
+            <a:ext cx="4846320" cy="4480560"/>
           </a:xfrm>
           <a:prstGeom prst="rect">
             <a:avLst/>
@@ -10028,20 +11561,20 @@
               </a:spcAft>
               <a:defRPr sz="1400" b="1">
                 <a:solidFill>
-                  <a:srgbClr val="1E293B"/>
-                </a:solidFill>
-              </a:defRPr>
-            </a:pPr>
-            <a:r>
-              <a:t>Funktionsweise von @Version</a:t>
-            </a:r>
-          </a:p>
-          <a:p>
-            <a:pPr>
-              <a:spcAft>
-                <a:spcPts val="800"/>
-              </a:spcAft>
-              <a:defRPr sz="1200">
+                  <a:srgbClr val="2563EB"/>
+                </a:solidFill>
+              </a:defRPr>
+            </a:pPr>
+            <a:r>
+              <a:t>Warum Entity Graphs statt JOIN FETCH?</a:t>
+            </a:r>
+          </a:p>
+          <a:p>
+            <a:pPr>
+              <a:spcAft>
+                <a:spcPts val="500"/>
+              </a:spcAft>
+              <a:defRPr sz="1100">
                 <a:solidFill>
                   <a:srgbClr val="0F172A"/>
                 </a:solidFill>
@@ -10049,15 +11582,15 @@
               </a:defRPr>
             </a:pPr>
             <a:r>
-              <a:t>• @Version int version auf der Entity deklariert.</a:t>
-            </a:r>
-          </a:p>
-          <a:p>
-            <a:pPr>
-              <a:spcAft>
-                <a:spcPts val="800"/>
-              </a:spcAft>
-              <a:defRPr sz="1200">
+              <a:t>• Keine Query-Modifikation: JPQL bleibt einfach ('SELECT s FROM Shop s'), der Ladeplan wird dynamisch als Hint übergeben.</a:t>
+            </a:r>
+          </a:p>
+          <a:p>
+            <a:pPr>
+              <a:spcAft>
+                <a:spcPts val="500"/>
+              </a:spcAft>
+              <a:defRPr sz="1100">
                 <a:solidFill>
                   <a:srgbClr val="0F172A"/>
                 </a:solidFill>
@@ -10065,15 +11598,15 @@
               </a:defRPr>
             </a:pPr>
             <a:r>
-              <a:t>• Verhindert 'Lost Updates' ohne blockierende DB-Sperren.</a:t>
-            </a:r>
-          </a:p>
-          <a:p>
-            <a:pPr>
-              <a:spcAft>
-                <a:spcPts val="800"/>
-              </a:spcAft>
-              <a:defRPr sz="1200">
+              <a:t>• Vermeidung des kartesischen Produkts: Mehrere JOIN FETCH auf Collections erzeugen Duplikate und MultipleBagFetchExceptions.</a:t>
+            </a:r>
+          </a:p>
+          <a:p>
+            <a:pPr>
+              <a:spcAft>
+                <a:spcPts val="500"/>
+              </a:spcAft>
+              <a:defRPr sz="1100">
                 <a:solidFill>
                   <a:srgbClr val="0F172A"/>
                 </a:solidFill>
@@ -10081,15 +11614,15 @@
               </a:defRPr>
             </a:pPr>
             <a:r>
-              <a:t>• Jeder UPDATE prüft und inkrementiert die Version:</a:t>
-            </a:r>
-          </a:p>
-          <a:p>
-            <a:pPr>
-              <a:spcAft>
-                <a:spcPts val="800"/>
-              </a:spcAft>
-              <a:defRPr sz="1200">
+              <a:t>• Sauberes Entity-Mapping: Das Basis-Mapping bleibt durchgängig auf FetchType.LAZY.</a:t>
+            </a:r>
+          </a:p>
+          <a:p>
+            <a:pPr>
+              <a:spcAft>
+                <a:spcPts val="500"/>
+              </a:spcAft>
+              <a:defRPr sz="1100">
                 <a:solidFill>
                   <a:srgbClr val="0F172A"/>
                 </a:solidFill>
@@ -10097,15 +11630,15 @@
               </a:defRPr>
             </a:pPr>
             <a:r>
-              <a:t>• UPDATE VEHICLE SET PRICE=?, VERSION=2 WHERE ID=? AND VERSION=1</a:t>
-            </a:r>
-          </a:p>
-          <a:p>
-            <a:pPr>
-              <a:spcAft>
-                <a:spcPts val="800"/>
-              </a:spcAft>
-              <a:defRPr sz="1200">
+              <a:t>• Zwei Modi als Query-Hint:</a:t>
+            </a:r>
+          </a:p>
+          <a:p>
+            <a:pPr>
+              <a:spcAft>
+                <a:spcPts val="500"/>
+              </a:spcAft>
+              <a:defRPr sz="1100">
                 <a:solidFill>
                   <a:srgbClr val="0F172A"/>
                 </a:solidFill>
@@ -10113,7 +11646,31 @@
               </a:defRPr>
             </a:pPr>
             <a:r>
-              <a:t>• Wurden 0 Zeilen verändert (weil ein anderer User schneller war), wirft JPA OptimisticLockException.</a:t>
+              <a:t>•   • jakarta.persistence.fetchgraph:</a:t>
+            </a:r>
+            <a:br/>
+            <a:r>
+              <a:t>    Alle gelisteten Attribute = EAGER, alle anderen = LAZY (überschreibt statisches Mapping strikt).</a:t>
+            </a:r>
+          </a:p>
+          <a:p>
+            <a:pPr>
+              <a:spcAft>
+                <a:spcPts val="500"/>
+              </a:spcAft>
+              <a:defRPr sz="1100">
+                <a:solidFill>
+                  <a:srgbClr val="0F172A"/>
+                </a:solidFill>
+                <a:latin typeface="Segoe UI"/>
+              </a:defRPr>
+            </a:pPr>
+            <a:r>
+              <a:t>•   • jakarta.persistence.loadgraph:</a:t>
+            </a:r>
+            <a:br/>
+            <a:r>
+              <a:t>    Alle gelisteten Attribute = EAGER, alle anderen behalten ihr Mapping (statisches EAGER bleibt EAGER).</a:t>
             </a:r>
           </a:p>
         </p:txBody>
@@ -10127,17 +11684,17 @@
         <p:spPr>
           <a:xfrm>
             <a:off x="6217920" y="1463040"/>
-            <a:ext cx="5212080" cy="4754880"/>
+            <a:ext cx="5212080" cy="4846320"/>
           </a:xfrm>
           <a:prstGeom prst="roundRect">
             <a:avLst/>
           </a:prstGeom>
           <a:solidFill>
-            <a:srgbClr val="FFFFFF"/>
+            <a:srgbClr val="F0FDF4"/>
           </a:solidFill>
           <a:ln w="19050">
             <a:solidFill>
-              <a:srgbClr val="E2E8F0"/>
+              <a:srgbClr val="BBF7D0"/>
             </a:solidFill>
           </a:ln>
         </p:spPr>
@@ -10172,7 +11729,7 @@
         <p:spPr>
           <a:xfrm>
             <a:off x="6400800" y="1645920"/>
-            <a:ext cx="4846320" cy="4389120"/>
+            <a:ext cx="4846320" cy="4480560"/>
           </a:xfrm>
           <a:prstGeom prst="rect">
             <a:avLst/>
@@ -10191,103 +11748,94 @@
               </a:spcAft>
               <a:defRPr sz="1400" b="1">
                 <a:solidFill>
-                  <a:srgbClr val="2563EB"/>
-                </a:solidFill>
-              </a:defRPr>
-            </a:pPr>
-            <a:r>
-              <a:t>Sauberes Concurrency-Handling im Code</a:t>
-            </a:r>
-          </a:p>
-          <a:p>
-            <a:pPr>
-              <a:spcAft>
-                <a:spcPts val="1200"/>
-              </a:spcAft>
-              <a:defRPr sz="1100">
+                  <a:srgbClr val="0D9488"/>
+                </a:solidFill>
+              </a:defRPr>
+            </a:pPr>
+            <a:r>
+              <a:t>Programmatische &amp; Deklarative Nutzung</a:t>
+            </a:r>
+          </a:p>
+          <a:p>
+            <a:pPr>
+              <a:spcAft>
+                <a:spcPts val="800"/>
+              </a:spcAft>
+              <a:defRPr sz="950">
                 <a:solidFill>
                   <a:srgbClr val="1E293B"/>
                 </a:solidFill>
-                <a:latin typeface="Courier New"/>
-              </a:defRPr>
-            </a:pPr>
-            <a:r>
-              <a:t>try {</a:t>
+                <a:latin typeface="Consolas"/>
+              </a:defRPr>
+            </a:pPr>
+            <a:r>
+              <a:t>// 1. Programmatischer EntityGraph</a:t>
             </a:r>
             <a:br/>
             <a:r>
-              <a:t>    em.flush();</a:t>
+              <a:t>EntityGraph&lt;Shop&gt; graph = em.createEntityGraph(Shop.class);</a:t>
             </a:r>
             <a:br/>
             <a:r>
-              <a:t>    em.getTransaction().commit();</a:t>
+              <a:t>graph.addAttributeNodes("carpool");</a:t>
             </a:r>
             <a:br/>
             <a:r>
-              <a:t>} catch (OptimisticLockException e) {</a:t>
+              <a:t>// Optional: Verschachtelter Subgraph</a:t>
             </a:r>
             <a:br/>
             <a:r>
-              <a:t>    em.getTransaction().rollback();</a:t>
+              <a:t>Subgraph&lt;Vehicle&gt; vehGraph = graph.addSubgraph("carpool");</a:t>
             </a:r>
             <a:br/>
             <a:r>
-              <a:t>    em.clear(); // Persistence Context bereinigen</a:t>
+              <a:t>vehGraph.addAttributeNodes("type");</a:t>
             </a:r>
             <a:br/>
-            <a:r>
-              <a:t>    // Retry-Muster oder fachliche Meldung</a:t>
-            </a:r>
             <a:br/>
             <a:r>
-              <a:t>}</a:t>
-            </a:r>
-          </a:p>
-          <a:p>
-            <a:pPr>
-              <a:spcAft>
-                <a:spcPts val="400"/>
-              </a:spcAft>
-              <a:defRPr sz="1200" b="1">
-                <a:solidFill>
-                  <a:srgbClr val="1E293B"/>
-                </a:solidFill>
-              </a:defRPr>
-            </a:pPr>
-            <a:r>
-              <a:t>Wichtige Praxishinweise:</a:t>
-            </a:r>
-          </a:p>
-          <a:p>
-            <a:pPr>
-              <a:spcAft>
-                <a:spcPts val="600"/>
-              </a:spcAft>
-              <a:defRPr sz="1100">
-                <a:solidFill>
-                  <a:srgbClr val="0F172A"/>
-                </a:solidFill>
-                <a:latin typeface="Segoe UI"/>
-              </a:defRPr>
-            </a:pPr>
-            <a:r>
-              <a:t>• Nach einer RollbackException / OptimisticLockException ist der EntityManager unbrauchbar -&gt; clear() oder neuen EntityManager öffnen.</a:t>
-            </a:r>
-          </a:p>
-          <a:p>
-            <a:pPr>
-              <a:spcAft>
-                <a:spcPts val="600"/>
-              </a:spcAft>
-              <a:defRPr sz="1100">
-                <a:solidFill>
-                  <a:srgbClr val="0F172A"/>
-                </a:solidFill>
-                <a:latin typeface="Segoe UI"/>
-              </a:defRPr>
-            </a:pPr>
-            <a:r>
-              <a:t>• Immer rollback() aufrufen, um Transaktions- und Lock-Zustände freizugeben (besonders bei Derby / H2).</a:t>
+              <a:t>List&lt;Shop&gt; shops = em.createQuery(</a:t>
+            </a:r>
+            <a:br/>
+            <a:r>
+              <a:t>    "SELECT s FROM Shop s", Shop.class)</a:t>
+            </a:r>
+            <a:br/>
+            <a:r>
+              <a:t>    .setHint("jakarta.persistence.fetchgraph", graph)</a:t>
+            </a:r>
+            <a:br/>
+            <a:r>
+              <a:t>    .getResultList();</a:t>
+            </a:r>
+            <a:br/>
+            <a:br/>
+            <a:r>
+              <a:t>// 2. Deklarativ an der Entity (@NamedEntityGraph)</a:t>
+            </a:r>
+            <a:br/>
+            <a:r>
+              <a:t>@NamedEntityGraph(</a:t>
+            </a:r>
+            <a:br/>
+            <a:r>
+              <a:t>    name = "Shop.withCarpool",</a:t>
+            </a:r>
+            <a:br/>
+            <a:r>
+              <a:t>    attributeNodes = @NamedAttributeNode("carpool")</a:t>
+            </a:r>
+            <a:br/>
+            <a:r>
+              <a:t>)</a:t>
+            </a:r>
+            <a:br/>
+            <a:r>
+              <a:t>@Entity</a:t>
+            </a:r>
+            <a:br/>
+            <a:r>
+              <a:t>public class Shop { ... }</a:t>
             </a:r>
           </a:p>
         </p:txBody>
@@ -10333,7 +11881,7 @@
             <a:avLst/>
           </a:prstGeom>
           <a:solidFill>
-            <a:srgbClr val="2563EB"/>
+            <a:srgbClr val="D97706"/>
           </a:solidFill>
           <a:ln>
             <a:noFill/>
@@ -10378,7 +11926,7 @@
           <a:noFill/>
         </p:spPr>
         <p:txBody>
-          <a:bodyPr wrap="square">
+          <a:bodyPr wrap="square" lIns="0" rIns="0" tIns="0" bIns="0">
             <a:spAutoFit/>
           </a:bodyPr>
           <a:lstStyle/>
@@ -10386,13 +11934,13 @@
             <a:pPr>
               <a:defRPr sz="1100" b="1">
                 <a:solidFill>
-                  <a:srgbClr val="2563EB"/>
-                </a:solidFill>
-                <a:latin typeface="Segoe UI"/>
-              </a:defRPr>
-            </a:pPr>
-            <a:r>
-              <a:t>TROUBLESHOOTING</a:t>
+                  <a:srgbClr val="D97706"/>
+                </a:solidFill>
+                <a:latin typeface="Segoe UI"/>
+              </a:defRPr>
+            </a:pPr>
+            <a:r>
+              <a:t>TROUBLESHOOTING &amp; CONCURRENCY</a:t>
             </a:r>
           </a:p>
         </p:txBody>
@@ -10414,13 +11962,13 @@
           <a:noFill/>
         </p:spPr>
         <p:txBody>
-          <a:bodyPr wrap="square">
+          <a:bodyPr wrap="square" lIns="0" rIns="0" tIns="0" bIns="0">
             <a:spAutoFit/>
           </a:bodyPr>
           <a:lstStyle/>
           <a:p>
             <a:pPr>
-              <a:defRPr sz="2200" b="1">
+              <a:defRPr sz="2100" b="1">
                 <a:solidFill>
                   <a:srgbClr val="1E293B"/>
                 </a:solidFill>
@@ -10428,7 +11976,7 @@
               </a:defRPr>
             </a:pPr>
             <a:r>
-              <a:t>1.4 Transiente vs. Detached Entity Fehler</a:t>
+              <a:t>1.4 OptimisticLockException &amp; @Version</a:t>
             </a:r>
           </a:p>
         </p:txBody>
@@ -10442,7 +11990,7 @@
         <p:spPr>
           <a:xfrm>
             <a:off x="731520" y="1463040"/>
-            <a:ext cx="5212080" cy="4754880"/>
+            <a:ext cx="5212080" cy="4846320"/>
           </a:xfrm>
           <a:prstGeom prst="roundRect">
             <a:avLst/>
@@ -10487,7 +12035,7 @@
         <p:spPr>
           <a:xfrm>
             <a:off x="914400" y="1645920"/>
-            <a:ext cx="4846320" cy="4389120"/>
+            <a:ext cx="4846320" cy="4480560"/>
           </a:xfrm>
           <a:prstGeom prst="rect">
             <a:avLst/>
@@ -10506,76 +12054,108 @@
               </a:spcAft>
               <a:defRPr sz="1400" b="1">
                 <a:solidFill>
-                  <a:srgbClr val="DC2626"/>
-                </a:solidFill>
-              </a:defRPr>
-            </a:pPr>
-            <a:r>
-              <a:t>TransientPropertyValueException</a:t>
-            </a:r>
-          </a:p>
-          <a:p>
-            <a:pPr>
-              <a:spcAft>
-                <a:spcPts val="1000"/>
+                  <a:srgbClr val="D97706"/>
+                </a:solidFill>
+              </a:defRPr>
+            </a:pPr>
+            <a:r>
+              <a:t>Lost Updates &amp; Concurrency-Konflikte</a:t>
+            </a:r>
+          </a:p>
+          <a:p>
+            <a:pPr>
+              <a:spcAft>
+                <a:spcPts val="600"/>
+              </a:spcAft>
+              <a:defRPr sz="1150">
+                <a:solidFill>
+                  <a:srgbClr val="0F172A"/>
+                </a:solidFill>
+                <a:latin typeface="Segoe UI"/>
+              </a:defRPr>
+            </a:pPr>
+            <a:r>
+              <a:t>• Ohne Versionierung überschreibt die zuletzt committende Transaktion alle vorherigen Änderungen unbemerkt (Lost Update).</a:t>
+            </a:r>
+          </a:p>
+          <a:p>
+            <a:pPr>
+              <a:spcAft>
+                <a:spcPts val="600"/>
+              </a:spcAft>
+              <a:defRPr sz="1150">
+                <a:solidFill>
+                  <a:srgbClr val="0F172A"/>
+                </a:solidFill>
+                <a:latin typeface="Segoe UI"/>
+              </a:defRPr>
+            </a:pPr>
+            <a:r>
+              <a:t>• Lösung mit @Version: Hibernate prüft bei jedem UPDATE die Versionsnummer:</a:t>
+            </a:r>
+          </a:p>
+          <a:p>
+            <a:pPr>
+              <a:spcAft>
+                <a:spcPts val="600"/>
+              </a:spcAft>
+              <a:defRPr sz="1150">
+                <a:solidFill>
+                  <a:srgbClr val="0F172A"/>
+                </a:solidFill>
+                <a:latin typeface="Segoe UI"/>
+              </a:defRPr>
+            </a:pPr>
+            <a:r>
+              <a:t>• UPDATE VEHICLE SET ..., VERSION = 2 WHERE ID = 1 AND VERSION = 1</a:t>
+            </a:r>
+          </a:p>
+          <a:p>
+            <a:pPr>
+              <a:spcAft>
+                <a:spcPts val="600"/>
+              </a:spcAft>
+              <a:defRPr sz="1150">
+                <a:solidFill>
+                  <a:srgbClr val="0F172A"/>
+                </a:solidFill>
+                <a:latin typeface="Segoe UI"/>
+              </a:defRPr>
+            </a:pPr>
+            <a:r>
+              <a:t>• Wurde die Zeile zwischenzeitlich verändert, liefert die DB 0 betroffene Zeilen -&gt; Hibernate wirft jakarta.persistence.OptimisticLockException.</a:t>
+            </a:r>
+          </a:p>
+          <a:p>
+            <a:pPr>
+              <a:spcAft>
+                <a:spcPts val="800"/>
               </a:spcAft>
               <a:defRPr sz="1000">
                 <a:solidFill>
-                  <a:srgbClr val="1E293B"/>
-                </a:solidFill>
-                <a:latin typeface="Courier New"/>
-              </a:defRPr>
-            </a:pPr>
-            <a:r>
-              <a:t>object references an unsaved transient instance - save the transient instance before flushing</a:t>
-            </a:r>
-          </a:p>
-          <a:p>
-            <a:pPr>
-              <a:spcAft>
-                <a:spcPts val="800"/>
-              </a:spcAft>
-              <a:defRPr sz="1200">
-                <a:solidFill>
-                  <a:srgbClr val="0F172A"/>
-                </a:solidFill>
-                <a:latin typeface="Segoe UI"/>
-              </a:defRPr>
-            </a:pPr>
-            <a:r>
-              <a:t>• Ursache: Eine gemanagte Entity verweist auf ein neues (transientes) Objekt, das noch keine DB-ID hat und nicht im Context registriert ist.</a:t>
-            </a:r>
-          </a:p>
-          <a:p>
-            <a:pPr>
-              <a:spcAft>
-                <a:spcPts val="800"/>
-              </a:spcAft>
-              <a:defRPr sz="1200">
-                <a:solidFill>
-                  <a:srgbClr val="0F172A"/>
-                </a:solidFill>
-                <a:latin typeface="Segoe UI"/>
-              </a:defRPr>
-            </a:pPr>
-            <a:r>
-              <a:t>• Lösung A: Kind-Objekt vor dem Commit manuell speichern: em.persist(child);</a:t>
-            </a:r>
-          </a:p>
-          <a:p>
-            <a:pPr>
-              <a:spcAft>
-                <a:spcPts val="800"/>
-              </a:spcAft>
-              <a:defRPr sz="1200">
-                <a:solidFill>
-                  <a:srgbClr val="0F172A"/>
-                </a:solidFill>
-                <a:latin typeface="Segoe UI"/>
-              </a:defRPr>
-            </a:pPr>
-            <a:r>
-              <a:t>• Lösung B: Kaskadierung deklarieren: cascade = {CascadeType.PERSIST, CascadeType.MERGE}</a:t>
+                  <a:srgbClr val="334155"/>
+                </a:solidFill>
+                <a:latin typeface="Consolas"/>
+              </a:defRPr>
+            </a:pPr>
+            <a:r>
+              <a:t>@Entity</a:t>
+            </a:r>
+            <a:br/>
+            <a:r>
+              <a:t>public class Vehicle {</a:t>
+            </a:r>
+            <a:br/>
+            <a:r>
+              <a:t>    @Id @GeneratedValue private Long id;</a:t>
+            </a:r>
+            <a:br/>
+            <a:r>
+              <a:t>    @Version private Long version; // Optimistic Lock</a:t>
+            </a:r>
+            <a:br/>
+            <a:r>
+              <a:t>}</a:t>
             </a:r>
           </a:p>
         </p:txBody>
@@ -10589,17 +12169,17 @@
         <p:spPr>
           <a:xfrm>
             <a:off x="6217920" y="1463040"/>
-            <a:ext cx="5212080" cy="4754880"/>
+            <a:ext cx="5212080" cy="4846320"/>
           </a:xfrm>
           <a:prstGeom prst="roundRect">
             <a:avLst/>
           </a:prstGeom>
           <a:solidFill>
-            <a:srgbClr val="FFFFFF"/>
+            <a:srgbClr val="F0FDF4"/>
           </a:solidFill>
           <a:ln w="19050">
             <a:solidFill>
-              <a:srgbClr val="E2E8F0"/>
+              <a:srgbClr val="BBF7D0"/>
             </a:solidFill>
           </a:ln>
         </p:spPr>
@@ -10634,7 +12214,7 @@
         <p:spPr>
           <a:xfrm>
             <a:off x="6400800" y="1645920"/>
-            <a:ext cx="4846320" cy="4389120"/>
+            <a:ext cx="4846320" cy="4480560"/>
           </a:xfrm>
           <a:prstGeom prst="rect">
             <a:avLst/>
@@ -10653,92 +12233,108 @@
               </a:spcAft>
               <a:defRPr sz="1400" b="1">
                 <a:solidFill>
-                  <a:srgbClr val="DC2626"/>
-                </a:solidFill>
-              </a:defRPr>
-            </a:pPr>
-            <a:r>
-              <a:t>PersistentObjectException / EntityExistsException</a:t>
-            </a:r>
-          </a:p>
-          <a:p>
-            <a:pPr>
-              <a:spcAft>
-                <a:spcPts val="1000"/>
+                  <a:srgbClr val="0D9488"/>
+                </a:solidFill>
+              </a:defRPr>
+            </a:pPr>
+            <a:r>
+              <a:t>Best Practices zur Ausnahmebehandlung</a:t>
+            </a:r>
+          </a:p>
+          <a:p>
+            <a:pPr>
+              <a:spcAft>
+                <a:spcPts val="600"/>
+              </a:spcAft>
+              <a:defRPr sz="1150">
+                <a:solidFill>
+                  <a:srgbClr val="0F172A"/>
+                </a:solidFill>
+                <a:latin typeface="Segoe UI"/>
+              </a:defRPr>
+            </a:pPr>
+            <a:r>
+              <a:t>• 1. Transaktion sofort rollbacken: Nach einer OptimisticLockException ist der Persistence Context ungültig.</a:t>
+            </a:r>
+          </a:p>
+          <a:p>
+            <a:pPr>
+              <a:spcAft>
+                <a:spcPts val="600"/>
+              </a:spcAft>
+              <a:defRPr sz="1150">
+                <a:solidFill>
+                  <a:srgbClr val="0F172A"/>
+                </a:solidFill>
+                <a:latin typeface="Segoe UI"/>
+              </a:defRPr>
+            </a:pPr>
+            <a:r>
+              <a:t>• 2. Retry-Strategie im Service-Layer: Transaktion neu starten, frische Entity aus der DB laden und Änderung erneut anwenden.</a:t>
+            </a:r>
+          </a:p>
+          <a:p>
+            <a:pPr>
+              <a:spcAft>
+                <a:spcPts val="600"/>
+              </a:spcAft>
+              <a:defRPr sz="1150">
+                <a:solidFill>
+                  <a:srgbClr val="0F172A"/>
+                </a:solidFill>
+                <a:latin typeface="Segoe UI"/>
+              </a:defRPr>
+            </a:pPr>
+            <a:r>
+              <a:t>• 3. Konfliktanzeige für Endanwender: Den Benutzer informieren, dass der Datensatz parallel modifiziert wurde.</a:t>
+            </a:r>
+          </a:p>
+          <a:p>
+            <a:pPr>
+              <a:spcAft>
+                <a:spcPts val="800"/>
               </a:spcAft>
               <a:defRPr sz="1000">
                 <a:solidFill>
                   <a:srgbClr val="1E293B"/>
                 </a:solidFill>
-                <a:latin typeface="Courier New"/>
-              </a:defRPr>
-            </a:pPr>
-            <a:r>
-              <a:t>detached entity passed to persist / EntityExistsException</a:t>
-            </a:r>
-          </a:p>
-          <a:p>
-            <a:pPr>
-              <a:spcAft>
-                <a:spcPts val="800"/>
-              </a:spcAft>
-              <a:defRPr sz="1200">
-                <a:solidFill>
-                  <a:srgbClr val="0F172A"/>
-                </a:solidFill>
-                <a:latin typeface="Segoe UI"/>
-              </a:defRPr>
-            </a:pPr>
-            <a:r>
-              <a:t>• Ursache: Aufruf von em.persist(entity) auf einem Objekt, das bereits eine ID besitzt oder aus einem vorherigen Session-Kontext stammt (Detached).</a:t>
-            </a:r>
-          </a:p>
-          <a:p>
-            <a:pPr>
-              <a:spcAft>
-                <a:spcPts val="800"/>
-              </a:spcAft>
-              <a:defRPr sz="1200">
-                <a:solidFill>
-                  <a:srgbClr val="0F172A"/>
-                </a:solidFill>
-                <a:latin typeface="Segoe UI"/>
-              </a:defRPr>
-            </a:pPr>
-            <a:r>
-              <a:t>• Lösung: Verwende em.merge(entity) statt persist().</a:t>
-            </a:r>
-          </a:p>
-          <a:p>
-            <a:pPr>
-              <a:spcAft>
-                <a:spcPts val="800"/>
-              </a:spcAft>
-              <a:defRPr sz="1200">
-                <a:solidFill>
-                  <a:srgbClr val="0F172A"/>
-                </a:solidFill>
-                <a:latin typeface="Segoe UI"/>
-              </a:defRPr>
-            </a:pPr>
-            <a:r>
-              <a:t>• Wichtig: em.merge(detached) gibt eine NEUE gemanagte Instanz zurück! Das Originalobjekt bleibt detached:</a:t>
-            </a:r>
-          </a:p>
-          <a:p>
-            <a:pPr>
-              <a:spcAft>
-                <a:spcPts val="800"/>
-              </a:spcAft>
-              <a:defRPr sz="1200">
-                <a:solidFill>
-                  <a:srgbClr val="0F172A"/>
-                </a:solidFill>
-                <a:latin typeface="Segoe UI"/>
-              </a:defRPr>
-            </a:pPr>
-            <a:r>
-              <a:t>• Vehicle managed = em.merge(detachedVehicle);</a:t>
+                <a:latin typeface="Consolas"/>
+              </a:defRPr>
+            </a:pPr>
+            <a:r>
+              <a:t>try {</a:t>
+            </a:r>
+            <a:br/>
+            <a:r>
+              <a:t>    tx.commit();</a:t>
+            </a:r>
+            <a:br/>
+            <a:r>
+              <a:t>} catch (RollbackException e) {</a:t>
+            </a:r>
+            <a:br/>
+            <a:r>
+              <a:t>    if (e.getCause() instanceof OptimisticLockException) {</a:t>
+            </a:r>
+            <a:br/>
+            <a:r>
+              <a:t>        // Rollback ausführen, neu laden &amp; ggf. wiederholen</a:t>
+            </a:r>
+            <a:br/>
+            <a:r>
+              <a:t>        tx.rollback();</a:t>
+            </a:r>
+            <a:br/>
+            <a:r>
+              <a:t>        throw new ConcurrentModificationException("Datensatz wurde geändert!");</a:t>
+            </a:r>
+            <a:br/>
+            <a:r>
+              <a:t>    }</a:t>
+            </a:r>
+            <a:br/>
+            <a:r>
+              <a:t>}</a:t>
             </a:r>
           </a:p>
         </p:txBody>
@@ -10784,7 +12380,7 @@
             <a:avLst/>
           </a:prstGeom>
           <a:solidFill>
-            <a:srgbClr val="2563EB"/>
+            <a:srgbClr val="D97706"/>
           </a:solidFill>
           <a:ln>
             <a:noFill/>
@@ -10829,7 +12425,7 @@
           <a:noFill/>
         </p:spPr>
         <p:txBody>
-          <a:bodyPr wrap="square">
+          <a:bodyPr wrap="square" lIns="0" rIns="0" tIns="0" bIns="0">
             <a:spAutoFit/>
           </a:bodyPr>
           <a:lstStyle/>
@@ -10837,13 +12433,13 @@
             <a:pPr>
               <a:defRPr sz="1100" b="1">
                 <a:solidFill>
-                  <a:srgbClr val="2563EB"/>
-                </a:solidFill>
-                <a:latin typeface="Segoe UI"/>
-              </a:defRPr>
-            </a:pPr>
-            <a:r>
-              <a:t>TROUBLESHOOTING</a:t>
+                  <a:srgbClr val="D97706"/>
+                </a:solidFill>
+                <a:latin typeface="Segoe UI"/>
+              </a:defRPr>
+            </a:pPr>
+            <a:r>
+              <a:t>TROUBLESHOOTING &amp; CONCURRENCY</a:t>
             </a:r>
           </a:p>
         </p:txBody>
@@ -10865,13 +12461,13 @@
           <a:noFill/>
         </p:spPr>
         <p:txBody>
-          <a:bodyPr wrap="square">
+          <a:bodyPr wrap="square" lIns="0" rIns="0" tIns="0" bIns="0">
             <a:spAutoFit/>
           </a:bodyPr>
           <a:lstStyle/>
           <a:p>
             <a:pPr>
-              <a:defRPr sz="2200" b="1">
+              <a:defRPr sz="2100" b="1">
                 <a:solidFill>
                   <a:srgbClr val="1E293B"/>
                 </a:solidFill>
@@ -10879,7 +12475,7 @@
               </a:defRPr>
             </a:pPr>
             <a:r>
-              <a:t>1.5 ConstraintViolationException (Bean Validation)</a:t>
+              <a:t>1.5 Concurrency: Pessimistisches Locking</a:t>
             </a:r>
           </a:p>
         </p:txBody>
@@ -10893,7 +12489,7 @@
         <p:spPr>
           <a:xfrm>
             <a:off x="731520" y="1463040"/>
-            <a:ext cx="5212080" cy="4754880"/>
+            <a:ext cx="5212080" cy="4846320"/>
           </a:xfrm>
           <a:prstGeom prst="roundRect">
             <a:avLst/>
@@ -10938,7 +12534,7 @@
         <p:spPr>
           <a:xfrm>
             <a:off x="914400" y="1645920"/>
-            <a:ext cx="4846320" cy="4389120"/>
+            <a:ext cx="4846320" cy="4480560"/>
           </a:xfrm>
           <a:prstGeom prst="rect">
             <a:avLst/>
@@ -10957,36 +12553,20 @@
               </a:spcAft>
               <a:defRPr sz="1400" b="1">
                 <a:solidFill>
-                  <a:srgbClr val="DC2626"/>
-                </a:solidFill>
-              </a:defRPr>
-            </a:pPr>
-            <a:r>
-              <a:t>Symptom &amp; Validierungszeitpunkte</a:t>
-            </a:r>
-          </a:p>
-          <a:p>
-            <a:pPr>
-              <a:spcAft>
-                <a:spcPts val="1200"/>
-              </a:spcAft>
-              <a:defRPr sz="1000">
-                <a:solidFill>
-                  <a:srgbClr val="1E293B"/>
-                </a:solidFill>
-                <a:latin typeface="Courier New"/>
-              </a:defRPr>
-            </a:pPr>
-            <a:r>
-              <a:t>jakarta.validation.ConstraintViolationException: Validation failed for classes [net.rentacar.model.ValidatedVehicle] during persist time</a:t>
-            </a:r>
-          </a:p>
-          <a:p>
-            <a:pPr>
-              <a:spcAft>
-                <a:spcPts val="800"/>
-              </a:spcAft>
-              <a:defRPr sz="1200">
+                  <a:srgbClr val="D97706"/>
+                </a:solidFill>
+              </a:defRPr>
+            </a:pPr>
+            <a:r>
+              <a:t>Wann Optimistic Locking nicht reicht</a:t>
+            </a:r>
+          </a:p>
+          <a:p>
+            <a:pPr>
+              <a:spcAft>
+                <a:spcPts val="500"/>
+              </a:spcAft>
+              <a:defRPr sz="1100">
                 <a:solidFill>
                   <a:srgbClr val="0F172A"/>
                 </a:solidFill>
@@ -10994,15 +12574,15 @@
               </a:defRPr>
             </a:pPr>
             <a:r>
-              <a:t>• Hibernate integriert Bean Validation (Jakarta Validation) standardmäßig automatisch.</a:t>
-            </a:r>
-          </a:p>
-          <a:p>
-            <a:pPr>
-              <a:spcAft>
-                <a:spcPts val="800"/>
-              </a:spcAft>
-              <a:defRPr sz="1200">
+              <a:t>• Hohe Schreibkollisionsrate: Wenn dutzende Benutzer gleichzeitig denselben Datensatz ändern (z.B. Ticketkontingent, Fahrzeugreservierung, Kontostand).</a:t>
+            </a:r>
+          </a:p>
+          <a:p>
+            <a:pPr>
+              <a:spcAft>
+                <a:spcPts val="500"/>
+              </a:spcAft>
+              <a:defRPr sz="1100">
                 <a:solidFill>
                   <a:srgbClr val="0F172A"/>
                 </a:solidFill>
@@ -11010,15 +12590,15 @@
               </a:defRPr>
             </a:pPr>
             <a:r>
-              <a:t>• Validierung greift bei Pre-Persist und Pre-Update (beim flush() oder commit()).</a:t>
-            </a:r>
-          </a:p>
-          <a:p>
-            <a:pPr>
-              <a:spcAft>
-                <a:spcPts val="800"/>
-              </a:spcAft>
-              <a:defRPr sz="1200">
+              <a:t>• Optimistic Locking führt hier zu ständigen Rollbacks und teuren Retries.</a:t>
+            </a:r>
+          </a:p>
+          <a:p>
+            <a:pPr>
+              <a:spcAft>
+                <a:spcPts val="500"/>
+              </a:spcAft>
+              <a:defRPr sz="1100">
                 <a:solidFill>
                   <a:srgbClr val="0F172A"/>
                 </a:solidFill>
@@ -11026,15 +12606,15 @@
               </a:defRPr>
             </a:pPr>
             <a:r>
-              <a:t>• Beim Transaktions-Commit wird die ConstraintViolationException meist in eine RollbackException eingepackt.</a:t>
-            </a:r>
-          </a:p>
-          <a:p>
-            <a:pPr>
-              <a:spcAft>
-                <a:spcPts val="800"/>
-              </a:spcAft>
-              <a:defRPr sz="1200">
+              <a:t>• Lösung: Pessimistic Locking (SELECT ... FOR UPDATE). Sperrt die Zeile physisch auf Datenbankebene gegen parallele Modifikationen.</a:t>
+            </a:r>
+          </a:p>
+          <a:p>
+            <a:pPr>
+              <a:spcAft>
+                <a:spcPts val="500"/>
+              </a:spcAft>
+              <a:defRPr sz="1100">
                 <a:solidFill>
                   <a:srgbClr val="0F172A"/>
                 </a:solidFill>
@@ -11042,7 +12622,39 @@
               </a:defRPr>
             </a:pPr>
             <a:r>
-              <a:t>• DDL-Integration: @NotNull erzeugt automatisch NOT NULL, @Size(max=50) erzeugt VARCHAR(50).</a:t>
+              <a:t>• Modi:</a:t>
+            </a:r>
+          </a:p>
+          <a:p>
+            <a:pPr>
+              <a:spcAft>
+                <a:spcPts val="500"/>
+              </a:spcAft>
+              <a:defRPr sz="1100">
+                <a:solidFill>
+                  <a:srgbClr val="0F172A"/>
+                </a:solidFill>
+                <a:latin typeface="Segoe UI"/>
+              </a:defRPr>
+            </a:pPr>
+            <a:r>
+              <a:t>•   • PESSIMISTIC_WRITE: Exklusiver Schreib-Lock (verhindert Read &amp; Write anderer Locks).</a:t>
+            </a:r>
+          </a:p>
+          <a:p>
+            <a:pPr>
+              <a:spcAft>
+                <a:spcPts val="500"/>
+              </a:spcAft>
+              <a:defRPr sz="1100">
+                <a:solidFill>
+                  <a:srgbClr val="0F172A"/>
+                </a:solidFill>
+                <a:latin typeface="Segoe UI"/>
+              </a:defRPr>
+            </a:pPr>
+            <a:r>
+              <a:t>•   • PESSIMISTIC_READ: Shared Read-Lock (verhindert gleichzeitige Modifikationen).</a:t>
             </a:r>
           </a:p>
         </p:txBody>
@@ -11056,17 +12668,17 @@
         <p:spPr>
           <a:xfrm>
             <a:off x="6217920" y="1463040"/>
-            <a:ext cx="5212080" cy="4754880"/>
+            <a:ext cx="5212080" cy="4846320"/>
           </a:xfrm>
           <a:prstGeom prst="roundRect">
             <a:avLst/>
           </a:prstGeom>
           <a:solidFill>
-            <a:srgbClr val="FFFFFF"/>
+            <a:srgbClr val="F0FDF4"/>
           </a:solidFill>
           <a:ln w="19050">
             <a:solidFill>
-              <a:srgbClr val="E2E8F0"/>
+              <a:srgbClr val="BBF7D0"/>
             </a:solidFill>
           </a:ln>
         </p:spPr>
@@ -11101,7 +12713,7 @@
         <p:spPr>
           <a:xfrm>
             <a:off x="6400800" y="1645920"/>
-            <a:ext cx="4846320" cy="4389120"/>
+            <a:ext cx="4846320" cy="4480560"/>
           </a:xfrm>
           <a:prstGeom prst="rect">
             <a:avLst/>
@@ -11120,83 +12732,90 @@
               </a:spcAft>
               <a:defRPr sz="1400" b="1">
                 <a:solidFill>
-                  <a:srgbClr val="2563EB"/>
-                </a:solidFill>
-              </a:defRPr>
-            </a:pPr>
-            <a:r>
-              <a:t>Typische Annotationen &amp; Exception Handling</a:t>
-            </a:r>
-          </a:p>
-          <a:p>
-            <a:pPr>
-              <a:defRPr sz="1000">
+                  <a:srgbClr val="0D9488"/>
+                </a:solidFill>
+              </a:defRPr>
+            </a:pPr>
+            <a:r>
+              <a:t>Code-Muster &amp; Lock-Timeouts</a:t>
+            </a:r>
+          </a:p>
+          <a:p>
+            <a:pPr>
+              <a:spcAft>
+                <a:spcPts val="800"/>
+              </a:spcAft>
+              <a:defRPr sz="950">
                 <a:solidFill>
                   <a:srgbClr val="1E293B"/>
                 </a:solidFill>
-                <a:latin typeface="Courier New"/>
-              </a:defRPr>
-            </a:pPr>
-            <a:r>
-              <a:t>@Entity</a:t>
+                <a:latin typeface="Consolas"/>
+              </a:defRPr>
+            </a:pPr>
+            <a:r>
+              <a:t>// 1. Beim Laden direkt sperren (SELECT ... FOR UPDATE)</a:t>
             </a:r>
             <a:br/>
             <a:r>
-              <a:t>public class ValidatedVehicle {</a:t>
+              <a:t>PessimisticVehicle v = em.find(</a:t>
             </a:r>
             <a:br/>
             <a:r>
-              <a:t>    @NotBlank(message = "Brand darf nicht leer sein")</a:t>
+              <a:t>    PessimisticVehicle.class, 1L,</a:t>
             </a:r>
             <a:br/>
             <a:r>
-              <a:t>    private String brand;</a:t>
+              <a:t>    LockModeType.PESSIMISTIC_WRITE);</a:t>
             </a:r>
             <a:br/>
             <a:br/>
             <a:r>
-              <a:t>    @Min(value = 0, message = "Preis darf nicht negativ sein")</a:t>
+              <a:t>// 2. Nachträglich in bestehender Entity sperren</a:t>
             </a:r>
             <a:br/>
             <a:r>
-              <a:t>    private double price;</a:t>
-            </a:r>
-            <a:br/>
-            <a:r>
-              <a:t>}</a:t>
+              <a:t>em.lock(v, LockModeType.PESSIMISTIC_WRITE);</a:t>
             </a:r>
             <a:br/>
             <a:br/>
             <a:r>
-              <a:t>// Test / Service Handling:</a:t>
+              <a:t>// 3. Lock-Timeout konfigurieren (z.B. 3 Sekunden)</a:t>
             </a:r>
             <a:br/>
             <a:r>
-              <a:t>try {</a:t>
+              <a:t>TypedQuery&lt;PessimisticVehicle&gt; query = em.createQuery(</a:t>
             </a:r>
             <a:br/>
             <a:r>
-              <a:t>    em.flush();</a:t>
+              <a:t>    "SELECT v FROM PessimisticVehicle v WHERE v.reserved = false",</a:t>
             </a:r>
             <a:br/>
             <a:r>
-              <a:t>} catch (ConstraintViolationException ex) {</a:t>
+              <a:t>    PessimisticVehicle.class)</a:t>
             </a:r>
             <a:br/>
             <a:r>
-              <a:t>    Set&lt;ConstraintViolation&lt;?&gt;&gt; violations = </a:t>
+              <a:t>    .setLockMode(LockModeType.PESSIMISTIC_WRITE)</a:t>
             </a:r>
             <a:br/>
             <a:r>
-              <a:t>        ex.getConstraintViolations();</a:t>
-            </a:r>
-            <a:br/>
-            <a:r>
-              <a:t>    // Detaillierte Fehlermeldungen auswerten</a:t>
-            </a:r>
-            <a:br/>
-            <a:r>
-              <a:t>}</a:t>
+              <a:t>    .setHint("jakarta.persistence.lock.timeout", 3000);</a:t>
+            </a:r>
+          </a:p>
+          <a:p>
+            <a:pPr>
+              <a:spcAft>
+                <a:spcPts val="400"/>
+              </a:spcAft>
+              <a:defRPr sz="1100">
+                <a:solidFill>
+                  <a:srgbClr val="0F172A"/>
+                </a:solidFill>
+                <a:latin typeface="Segoe UI"/>
+              </a:defRPr>
+            </a:pPr>
+            <a:r>
+              <a:t>• Wichtig: Transaktionen mit pessimistischen Locks extrem kurz halten, um Deadlocks zu vermeiden!</a:t>
             </a:r>
           </a:p>
         </p:txBody>
@@ -11242,7 +12861,7 @@
             <a:avLst/>
           </a:prstGeom>
           <a:solidFill>
-            <a:srgbClr val="2563EB"/>
+            <a:srgbClr val="DC2626"/>
           </a:solidFill>
           <a:ln>
             <a:noFill/>
@@ -11287,7 +12906,7 @@
           <a:noFill/>
         </p:spPr>
         <p:txBody>
-          <a:bodyPr wrap="square">
+          <a:bodyPr wrap="square" lIns="0" rIns="0" tIns="0" bIns="0">
             <a:spAutoFit/>
           </a:bodyPr>
           <a:lstStyle/>
@@ -11295,13 +12914,13 @@
             <a:pPr>
               <a:defRPr sz="1100" b="1">
                 <a:solidFill>
-                  <a:srgbClr val="2563EB"/>
-                </a:solidFill>
-                <a:latin typeface="Segoe UI"/>
-              </a:defRPr>
-            </a:pPr>
-            <a:r>
-              <a:t>TROUBLESHOOTING</a:t>
+                  <a:srgbClr val="DC2626"/>
+                </a:solidFill>
+                <a:latin typeface="Segoe UI"/>
+              </a:defRPr>
+            </a:pPr>
+            <a:r>
+              <a:t>TROUBLESHOOTING &amp; LIFECYCLE</a:t>
             </a:r>
           </a:p>
         </p:txBody>
@@ -11323,13 +12942,13 @@
           <a:noFill/>
         </p:spPr>
         <p:txBody>
-          <a:bodyPr wrap="square">
+          <a:bodyPr wrap="square" lIns="0" rIns="0" tIns="0" bIns="0">
             <a:spAutoFit/>
           </a:bodyPr>
           <a:lstStyle/>
           <a:p>
             <a:pPr>
-              <a:defRPr sz="2200" b="1">
+              <a:defRPr sz="2100" b="1">
                 <a:solidFill>
                   <a:srgbClr val="1E293B"/>
                 </a:solidFill>
@@ -11337,7 +12956,7 @@
               </a:defRPr>
             </a:pPr>
             <a:r>
-              <a:t>1.6 MappedSuperclass &amp; Derby Lock-Verhalten</a:t>
+              <a:t>1.6 Transiente &amp; Detached Entity Ausnahmen</a:t>
             </a:r>
           </a:p>
         </p:txBody>
@@ -11351,7 +12970,7 @@
         <p:spPr>
           <a:xfrm>
             <a:off x="731520" y="1463040"/>
-            <a:ext cx="5212080" cy="4754880"/>
+            <a:ext cx="5212080" cy="4846320"/>
           </a:xfrm>
           <a:prstGeom prst="roundRect">
             <a:avLst/>
@@ -11396,7 +13015,7 @@
         <p:spPr>
           <a:xfrm>
             <a:off x="914400" y="1645920"/>
-            <a:ext cx="4846320" cy="4389120"/>
+            <a:ext cx="4846320" cy="4480560"/>
           </a:xfrm>
           <a:prstGeom prst="rect">
             <a:avLst/>
@@ -11411,40 +13030,40 @@
           <a:p>
             <a:pPr>
               <a:spcAft>
+                <a:spcPts val="400"/>
+              </a:spcAft>
+              <a:defRPr sz="1400" b="1">
+                <a:solidFill>
+                  <a:srgbClr val="DC2626"/>
+                </a:solidFill>
+              </a:defRPr>
+            </a:pPr>
+            <a:r>
+              <a:t>TransientPropertyValueException</a:t>
+            </a:r>
+          </a:p>
+          <a:p>
+            <a:pPr>
+              <a:spcAft>
+                <a:spcPts val="800"/>
+              </a:spcAft>
+              <a:defRPr sz="950">
+                <a:solidFill>
+                  <a:srgbClr val="1E293B"/>
+                </a:solidFill>
+                <a:latin typeface="Consolas"/>
+              </a:defRPr>
+            </a:pPr>
+            <a:r>
+              <a:t>IllegalStateException: Not-null property references a transient value - transient instance must be saved before current operation</a:t>
+            </a:r>
+          </a:p>
+          <a:p>
+            <a:pPr>
+              <a:spcAft>
                 <a:spcPts val="600"/>
               </a:spcAft>
-              <a:defRPr sz="1400" b="1">
-                <a:solidFill>
-                  <a:srgbClr val="DC2626"/>
-                </a:solidFill>
-              </a:defRPr>
-            </a:pPr>
-            <a:r>
-              <a:t>Fallstrick @MappedSuperclass</a:t>
-            </a:r>
-          </a:p>
-          <a:p>
-            <a:pPr>
-              <a:spcAft>
-                <a:spcPts val="1000"/>
-              </a:spcAft>
-              <a:defRPr sz="1000">
-                <a:solidFill>
-                  <a:srgbClr val="1E293B"/>
-                </a:solidFill>
-                <a:latin typeface="Courier New"/>
-              </a:defRPr>
-            </a:pPr>
-            <a:r>
-              <a:t>java.lang.IllegalArgumentException: Not an entity / Unknown entity: AbstractBusinessObject</a:t>
-            </a:r>
-          </a:p>
-          <a:p>
-            <a:pPr>
-              <a:spcAft>
-                <a:spcPts val="800"/>
-              </a:spcAft>
-              <a:defRPr sz="1200">
+              <a:defRPr sz="1150">
                 <a:solidFill>
                   <a:srgbClr val="0F172A"/>
                 </a:solidFill>
@@ -11452,15 +13071,15 @@
               </a:defRPr>
             </a:pPr>
             <a:r>
-              <a:t>• @MappedSuperclass ist KEINE Entity und besitzt keine eigene Tabelle.</a:t>
-            </a:r>
-          </a:p>
-          <a:p>
-            <a:pPr>
-              <a:spcAft>
-                <a:spcPts val="800"/>
-              </a:spcAft>
-              <a:defRPr sz="1200">
+              <a:t>• Ursache: Eine gemanagte Entity verweist auf ein neu erzeugtes (transientes) Objekt, ohne dass CascadeType.PERSIST oder CascadeType.ALL aktiv ist.</a:t>
+            </a:r>
+          </a:p>
+          <a:p>
+            <a:pPr>
+              <a:spcAft>
+                <a:spcPts val="600"/>
+              </a:spcAft>
+              <a:defRPr sz="1150">
                 <a:solidFill>
                   <a:srgbClr val="0F172A"/>
                 </a:solidFill>
@@ -11468,39 +13087,7 @@
               </a:defRPr>
             </a:pPr>
             <a:r>
-              <a:t>• em.find(AbstractBusinessObject.class, id) ist unzulässig!</a:t>
-            </a:r>
-          </a:p>
-          <a:p>
-            <a:pPr>
-              <a:spcAft>
-                <a:spcPts val="800"/>
-              </a:spcAft>
-              <a:defRPr sz="1200">
-                <a:solidFill>
-                  <a:srgbClr val="0F172A"/>
-                </a:solidFill>
-                <a:latin typeface="Segoe UI"/>
-              </a:defRPr>
-            </a:pPr>
-            <a:r>
-              <a:t>• Lösung: Immer die konkrete Unterklasse (z.B. em.find(Truck.class, id)) übergeben.</a:t>
-            </a:r>
-          </a:p>
-          <a:p>
-            <a:pPr>
-              <a:spcAft>
-                <a:spcPts val="800"/>
-              </a:spcAft>
-              <a:defRPr sz="1200">
-                <a:solidFill>
-                  <a:srgbClr val="0F172A"/>
-                </a:solidFill>
-                <a:latin typeface="Segoe UI"/>
-              </a:defRPr>
-            </a:pPr>
-            <a:r>
-              <a:t>• Für polymorphe Abfragen muss eine echte Vererbungsstrategie (JOINED oder SINGLE_TABLE) gewählt werden.</a:t>
+              <a:t>• Lösung: Kindobjekt explizit mit em.persist() speichern oder Kaskadierung konfigurieren.</a:t>
             </a:r>
           </a:p>
         </p:txBody>
@@ -11514,17 +13101,17 @@
         <p:spPr>
           <a:xfrm>
             <a:off x="6217920" y="1463040"/>
-            <a:ext cx="5212080" cy="4754880"/>
+            <a:ext cx="5212080" cy="4846320"/>
           </a:xfrm>
           <a:prstGeom prst="roundRect">
             <a:avLst/>
           </a:prstGeom>
           <a:solidFill>
-            <a:srgbClr val="FFFFFF"/>
+            <a:srgbClr val="F0FDF4"/>
           </a:solidFill>
           <a:ln w="19050">
             <a:solidFill>
-              <a:srgbClr val="E2E8F0"/>
+              <a:srgbClr val="BBF7D0"/>
             </a:solidFill>
           </a:ln>
         </p:spPr>
@@ -11559,7 +13146,7 @@
         <p:spPr>
           <a:xfrm>
             <a:off x="6400800" y="1645920"/>
-            <a:ext cx="4846320" cy="4389120"/>
+            <a:ext cx="4846320" cy="4480560"/>
           </a:xfrm>
           <a:prstGeom prst="rect">
             <a:avLst/>
@@ -11574,16 +13161,48 @@
           <a:p>
             <a:pPr>
               <a:spcAft>
+                <a:spcPts val="400"/>
+              </a:spcAft>
+              <a:defRPr sz="1400" b="1">
+                <a:solidFill>
+                  <a:srgbClr val="0D9488"/>
+                </a:solidFill>
+              </a:defRPr>
+            </a:pPr>
+            <a:r>
+              <a:t>Detached Entity passed to persist</a:t>
+            </a:r>
+          </a:p>
+          <a:p>
+            <a:pPr>
+              <a:spcAft>
+                <a:spcPts val="800"/>
+              </a:spcAft>
+              <a:defRPr sz="950">
+                <a:solidFill>
+                  <a:srgbClr val="1E293B"/>
+                </a:solidFill>
+                <a:latin typeface="Consolas"/>
+              </a:defRPr>
+            </a:pPr>
+            <a:r>
+              <a:t>PersistenceException: detached entity passed to persist: net.rentacar.model.Vehicle</a:t>
+            </a:r>
+          </a:p>
+          <a:p>
+            <a:pPr>
+              <a:spcAft>
                 <a:spcPts val="600"/>
               </a:spcAft>
-              <a:defRPr sz="1400" b="1">
-                <a:solidFill>
-                  <a:srgbClr val="D97706"/>
-                </a:solidFill>
-              </a:defRPr>
-            </a:pPr>
-            <a:r>
-              <a:t>Derby-spezifische Fallstricke</a:t>
+              <a:defRPr sz="1150">
+                <a:solidFill>
+                  <a:srgbClr val="0F172A"/>
+                </a:solidFill>
+                <a:latin typeface="Segoe UI"/>
+              </a:defRPr>
+            </a:pPr>
+            <a:r>
+              <a:t>• Ursache: Aufruf von em.persist(entity) auf einem Objekt, das bereits eine ID besitzt und aus einer früheren Session stammt.</a:t>
             </a:r>
           </a:p>
           <a:p>
@@ -11591,7 +13210,7 @@
               <a:spcAft>
                 <a:spcPts val="600"/>
               </a:spcAft>
-              <a:defRPr sz="1100">
+              <a:defRPr sz="1150">
                 <a:solidFill>
                   <a:srgbClr val="0F172A"/>
                 </a:solidFill>
@@ -11599,7 +13218,7 @@
               </a:defRPr>
             </a:pPr>
             <a:r>
-              <a:t>• 1. LockTimeoutException bei parallelen EntityManagern:</a:t>
+              <a:t>• Lösung: Verwende em.merge(detachedEntity). Wichtig: merge() modifiziert nicht die übergebene Instanz, sondern liefert eine NEUE gemanagte Referenz zurück:</a:t>
             </a:r>
           </a:p>
           <a:p>
@@ -11607,7 +13226,7 @@
               <a:spcAft>
                 <a:spcPts val="600"/>
               </a:spcAft>
-              <a:defRPr sz="1100">
+              <a:defRPr sz="1150">
                 <a:solidFill>
                   <a:srgbClr val="0F172A"/>
                 </a:solidFill>
@@ -11615,87 +13234,7 @@
               </a:defRPr>
             </a:pPr>
             <a:r>
-              <a:t>•    - Derby sperrt Tabellensegmente restriktiv.</a:t>
-            </a:r>
-          </a:p>
-          <a:p>
-            <a:pPr>
-              <a:spcAft>
-                <a:spcPts val="600"/>
-              </a:spcAft>
-              <a:defRPr sz="1100">
-                <a:solidFill>
-                  <a:srgbClr val="0F172A"/>
-                </a:solidFill>
-                <a:latin typeface="Segoe UI"/>
-              </a:defRPr>
-            </a:pPr>
-            <a:r>
-              <a:t>•    - Wenn Transaktion 1 per persist/flush schreibt, blockiert Transaktion 2 beim Lesen.</a:t>
-            </a:r>
-          </a:p>
-          <a:p>
-            <a:pPr>
-              <a:spcAft>
-                <a:spcPts val="600"/>
-              </a:spcAft>
-              <a:defRPr sz="1100">
-                <a:solidFill>
-                  <a:srgbClr val="0F172A"/>
-                </a:solidFill>
-                <a:latin typeface="Segoe UI"/>
-              </a:defRPr>
-            </a:pPr>
-            <a:r>
-              <a:t>•    - Lösung: Transaktionen immer zügig mit commit() oder rollback() abschließen.</a:t>
-            </a:r>
-          </a:p>
-          <a:p>
-            <a:pPr>
-              <a:spcAft>
-                <a:spcPts val="600"/>
-              </a:spcAft>
-              <a:defRPr sz="1100">
-                <a:solidFill>
-                  <a:srgbClr val="0F172A"/>
-                </a:solidFill>
-                <a:latin typeface="Segoe UI"/>
-              </a:defRPr>
-            </a:pPr>
-            <a:r>
-              <a:t>• 2. DDL-Warnungen beim Start (create-drop):</a:t>
-            </a:r>
-          </a:p>
-          <a:p>
-            <a:pPr>
-              <a:spcAft>
-                <a:spcPts val="600"/>
-              </a:spcAft>
-              <a:defRPr sz="1100">
-                <a:solidFill>
-                  <a:srgbClr val="0F172A"/>
-                </a:solidFill>
-                <a:latin typeface="Segoe UI"/>
-              </a:defRPr>
-            </a:pPr>
-            <a:r>
-              <a:t>•    - DROP TABLE ... cannot be performed because it does not exist.</a:t>
-            </a:r>
-          </a:p>
-          <a:p>
-            <a:pPr>
-              <a:spcAft>
-                <a:spcPts val="600"/>
-              </a:spcAft>
-              <a:defRPr sz="1100">
-                <a:solidFill>
-                  <a:srgbClr val="0F172A"/>
-                </a:solidFill>
-                <a:latin typeface="Segoe UI"/>
-              </a:defRPr>
-            </a:pPr>
-            <a:r>
-              <a:t>•    - Normal bei create-drop (Hibernate versucht alte Tabellen zu löschen).</a:t>
+              <a:t>• Vehicle managed = em.merge(detachedVehicle);</a:t>
             </a:r>
           </a:p>
         </p:txBody>
@@ -11741,7 +13280,7 @@
             <a:avLst/>
           </a:prstGeom>
           <a:solidFill>
-            <a:srgbClr val="2563EB"/>
+            <a:srgbClr val="DC2626"/>
           </a:solidFill>
           <a:ln>
             <a:noFill/>
@@ -11786,7 +13325,7 @@
           <a:noFill/>
         </p:spPr>
         <p:txBody>
-          <a:bodyPr wrap="square">
+          <a:bodyPr wrap="square" lIns="0" rIns="0" tIns="0" bIns="0">
             <a:spAutoFit/>
           </a:bodyPr>
           <a:lstStyle/>
@@ -11794,13 +13333,13 @@
             <a:pPr>
               <a:defRPr sz="1100" b="1">
                 <a:solidFill>
-                  <a:srgbClr val="2563EB"/>
-                </a:solidFill>
-                <a:latin typeface="Segoe UI"/>
-              </a:defRPr>
-            </a:pPr>
-            <a:r>
-              <a:t>ARCHITECTURE &amp; BEST PRACTICES</a:t>
+                  <a:srgbClr val="DC2626"/>
+                </a:solidFill>
+                <a:latin typeface="Segoe UI"/>
+              </a:defRPr>
+            </a:pPr>
+            <a:r>
+              <a:t>TROUBLESHOOTING &amp; VALIDATION</a:t>
             </a:r>
           </a:p>
         </p:txBody>
@@ -11822,13 +13361,13 @@
           <a:noFill/>
         </p:spPr>
         <p:txBody>
-          <a:bodyPr wrap="square">
+          <a:bodyPr wrap="square" lIns="0" rIns="0" tIns="0" bIns="0">
             <a:spAutoFit/>
           </a:bodyPr>
           <a:lstStyle/>
           <a:p>
             <a:pPr>
-              <a:defRPr sz="2200" b="1">
+              <a:defRPr sz="2100" b="1">
                 <a:solidFill>
                   <a:srgbClr val="1E293B"/>
                 </a:solidFill>
@@ -11836,7 +13375,7 @@
               </a:defRPr>
             </a:pPr>
             <a:r>
-              <a:t>2.1 Assoziationen: FetchType &amp; Ownership</a:t>
+              <a:t>1.7 Bean Validation &amp; Constraints</a:t>
             </a:r>
           </a:p>
         </p:txBody>
@@ -11850,7 +13389,7 @@
         <p:spPr>
           <a:xfrm>
             <a:off x="731520" y="1463040"/>
-            <a:ext cx="5212080" cy="4754880"/>
+            <a:ext cx="5212080" cy="4846320"/>
           </a:xfrm>
           <a:prstGeom prst="roundRect">
             <a:avLst/>
@@ -11895,7 +13434,7 @@
         <p:spPr>
           <a:xfrm>
             <a:off x="914400" y="1645920"/>
-            <a:ext cx="4846320" cy="4389120"/>
+            <a:ext cx="4846320" cy="4480560"/>
           </a:xfrm>
           <a:prstGeom prst="rect">
             <a:avLst/>
@@ -11910,24 +13449,40 @@
           <a:p>
             <a:pPr>
               <a:spcAft>
+                <a:spcPts val="400"/>
+              </a:spcAft>
+              <a:defRPr sz="1400" b="1">
+                <a:solidFill>
+                  <a:srgbClr val="DC2626"/>
+                </a:solidFill>
+              </a:defRPr>
+            </a:pPr>
+            <a:r>
+              <a:t>ConstraintViolationException beim Flush</a:t>
+            </a:r>
+          </a:p>
+          <a:p>
+            <a:pPr>
+              <a:spcAft>
                 <a:spcPts val="800"/>
               </a:spcAft>
-              <a:defRPr sz="1400" b="1">
+              <a:defRPr sz="1000">
                 <a:solidFill>
                   <a:srgbClr val="1E293B"/>
                 </a:solidFill>
-              </a:defRPr>
-            </a:pPr>
-            <a:r>
-              <a:t>JPA Default Fetch-Typen &amp; Empfehlungen</a:t>
-            </a:r>
-          </a:p>
-          <a:p>
-            <a:pPr>
-              <a:spcAft>
-                <a:spcPts val="800"/>
-              </a:spcAft>
-              <a:defRPr sz="1200">
+                <a:latin typeface="Consolas"/>
+              </a:defRPr>
+            </a:pPr>
+            <a:r>
+              <a:t>jakarta.validation.ConstraintViolationException: Validation failed for [net.rentacar.model.User]</a:t>
+            </a:r>
+          </a:p>
+          <a:p>
+            <a:pPr>
+              <a:spcAft>
+                <a:spcPts val="600"/>
+              </a:spcAft>
+              <a:defRPr sz="1150">
                 <a:solidFill>
                   <a:srgbClr val="0F172A"/>
                 </a:solidFill>
@@ -11935,15 +13490,15 @@
               </a:defRPr>
             </a:pPr>
             <a:r>
-              <a:t>• @OneToMany: JPA-Default = LAZY  -&gt; IMMER so belassen!</a:t>
-            </a:r>
-          </a:p>
-          <a:p>
-            <a:pPr>
-              <a:spcAft>
-                <a:spcPts val="800"/>
-              </a:spcAft>
-              <a:defRPr sz="1200">
+              <a:t>• Zeitpunkt: JPA führt Bean Validation (@NotNull, @Size, @Pattern) standardmäßig automatisch beim PrePersist und PreUpdate (vor dem SQL Flush) aus.</a:t>
+            </a:r>
+          </a:p>
+          <a:p>
+            <a:pPr>
+              <a:spcAft>
+                <a:spcPts val="600"/>
+              </a:spcAft>
+              <a:defRPr sz="1150">
                 <a:solidFill>
                   <a:srgbClr val="0F172A"/>
                 </a:solidFill>
@@ -11951,63 +13506,7 @@
               </a:defRPr>
             </a:pPr>
             <a:r>
-              <a:t>• @ManyToMany: JPA-Default = LAZY  -&gt; IMMER so belassen!</a:t>
-            </a:r>
-          </a:p>
-          <a:p>
-            <a:pPr>
-              <a:spcAft>
-                <a:spcPts val="800"/>
-              </a:spcAft>
-              <a:defRPr sz="1200">
-                <a:solidFill>
-                  <a:srgbClr val="0F172A"/>
-                </a:solidFill>
-                <a:latin typeface="Segoe UI"/>
-              </a:defRPr>
-            </a:pPr>
-            <a:r>
-              <a:t>• @ManyToOne: JPA-Default = EAGER  -&gt; GEFÄHRLICH! In der Praxis immer explizit auf LAZY umstellen:</a:t>
-            </a:r>
-          </a:p>
-          <a:p>
-            <a:pPr>
-              <a:spcAft>
-                <a:spcPts val="800"/>
-              </a:spcAft>
-              <a:defRPr sz="1200">
-                <a:solidFill>
-                  <a:srgbClr val="0F172A"/>
-                </a:solidFill>
-                <a:latin typeface="Segoe UI"/>
-              </a:defRPr>
-            </a:pPr>
-            <a:r>
-              <a:t>• @ManyToOne(fetch = FetchType.LAZY)</a:t>
-            </a:r>
-            <a:br/>
-            <a:r>
-              <a:t>@JoinColumn(name = "SHOP_ID")</a:t>
-            </a:r>
-            <a:br/>
-            <a:r>
-              <a:t>private Shop shop;</a:t>
-            </a:r>
-          </a:p>
-          <a:p>
-            <a:pPr>
-              <a:spcAft>
-                <a:spcPts val="800"/>
-              </a:spcAft>
-              <a:defRPr sz="1200">
-                <a:solidFill>
-                  <a:srgbClr val="0F172A"/>
-                </a:solidFill>
-                <a:latin typeface="Segoe UI"/>
-              </a:defRPr>
-            </a:pPr>
-            <a:r>
-              <a:t>• @OneToOne: JPA-Default = EAGER  -&gt; Auf LAZY umstellen (optional = false beachten).</a:t>
+              <a:t>• Gefahr: Fehler treten erst beim commit() oder manuellen flush() auf, weit entfernt von der setXxx()-Zuweisung!</a:t>
             </a:r>
           </a:p>
         </p:txBody>
@@ -12021,17 +13520,17 @@
         <p:spPr>
           <a:xfrm>
             <a:off x="6217920" y="1463040"/>
-            <a:ext cx="5212080" cy="4754880"/>
+            <a:ext cx="5212080" cy="4846320"/>
           </a:xfrm>
           <a:prstGeom prst="roundRect">
             <a:avLst/>
           </a:prstGeom>
           <a:solidFill>
-            <a:srgbClr val="FFFFFF"/>
+            <a:srgbClr val="F0FDF4"/>
           </a:solidFill>
           <a:ln w="19050">
             <a:solidFill>
-              <a:srgbClr val="E2E8F0"/>
+              <a:srgbClr val="BBF7D0"/>
             </a:solidFill>
           </a:ln>
         </p:spPr>
@@ -12066,7 +13565,7 @@
         <p:spPr>
           <a:xfrm>
             <a:off x="6400800" y="1645920"/>
-            <a:ext cx="4846320" cy="4389120"/>
+            <a:ext cx="4846320" cy="4480560"/>
           </a:xfrm>
           <a:prstGeom prst="rect">
             <a:avLst/>
@@ -12081,16 +13580,60 @@
           <a:p>
             <a:pPr>
               <a:spcAft>
+                <a:spcPts val="600"/>
+              </a:spcAft>
+              <a:defRPr sz="1400" b="1">
+                <a:solidFill>
+                  <a:srgbClr val="0D9488"/>
+                </a:solidFill>
+              </a:defRPr>
+            </a:pPr>
+            <a:r>
+              <a:t>Best Practices &amp; Details auslesen</a:t>
+            </a:r>
+          </a:p>
+          <a:p>
+            <a:pPr>
+              <a:spcAft>
                 <a:spcPts val="800"/>
               </a:spcAft>
-              <a:defRPr sz="1400" b="1">
-                <a:solidFill>
-                  <a:srgbClr val="2563EB"/>
-                </a:solidFill>
-              </a:defRPr>
-            </a:pPr>
-            <a:r>
-              <a:t>Owning Side vs. Inverse (mappedBy) Side</a:t>
+              <a:defRPr sz="1000">
+                <a:solidFill>
+                  <a:srgbClr val="1E293B"/>
+                </a:solidFill>
+                <a:latin typeface="Consolas"/>
+              </a:defRPr>
+            </a:pPr>
+            <a:r>
+              <a:t>try {</a:t>
+            </a:r>
+            <a:br/>
+            <a:r>
+              <a:t>    em.flush();</a:t>
+            </a:r>
+            <a:br/>
+            <a:r>
+              <a:t>} catch (ConstraintViolationException e) {</a:t>
+            </a:r>
+            <a:br/>
+            <a:r>
+              <a:t>    for (ConstraintViolation&lt;?&gt; v : e.getConstraintViolations()) {</a:t>
+            </a:r>
+            <a:br/>
+            <a:r>
+              <a:t>        log.error("Feld '{}' {}: {}", </a:t>
+            </a:r>
+            <a:br/>
+            <a:r>
+              <a:t>            v.getPropertyPath(), v.getMessage(), v.getInvalidValue());</a:t>
+            </a:r>
+            <a:br/>
+            <a:r>
+              <a:t>    }</a:t>
+            </a:r>
+            <a:br/>
+            <a:r>
+              <a:t>}</a:t>
             </a:r>
           </a:p>
           <a:p>
@@ -12098,7 +13641,7 @@
               <a:spcAft>
                 <a:spcPts val="600"/>
               </a:spcAft>
-              <a:defRPr sz="1200">
+              <a:defRPr sz="1150">
                 <a:solidFill>
                   <a:srgbClr val="0F172A"/>
                 </a:solidFill>
@@ -12106,119 +13649,7 @@
               </a:defRPr>
             </a:pPr>
             <a:r>
-              <a:t>• Owning Side (Besitzerseite):</a:t>
-            </a:r>
-          </a:p>
-          <a:p>
-            <a:pPr>
-              <a:spcAft>
-                <a:spcPts val="600"/>
-              </a:spcAft>
-              <a:defRPr sz="1200">
-                <a:solidFill>
-                  <a:srgbClr val="0F172A"/>
-                </a:solidFill>
-                <a:latin typeface="Segoe UI"/>
-              </a:defRPr>
-            </a:pPr>
-            <a:r>
-              <a:t>•   - Trägt die @JoinColumn(name='...') Annotation.</a:t>
-            </a:r>
-          </a:p>
-          <a:p>
-            <a:pPr>
-              <a:spcAft>
-                <a:spcPts val="600"/>
-              </a:spcAft>
-              <a:defRPr sz="1200">
-                <a:solidFill>
-                  <a:srgbClr val="0F172A"/>
-                </a:solidFill>
-                <a:latin typeface="Segoe UI"/>
-              </a:defRPr>
-            </a:pPr>
-            <a:r>
-              <a:t>•   - Hält den physischen Fremdschlüssel (FK) in der DB-Tabelle.</a:t>
-            </a:r>
-          </a:p>
-          <a:p>
-            <a:pPr>
-              <a:spcAft>
-                <a:spcPts val="600"/>
-              </a:spcAft>
-              <a:defRPr sz="1200">
-                <a:solidFill>
-                  <a:srgbClr val="0F172A"/>
-                </a:solidFill>
-                <a:latin typeface="Segoe UI"/>
-              </a:defRPr>
-            </a:pPr>
-            <a:r>
-              <a:t>•   - Nur Änderungen an dieser Seite werden von JPA in SQL UPDATEs/INSERTs übersetzt!</a:t>
-            </a:r>
-          </a:p>
-          <a:p>
-            <a:pPr>
-              <a:spcAft>
-                <a:spcPts val="600"/>
-              </a:spcAft>
-              <a:defRPr sz="1200">
-                <a:solidFill>
-                  <a:srgbClr val="0F172A"/>
-                </a:solidFill>
-                <a:latin typeface="Segoe UI"/>
-              </a:defRPr>
-            </a:pPr>
-            <a:r>
-              <a:t>• Inverse Side (Spiegelseite):</a:t>
-            </a:r>
-          </a:p>
-          <a:p>
-            <a:pPr>
-              <a:spcAft>
-                <a:spcPts val="600"/>
-              </a:spcAft>
-              <a:defRPr sz="1200">
-                <a:solidFill>
-                  <a:srgbClr val="0F172A"/>
-                </a:solidFill>
-                <a:latin typeface="Segoe UI"/>
-              </a:defRPr>
-            </a:pPr>
-            <a:r>
-              <a:t>•   - Trägt mappedBy = "&lt;attributNameInOwningEntity&gt;".</a:t>
-            </a:r>
-          </a:p>
-          <a:p>
-            <a:pPr>
-              <a:spcAft>
-                <a:spcPts val="600"/>
-              </a:spcAft>
-              <a:defRPr sz="1200">
-                <a:solidFill>
-                  <a:srgbClr val="0F172A"/>
-                </a:solidFill>
-                <a:latin typeface="Segoe UI"/>
-              </a:defRPr>
-            </a:pPr>
-            <a:r>
-              <a:t>•   - Darf NIEMALS ein @JoinColumn besitzen.</a:t>
-            </a:r>
-          </a:p>
-          <a:p>
-            <a:pPr>
-              <a:spcAft>
-                <a:spcPts val="600"/>
-              </a:spcAft>
-              <a:defRPr sz="1200">
-                <a:solidFill>
-                  <a:srgbClr val="0F172A"/>
-                </a:solidFill>
-                <a:latin typeface="Segoe UI"/>
-              </a:defRPr>
-            </a:pPr>
-            <a:r>
-              <a:t>•   - Dient rein der Navigation im Objektmodell.</a:t>
+              <a:t>• Tipp: Validierungs-Annotationen steuern bei DDL-Generierung auch das DB-Schema (@NotNull -&gt; NOT NULL Spalte).</a:t>
             </a:r>
           </a:p>
         </p:txBody>
